--- a/entrega_practica1/Soporte_demo_Easy_Eats.pptx
+++ b/entrega_practica1/Soporte_demo_Easy_Eats.pptx
@@ -1,110 +1,119 @@
 
 <file path=ppt/presentation.xml><?xml version="1.0" encoding="utf-8"?>
-<p:presentation xmlns:a="http://schemas.openxmlformats.org/drawingml/2006/main" xmlns:r="http://schemas.openxmlformats.org/officeDocument/2006/relationships" xmlns:p="http://schemas.openxmlformats.org/presentationml/2006/main">
+<p:presentation xmlns:p="http://schemas.openxmlformats.org/presentationml/2006/main">
   <p:sldMasterIdLst>
-    <p:sldMasterId id="2147483648" r:id="rId1"/>
+    <p:sldMasterId xmlns:r="http://schemas.openxmlformats.org/officeDocument/2006/relationships" id="2147483648" r:id="Rf66ca1d6a6a74393"/>
   </p:sldMasterIdLst>
   <p:notesMasterIdLst>
-    <p:notesMasterId r:id="rId4"/>
+    <p:notesMasterId xmlns:r="http://schemas.openxmlformats.org/officeDocument/2006/relationships" r:id="R0a5921e7c0314025"/>
   </p:notesMasterIdLst>
   <p:sldIdLst>
-    <p:sldId id="256" r:id="rId2"/>
-    <p:sldId id="257" r:id="rId3"/>
+    <p:sldId xmlns:r="http://schemas.openxmlformats.org/officeDocument/2006/relationships" id="256" r:id="R6e4d913a932a4e1b"/>
+    <p:sldId xmlns:r="http://schemas.openxmlformats.org/officeDocument/2006/relationships" id="257" r:id="R242c687bb1e14ea6"/>
   </p:sldIdLst>
   <p:sldSz cx="12192000" cy="6858000"/>
   <p:notesSz cx="6858000" cy="9144000"/>
   <p:defaultTextStyle>
-    <a:defPPr>
-      <a:defRPr lang="es-ES"/>
+    <a:defPPr xmlns:a="http://schemas.openxmlformats.org/drawingml/2006/main">
+      <a:buNone/>
     </a:defPPr>
-    <a:lvl1pPr marL="0" algn="l" defTabSz="914400" rtl="0" eaLnBrk="1" latinLnBrk="0" hangingPunct="1">
+    <a:lvl1pPr xmlns:a="http://schemas.openxmlformats.org/drawingml/2006/main" marL="0" algn="l" defTabSz="914400">
+      <a:buNone/>
       <a:defRPr sz="1800" kern="1200">
         <a:solidFill>
           <a:schemeClr val="tx1"/>
         </a:solidFill>
         <a:latin typeface="+mn-lt"/>
-        <a:ea typeface="+mn-ea"/>
-        <a:cs typeface="+mn-cs"/>
+        <a:ea typeface="+mn-lt"/>
+        <a:cs typeface="+mn-lt"/>
       </a:defRPr>
     </a:lvl1pPr>
-    <a:lvl2pPr marL="457200" algn="l" defTabSz="914400" rtl="0" eaLnBrk="1" latinLnBrk="0" hangingPunct="1">
+    <a:lvl2pPr xmlns:a="http://schemas.openxmlformats.org/drawingml/2006/main" marL="457200" algn="l" defTabSz="914400">
+      <a:buNone/>
       <a:defRPr sz="1800" kern="1200">
         <a:solidFill>
           <a:schemeClr val="tx1"/>
         </a:solidFill>
         <a:latin typeface="+mn-lt"/>
-        <a:ea typeface="+mn-ea"/>
-        <a:cs typeface="+mn-cs"/>
+        <a:ea typeface="+mn-lt"/>
+        <a:cs typeface="+mn-lt"/>
       </a:defRPr>
     </a:lvl2pPr>
-    <a:lvl3pPr marL="914400" algn="l" defTabSz="914400" rtl="0" eaLnBrk="1" latinLnBrk="0" hangingPunct="1">
+    <a:lvl3pPr xmlns:a="http://schemas.openxmlformats.org/drawingml/2006/main" marL="914400" algn="l" defTabSz="914400">
+      <a:buNone/>
       <a:defRPr sz="1800" kern="1200">
         <a:solidFill>
           <a:schemeClr val="tx1"/>
         </a:solidFill>
         <a:latin typeface="+mn-lt"/>
-        <a:ea typeface="+mn-ea"/>
-        <a:cs typeface="+mn-cs"/>
+        <a:ea typeface="+mn-lt"/>
+        <a:cs typeface="+mn-lt"/>
       </a:defRPr>
     </a:lvl3pPr>
-    <a:lvl4pPr marL="1371600" algn="l" defTabSz="914400" rtl="0" eaLnBrk="1" latinLnBrk="0" hangingPunct="1">
+    <a:lvl4pPr xmlns:a="http://schemas.openxmlformats.org/drawingml/2006/main" marL="1371600" algn="l" defTabSz="914400">
+      <a:buNone/>
       <a:defRPr sz="1800" kern="1200">
         <a:solidFill>
           <a:schemeClr val="tx1"/>
         </a:solidFill>
         <a:latin typeface="+mn-lt"/>
-        <a:ea typeface="+mn-ea"/>
-        <a:cs typeface="+mn-cs"/>
+        <a:ea typeface="+mn-lt"/>
+        <a:cs typeface="+mn-lt"/>
       </a:defRPr>
     </a:lvl4pPr>
-    <a:lvl5pPr marL="1828800" algn="l" defTabSz="914400" rtl="0" eaLnBrk="1" latinLnBrk="0" hangingPunct="1">
+    <a:lvl5pPr xmlns:a="http://schemas.openxmlformats.org/drawingml/2006/main" marL="1828800" algn="l" defTabSz="914400">
+      <a:buNone/>
       <a:defRPr sz="1800" kern="1200">
         <a:solidFill>
           <a:schemeClr val="tx1"/>
         </a:solidFill>
         <a:latin typeface="+mn-lt"/>
-        <a:ea typeface="+mn-ea"/>
-        <a:cs typeface="+mn-cs"/>
+        <a:ea typeface="+mn-lt"/>
+        <a:cs typeface="+mn-lt"/>
       </a:defRPr>
     </a:lvl5pPr>
-    <a:lvl6pPr marL="2286000" algn="l" defTabSz="914400" rtl="0" eaLnBrk="1" latinLnBrk="0" hangingPunct="1">
+    <a:lvl6pPr xmlns:a="http://schemas.openxmlformats.org/drawingml/2006/main" marL="2286000" algn="l" defTabSz="914400">
+      <a:buNone/>
       <a:defRPr sz="1800" kern="1200">
         <a:solidFill>
           <a:schemeClr val="tx1"/>
         </a:solidFill>
         <a:latin typeface="+mn-lt"/>
-        <a:ea typeface="+mn-ea"/>
-        <a:cs typeface="+mn-cs"/>
+        <a:ea typeface="+mn-lt"/>
+        <a:cs typeface="+mn-lt"/>
       </a:defRPr>
     </a:lvl6pPr>
-    <a:lvl7pPr marL="2743200" algn="l" defTabSz="914400" rtl="0" eaLnBrk="1" latinLnBrk="0" hangingPunct="1">
+    <a:lvl7pPr xmlns:a="http://schemas.openxmlformats.org/drawingml/2006/main" marL="2743200" algn="l" defTabSz="914400">
+      <a:buNone/>
       <a:defRPr sz="1800" kern="1200">
         <a:solidFill>
           <a:schemeClr val="tx1"/>
         </a:solidFill>
         <a:latin typeface="+mn-lt"/>
-        <a:ea typeface="+mn-ea"/>
-        <a:cs typeface="+mn-cs"/>
+        <a:ea typeface="+mn-lt"/>
+        <a:cs typeface="+mn-lt"/>
       </a:defRPr>
     </a:lvl7pPr>
-    <a:lvl8pPr marL="3200400" algn="l" defTabSz="914400" rtl="0" eaLnBrk="1" latinLnBrk="0" hangingPunct="1">
+    <a:lvl8pPr xmlns:a="http://schemas.openxmlformats.org/drawingml/2006/main" marL="3200400" algn="l" defTabSz="914400">
+      <a:buNone/>
       <a:defRPr sz="1800" kern="1200">
         <a:solidFill>
           <a:schemeClr val="tx1"/>
         </a:solidFill>
         <a:latin typeface="+mn-lt"/>
-        <a:ea typeface="+mn-ea"/>
-        <a:cs typeface="+mn-cs"/>
+        <a:ea typeface="+mn-lt"/>
+        <a:cs typeface="+mn-lt"/>
       </a:defRPr>
     </a:lvl8pPr>
-    <a:lvl9pPr marL="3657600" algn="l" defTabSz="914400" rtl="0" eaLnBrk="1" latinLnBrk="0" hangingPunct="1">
+    <a:lvl9pPr xmlns:a="http://schemas.openxmlformats.org/drawingml/2006/main" marL="3657600" algn="l" defTabSz="914400">
+      <a:buNone/>
       <a:defRPr sz="1800" kern="1200">
         <a:solidFill>
           <a:schemeClr val="tx1"/>
         </a:solidFill>
         <a:latin typeface="+mn-lt"/>
-        <a:ea typeface="+mn-ea"/>
-        <a:cs typeface="+mn-cs"/>
+        <a:ea typeface="+mn-lt"/>
+        <a:cs typeface="+mn-lt"/>
       </a:defRPr>
     </a:lvl9pPr>
   </p:defaultTextStyle>
@@ -112,11 +121,11 @@
 </file>
 
 <file path=ppt/notesMasters/notesMaster1.xml><?xml version="1.0" encoding="utf-8"?>
-<p:notesMaster xmlns:a="http://schemas.openxmlformats.org/drawingml/2006/main" xmlns:r="http://schemas.openxmlformats.org/officeDocument/2006/relationships" xmlns:p="http://schemas.openxmlformats.org/presentationml/2006/main">
+<p:notesMaster xmlns:p="http://schemas.openxmlformats.org/presentationml/2006/main">
   <p:cSld>
     <p:bg>
       <p:bgRef idx="1001">
-        <a:schemeClr val="bg1"/>
+        <a:schemeClr xmlns:a="http://schemas.openxmlformats.org/drawingml/2006/main" val="bg1"/>
       </p:bgRef>
     </p:bg>
     <p:spTree>
@@ -126,164 +135,380 @@
         <p:nvPr/>
       </p:nvGrpSpPr>
       <p:grpSpPr>
-        <a:xfrm>
-          <a:off x="0" y="0"/>
-          <a:ext cx="0" cy="0"/>
-          <a:chOff x="0" y="0"/>
-          <a:chExt cx="0" cy="0"/>
-        </a:xfrm>
+        <a:xfrm xmlns:a="http://schemas.openxmlformats.org/drawingml/2006/main"/>
       </p:grpSpPr>
       <p:sp>
         <p:nvSpPr>
           <p:cNvPr id="2" name="Header Placeholder"/>
-          <p:cNvSpPr>
-            <a:spLocks noGrp="1"/>
-          </p:cNvSpPr>
+          <p:cNvSpPr/>
           <p:nvPr>
             <p:ph type="hdr" sz="quarter"/>
           </p:nvPr>
         </p:nvSpPr>
         <p:spPr>
-          <a:prstGeom prst="rect">
+          <a:prstGeom xmlns:a="http://schemas.openxmlformats.org/drawingml/2006/main" prst="rect">
             <a:avLst/>
           </a:prstGeom>
         </p:spPr>
         <p:txBody>
-          <a:bodyPr/>
-          <a:lstStyle/>
-          <a:p>
-            <a:endParaRPr/>
-          </a:p>
+          <a:bodyPr xmlns:a="http://schemas.openxmlformats.org/drawingml/2006/main"/>
+          <a:lstStyle xmlns:a="http://schemas.openxmlformats.org/drawingml/2006/main"/>
+          <a:p xmlns:a="http://schemas.openxmlformats.org/drawingml/2006/main"/>
         </p:txBody>
       </p:sp>
       <p:sp>
         <p:nvSpPr>
           <p:cNvPr id="3" name="Date Placeholder"/>
-          <p:cNvSpPr>
-            <a:spLocks noGrp="1"/>
-          </p:cNvSpPr>
+          <p:cNvSpPr/>
           <p:nvPr>
             <p:ph type="dt" sz="quarter" idx="1"/>
           </p:nvPr>
         </p:nvSpPr>
         <p:spPr>
-          <a:prstGeom prst="rect">
+          <a:prstGeom xmlns:a="http://schemas.openxmlformats.org/drawingml/2006/main" prst="rect">
             <a:avLst/>
           </a:prstGeom>
         </p:spPr>
         <p:txBody>
-          <a:bodyPr/>
-          <a:lstStyle/>
-          <a:p>
-            <a:endParaRPr/>
-          </a:p>
+          <a:bodyPr xmlns:a="http://schemas.openxmlformats.org/drawingml/2006/main"/>
+          <a:lstStyle xmlns:a="http://schemas.openxmlformats.org/drawingml/2006/main"/>
+          <a:p xmlns:a="http://schemas.openxmlformats.org/drawingml/2006/main"/>
         </p:txBody>
       </p:sp>
       <p:sp>
         <p:nvSpPr>
           <p:cNvPr id="4" name="Slide Image Placeholder"/>
-          <p:cNvSpPr>
-            <a:spLocks noGrp="1" noRot="1" noChangeAspect="1"/>
-          </p:cNvSpPr>
+          <p:cNvSpPr/>
           <p:nvPr>
             <p:ph type="sldImg" idx="2"/>
           </p:nvPr>
         </p:nvSpPr>
         <p:spPr>
-          <a:prstGeom prst="rect">
+          <a:prstGeom xmlns:a="http://schemas.openxmlformats.org/drawingml/2006/main" prst="rect">
             <a:avLst/>
           </a:prstGeom>
         </p:spPr>
         <p:txBody>
-          <a:bodyPr/>
-          <a:lstStyle/>
-          <a:p>
-            <a:endParaRPr/>
-          </a:p>
+          <a:bodyPr xmlns:a="http://schemas.openxmlformats.org/drawingml/2006/main"/>
+          <a:lstStyle xmlns:a="http://schemas.openxmlformats.org/drawingml/2006/main"/>
+          <a:p xmlns:a="http://schemas.openxmlformats.org/drawingml/2006/main"/>
         </p:txBody>
       </p:sp>
       <p:sp>
         <p:nvSpPr>
           <p:cNvPr id="5" name="Notes Placeholder"/>
-          <p:cNvSpPr>
-            <a:spLocks noGrp="1"/>
-          </p:cNvSpPr>
+          <p:cNvSpPr/>
           <p:nvPr>
             <p:ph type="body" sz="quarter" idx="3"/>
           </p:nvPr>
         </p:nvSpPr>
         <p:spPr>
-          <a:prstGeom prst="rect">
+          <a:prstGeom xmlns:a="http://schemas.openxmlformats.org/drawingml/2006/main" prst="rect">
             <a:avLst/>
           </a:prstGeom>
         </p:spPr>
         <p:txBody>
-          <a:bodyPr/>
-          <a:lstStyle/>
-          <a:p>
-            <a:endParaRPr/>
-          </a:p>
+          <a:bodyPr xmlns:a="http://schemas.openxmlformats.org/drawingml/2006/main"/>
+          <a:lstStyle xmlns:a="http://schemas.openxmlformats.org/drawingml/2006/main"/>
+          <a:p xmlns:a="http://schemas.openxmlformats.org/drawingml/2006/main"/>
         </p:txBody>
       </p:sp>
       <p:sp>
         <p:nvSpPr>
           <p:cNvPr id="6" name="Footer Placeholder"/>
-          <p:cNvSpPr>
-            <a:spLocks noGrp="1"/>
-          </p:cNvSpPr>
+          <p:cNvSpPr/>
           <p:nvPr>
             <p:ph type="ftr" sz="quarter" idx="4"/>
           </p:nvPr>
         </p:nvSpPr>
         <p:spPr>
-          <a:prstGeom prst="rect">
+          <a:prstGeom xmlns:a="http://schemas.openxmlformats.org/drawingml/2006/main" prst="rect">
             <a:avLst/>
           </a:prstGeom>
         </p:spPr>
         <p:txBody>
-          <a:bodyPr/>
-          <a:lstStyle/>
-          <a:p>
-            <a:endParaRPr/>
-          </a:p>
+          <a:bodyPr xmlns:a="http://schemas.openxmlformats.org/drawingml/2006/main"/>
+          <a:lstStyle xmlns:a="http://schemas.openxmlformats.org/drawingml/2006/main"/>
+          <a:p xmlns:a="http://schemas.openxmlformats.org/drawingml/2006/main"/>
         </p:txBody>
       </p:sp>
       <p:sp>
         <p:nvSpPr>
           <p:cNvPr id="7" name="Slide Number Placeholder"/>
-          <p:cNvSpPr>
-            <a:spLocks noGrp="1"/>
-          </p:cNvSpPr>
+          <p:cNvSpPr/>
           <p:nvPr>
             <p:ph type="sldNum" sz="quarter" idx="5"/>
           </p:nvPr>
         </p:nvSpPr>
         <p:spPr>
-          <a:prstGeom prst="rect">
+          <a:prstGeom xmlns:a="http://schemas.openxmlformats.org/drawingml/2006/main" prst="rect">
             <a:avLst/>
           </a:prstGeom>
         </p:spPr>
         <p:txBody>
-          <a:bodyPr/>
-          <a:lstStyle/>
-          <a:p>
-            <a:endParaRPr/>
-          </a:p>
+          <a:bodyPr xmlns:a="http://schemas.openxmlformats.org/drawingml/2006/main"/>
+          <a:lstStyle xmlns:a="http://schemas.openxmlformats.org/drawingml/2006/main"/>
+          <a:p xmlns:a="http://schemas.openxmlformats.org/drawingml/2006/main"/>
         </p:txBody>
       </p:sp>
     </p:spTree>
   </p:cSld>
   <p:clrMap bg1="lt1" tx1="dk1" bg2="lt2" tx2="dk2" accent1="accent1" accent2="accent2" accent3="accent3" accent4="accent4" accent5="accent5" accent6="accent6" hlink="hlink" folHlink="folHlink"/>
   <p:notesStyle>
-    <a:lvl1pPr marL="0" algn="l" defTabSz="914400" rtl="0" eaLnBrk="1" latinLnBrk="0" hangingPunct="1">
+    <a:lvl1pPr xmlns:a="http://schemas.openxmlformats.org/drawingml/2006/main" marL="0" algn="l" defTabSz="914400" rtl="0" eaLnBrk="1" latinLnBrk="0" hangingPunct="1">
       <a:defRPr sz="1200" kern="1200"/>
     </a:lvl1pPr>
   </p:notesStyle>
 </p:notesMaster>
 </file>
 
+<file path=ppt/notesMasters/theme/theme3.xml><?xml version="1.0" encoding="utf-8"?>
+<a:theme xmlns:a="http://schemas.openxmlformats.org/drawingml/2006/main" name="ChatGPT">
+  <a:themeElements>
+    <a:clrScheme name="ChatGPT">
+      <a:dk1>
+        <a:srgbClr val="000000"/>
+      </a:dk1>
+      <a:lt1>
+        <a:srgbClr val="FFFFFF"/>
+      </a:lt1>
+      <a:dk2>
+        <a:srgbClr val="0E2841"/>
+      </a:dk2>
+      <a:lt2>
+        <a:srgbClr val="E8E8E8"/>
+      </a:lt2>
+      <a:accent1>
+        <a:srgbClr val="156082"/>
+      </a:accent1>
+      <a:accent2>
+        <a:srgbClr val="E97132"/>
+      </a:accent2>
+      <a:accent3>
+        <a:srgbClr val="196B24"/>
+      </a:accent3>
+      <a:accent4>
+        <a:srgbClr val="0F9ED5"/>
+      </a:accent4>
+      <a:accent5>
+        <a:srgbClr val="A02B93"/>
+      </a:accent5>
+      <a:accent6>
+        <a:srgbClr val="4EA72E"/>
+      </a:accent6>
+      <a:hlink>
+        <a:srgbClr val="467886"/>
+      </a:hlink>
+      <a:folHlink>
+        <a:srgbClr val="96607D"/>
+      </a:folHlink>
+    </a:clrScheme>
+    <a:fontScheme name="">
+      <a:majorFont>
+        <a:latin typeface="Aptos"/>
+        <a:ea typeface=""/>
+        <a:cs typeface=""/>
+      </a:majorFont>
+      <a:minorFont>
+        <a:latin typeface="Aptos"/>
+        <a:ea typeface=""/>
+        <a:cs typeface=""/>
+      </a:minorFont>
+    </a:fontScheme>
+    <a:fmtScheme name="ChatGPT">
+      <a:fillStyleLst>
+        <a:solidFill>
+          <a:schemeClr val="phClr"/>
+        </a:solidFill>
+        <a:gradFill>
+          <a:gsLst>
+            <a:gs pos="0">
+              <a:schemeClr val="phClr">
+                <a:tint val="67000"/>
+                <a:lumMod val="110000"/>
+                <a:satMod val="105000"/>
+              </a:schemeClr>
+            </a:gs>
+            <a:gs pos="50000">
+              <a:schemeClr val="phClr">
+                <a:tint val="73000"/>
+                <a:lumMod val="105000"/>
+                <a:satMod val="103000"/>
+              </a:schemeClr>
+            </a:gs>
+            <a:gs pos="100000">
+              <a:schemeClr val="phClr">
+                <a:tint val="81000"/>
+                <a:lumMod val="105000"/>
+                <a:satMod val="109000"/>
+              </a:schemeClr>
+            </a:gs>
+          </a:gsLst>
+          <a:lin ang="5400000" scaled="0"/>
+        </a:gradFill>
+        <a:gradFill>
+          <a:gsLst>
+            <a:gs pos="0">
+              <a:schemeClr val="phClr">
+                <a:tint val="94000"/>
+                <a:lumMod val="102000"/>
+                <a:satMod val="103000"/>
+              </a:schemeClr>
+            </a:gs>
+            <a:gs pos="50000">
+              <a:schemeClr val="phClr">
+                <a:shade val="100000"/>
+                <a:lumMod val="100000"/>
+                <a:satMod val="110000"/>
+              </a:schemeClr>
+            </a:gs>
+            <a:gs pos="100000">
+              <a:schemeClr val="phClr">
+                <a:shade val="78000"/>
+                <a:lumMod val="99000"/>
+                <a:satMod val="120000"/>
+              </a:schemeClr>
+            </a:gs>
+          </a:gsLst>
+          <a:lin ang="5400000" scaled="0"/>
+        </a:gradFill>
+      </a:fillStyleLst>
+      <a:lnStyleLst>
+        <a:ln w="12700">
+          <a:solidFill>
+            <a:schemeClr val="phClr"/>
+          </a:solidFill>
+          <a:prstDash val="solid"/>
+        </a:ln>
+        <a:ln w="19050">
+          <a:solidFill>
+            <a:schemeClr val="phClr"/>
+          </a:solidFill>
+          <a:prstDash val="solid"/>
+        </a:ln>
+        <a:ln w="25400">
+          <a:solidFill>
+            <a:schemeClr val="phClr"/>
+          </a:solidFill>
+          <a:prstDash val="solid"/>
+        </a:ln>
+      </a:lnStyleLst>
+      <a:effectStyleLst>
+        <a:effectStyle>
+          <a:effectLst/>
+        </a:effectStyle>
+        <a:effectStyle>
+          <a:effectLst/>
+        </a:effectStyle>
+        <a:effectStyle>
+          <a:effectLst>
+            <a:outerShdw blurRad="57150" dist="19050" dir="5400000">
+              <a:srgbClr val="000000">
+                <a:alpha val="16000"/>
+              </a:srgbClr>
+            </a:outerShdw>
+          </a:effectLst>
+        </a:effectStyle>
+        <a:effectStyle>
+          <a:effectLst>
+            <a:outerShdw blurRad="19050" dist="9525" dir="5400000">
+              <a:srgbClr val="000000">
+                <a:alpha val="6000"/>
+              </a:srgbClr>
+            </a:outerShdw>
+          </a:effectLst>
+        </a:effectStyle>
+        <a:effectStyle>
+          <a:effectLst>
+            <a:outerShdw blurRad="28575" dist="9525" dir="5400000">
+              <a:srgbClr val="000000">
+                <a:alpha val="8000"/>
+              </a:srgbClr>
+            </a:outerShdw>
+          </a:effectLst>
+        </a:effectStyle>
+        <a:effectStyle>
+          <a:effectLst>
+            <a:outerShdw blurRad="57150" dist="19050" dir="5400000">
+              <a:srgbClr val="000000">
+                <a:alpha val="10000"/>
+              </a:srgbClr>
+            </a:outerShdw>
+          </a:effectLst>
+        </a:effectStyle>
+        <a:effectStyle>
+          <a:effectLst>
+            <a:outerShdw blurRad="114300" dist="38100" dir="5400000">
+              <a:srgbClr val="000000">
+                <a:alpha val="12000"/>
+              </a:srgbClr>
+            </a:outerShdw>
+          </a:effectLst>
+        </a:effectStyle>
+        <a:effectStyle>
+          <a:effectLst>
+            <a:outerShdw blurRad="171450" dist="57150" dir="5400000">
+              <a:srgbClr val="000000">
+                <a:alpha val="16000"/>
+              </a:srgbClr>
+            </a:outerShdw>
+          </a:effectLst>
+        </a:effectStyle>
+        <a:effectStyle>
+          <a:effectLst>
+            <a:outerShdw blurRad="266700" dist="95250" dir="5400000">
+              <a:srgbClr val="000000">
+                <a:alpha val="24000"/>
+              </a:srgbClr>
+            </a:outerShdw>
+          </a:effectLst>
+        </a:effectStyle>
+      </a:effectStyleLst>
+      <a:bgFillStyleLst>
+        <a:solidFill>
+          <a:schemeClr val="phClr"/>
+        </a:solidFill>
+        <a:solidFill>
+          <a:schemeClr val="phClr">
+            <a:tint val="95000"/>
+            <a:satMod val="170000"/>
+          </a:schemeClr>
+        </a:solidFill>
+        <a:gradFill>
+          <a:gsLst>
+            <a:gs pos="0">
+              <a:schemeClr val="phClr">
+                <a:tint val="93000"/>
+                <a:shade val="98000"/>
+                <a:lumMod val="102000"/>
+                <a:satMod val="150000"/>
+              </a:schemeClr>
+            </a:gs>
+            <a:gs pos="50000">
+              <a:schemeClr val="phClr">
+                <a:tint val="98000"/>
+                <a:shade val="90000"/>
+                <a:lumMod val="103000"/>
+                <a:satMod val="130000"/>
+              </a:schemeClr>
+            </a:gs>
+            <a:gs pos="100000">
+              <a:schemeClr val="phClr">
+                <a:shade val="63000"/>
+                <a:satMod val="120000"/>
+              </a:schemeClr>
+            </a:gs>
+          </a:gsLst>
+          <a:lin ang="5400000" scaled="0"/>
+        </a:gradFill>
+      </a:bgFillStyleLst>
+    </a:fmtScheme>
+  </a:themeElements>
+</a:theme>
+</file>
+
 <file path=ppt/notesSlides/notesSlide1.xml><?xml version="1.0" encoding="utf-8"?>
-<p:notes xmlns:a="http://schemas.openxmlformats.org/drawingml/2006/main" xmlns:r="http://schemas.openxmlformats.org/officeDocument/2006/relationships" xmlns:p="http://schemas.openxmlformats.org/presentationml/2006/main">
+<p:notes xmlns:p="http://schemas.openxmlformats.org/presentationml/2006/main">
   <p:cSld>
     <p:spTree>
       <p:nvGrpSpPr>
@@ -292,21 +517,16 @@
         <p:nvPr/>
       </p:nvGrpSpPr>
       <p:grpSpPr>
-        <a:xfrm>
-          <a:off x="0" y="0"/>
-          <a:ext cx="0" cy="0"/>
-          <a:chOff x="0" y="0"/>
-          <a:chExt cx="0" cy="0"/>
-        </a:xfrm>
+        <a:xfrm xmlns:a="http://schemas.openxmlformats.org/drawingml/2006/main"/>
       </p:grpSpPr>
       <p:sp>
         <p:nvSpPr>
           <p:cNvPr id="2" name="Slide Image Placeholder 1"/>
           <p:cNvSpPr>
-            <a:spLocks noGrp="1" noRot="1" noChangeAspect="1"/>
+            <a:spLocks xmlns:a="http://schemas.openxmlformats.org/drawingml/2006/main" noGrp="1"/>
           </p:cNvSpPr>
           <p:nvPr>
-            <p:ph type="sldImg"/>
+            <p:ph type="sldImg" idx="0"/>
           </p:nvPr>
         </p:nvSpPr>
         <p:spPr/>
@@ -315,7 +535,7 @@
         <p:nvSpPr>
           <p:cNvPr id="3" name="Notes Placeholder 2"/>
           <p:cNvSpPr>
-            <a:spLocks noGrp="1"/>
+            <a:spLocks xmlns:a="http://schemas.openxmlformats.org/drawingml/2006/main" noGrp="1"/>
           </p:cNvSpPr>
           <p:nvPr>
             <p:ph type="body" idx="1"/>
@@ -323,11 +543,11 @@
         </p:nvSpPr>
         <p:spPr/>
         <p:txBody>
-          <a:bodyPr/>
-          <a:lstStyle/>
-          <a:p>
+          <a:bodyPr xmlns:a="http://schemas.openxmlformats.org/drawingml/2006/main"/>
+          <a:lstStyle xmlns:a="http://schemas.openxmlformats.org/drawingml/2006/main"/>
+          <a:p xmlns:a="http://schemas.openxmlformats.org/drawingml/2006/main">
             <a:r>
-              <a:t>Demo proposada: crear una persona client, triar dies i àpats, generar un mes, entrar com a operari i aprovar la primera proposta. Tornar al client i mostrar la setmana futura i la substitució. La captura es va obtenir del prototip local en mode de proves el 20 d’octubre de 2026. Font: codi i execució local d’Easy Eats.</a:t>
+              <a:t>Demostració amb l’aplicació de Windows i el servei remot del projecte. El professor extreu tot el paquet i obre easyeats.exe. Accés d’administrador: operario, amb la contrasenya indicada a GUIA_US_APP_WINDOWS.pdf. Mostrar perfil, generació, aprovació inicial i canvi d’un plat futur. Font: codi present i guia d’ús del projecte. L’estat del VPS s’ha de comprovar abans de la defensa.</a:t>
             </a:r>
           </a:p>
         </p:txBody>
@@ -336,7 +556,7 @@
         <p:nvSpPr>
           <p:cNvPr id="4" name="Slide Number Placeholder 3"/>
           <p:cNvSpPr>
-            <a:spLocks noGrp="1"/>
+            <a:spLocks xmlns:a="http://schemas.openxmlformats.org/drawingml/2006/main" noGrp="1"/>
           </p:cNvSpPr>
           <p:nvPr>
             <p:ph type="sldNum" idx="5"/>
@@ -344,23 +564,21 @@
         </p:nvSpPr>
         <p:spPr/>
         <p:txBody>
-          <a:bodyPr/>
-          <a:lstStyle/>
-          <a:p>
-            <a:endParaRPr/>
-          </a:p>
+          <a:bodyPr xmlns:a="http://schemas.openxmlformats.org/drawingml/2006/main"/>
+          <a:lstStyle xmlns:a="http://schemas.openxmlformats.org/drawingml/2006/main"/>
+          <a:p xmlns:a="http://schemas.openxmlformats.org/drawingml/2006/main"/>
         </p:txBody>
       </p:sp>
     </p:spTree>
   </p:cSld>
   <p:clrMapOvr>
-    <a:masterClrMapping/>
+    <a:masterClrMapping xmlns:a="http://schemas.openxmlformats.org/drawingml/2006/main"/>
   </p:clrMapOvr>
 </p:notes>
 </file>
 
 <file path=ppt/notesSlides/notesSlide2.xml><?xml version="1.0" encoding="utf-8"?>
-<p:notes xmlns:a="http://schemas.openxmlformats.org/drawingml/2006/main" xmlns:r="http://schemas.openxmlformats.org/officeDocument/2006/relationships" xmlns:p="http://schemas.openxmlformats.org/presentationml/2006/main">
+<p:notes xmlns:p="http://schemas.openxmlformats.org/presentationml/2006/main">
   <p:cSld>
     <p:spTree>
       <p:nvGrpSpPr>
@@ -369,21 +587,16 @@
         <p:nvPr/>
       </p:nvGrpSpPr>
       <p:grpSpPr>
-        <a:xfrm>
-          <a:off x="0" y="0"/>
-          <a:ext cx="0" cy="0"/>
-          <a:chOff x="0" y="0"/>
-          <a:chExt cx="0" cy="0"/>
-        </a:xfrm>
+        <a:xfrm xmlns:a="http://schemas.openxmlformats.org/drawingml/2006/main"/>
       </p:grpSpPr>
       <p:sp>
         <p:nvSpPr>
           <p:cNvPr id="2" name="Slide Image Placeholder 1"/>
           <p:cNvSpPr>
-            <a:spLocks noGrp="1" noRot="1" noChangeAspect="1"/>
+            <a:spLocks xmlns:a="http://schemas.openxmlformats.org/drawingml/2006/main" noGrp="1"/>
           </p:cNvSpPr>
           <p:nvPr>
-            <p:ph type="sldImg"/>
+            <p:ph type="sldImg" idx="0"/>
           </p:nvPr>
         </p:nvSpPr>
         <p:spPr/>
@@ -392,7 +605,7 @@
         <p:nvSpPr>
           <p:cNvPr id="3" name="Notes Placeholder 2"/>
           <p:cNvSpPr>
-            <a:spLocks noGrp="1"/>
+            <a:spLocks xmlns:a="http://schemas.openxmlformats.org/drawingml/2006/main" noGrp="1"/>
           </p:cNvSpPr>
           <p:nvPr>
             <p:ph type="body" idx="1"/>
@@ -400,11 +613,11 @@
         </p:nvSpPr>
         <p:spPr/>
         <p:txBody>
-          <a:bodyPr/>
-          <a:lstStyle/>
-          <a:p>
+          <a:bodyPr xmlns:a="http://schemas.openxmlformats.org/drawingml/2006/main"/>
+          <a:lstStyle xmlns:a="http://schemas.openxmlformats.org/drawingml/2006/main"/>
+          <a:p xmlns:a="http://schemas.openxmlformats.org/drawingml/2006/main">
             <a:r>
-              <a:t>El mode de proves utilitza un generador determinista i no és una prova d’IA real. El test automatitzat comprova el contracte de l’adaptador amb un proveïdor simulat. Per afirmar que la IA funciona en viu cal configurar una clau al servidor i completar una generació mensual real. Les proves amb persones no s’han fet encara. Fonts: README.md, backend/app/integrations/generation.py, backend/tests/test_flow.py i docs/protocolo_pruebas.md.</a:t>
+              <a:t>L’arquitectura de lliurament és executable Windows i API al VPS; no es lliura una web. Codex s’ha utilitzat per ajudar a programar, revisar i documentar. La generació local no acredita una funció d’IA real: l’adaptador s’ha provat amb resposta simulada, però falta validar una crida real. Les proves amb dues persones externes i la millora basada en elles no consten com a realitzades. Fonts: enunciat de la pràctica, README.md, backend/app/integrations/generation.py, backend/tests/test_flow.py i docs/protocolo_pruebas.md.</a:t>
             </a:r>
           </a:p>
         </p:txBody>
@@ -413,7 +626,7 @@
         <p:nvSpPr>
           <p:cNvPr id="4" name="Slide Number Placeholder 3"/>
           <p:cNvSpPr>
-            <a:spLocks noGrp="1"/>
+            <a:spLocks xmlns:a="http://schemas.openxmlformats.org/drawingml/2006/main" noGrp="1"/>
           </p:cNvSpPr>
           <p:nvPr>
             <p:ph type="sldNum" idx="5"/>
@@ -421,23 +634,21 @@
         </p:nvSpPr>
         <p:spPr/>
         <p:txBody>
-          <a:bodyPr/>
-          <a:lstStyle/>
-          <a:p>
-            <a:endParaRPr/>
-          </a:p>
+          <a:bodyPr xmlns:a="http://schemas.openxmlformats.org/drawingml/2006/main"/>
+          <a:lstStyle xmlns:a="http://schemas.openxmlformats.org/drawingml/2006/main"/>
+          <a:p xmlns:a="http://schemas.openxmlformats.org/drawingml/2006/main"/>
         </p:txBody>
       </p:sp>
     </p:spTree>
   </p:cSld>
   <p:clrMapOvr>
-    <a:masterClrMapping/>
+    <a:masterClrMapping xmlns:a="http://schemas.openxmlformats.org/drawingml/2006/main"/>
   </p:clrMapOvr>
 </p:notes>
 </file>
 
 <file path=ppt/slideLayouts/slideLayout1.xml><?xml version="1.0" encoding="utf-8"?>
-<p:sldLayout xmlns:a="http://schemas.openxmlformats.org/drawingml/2006/main" xmlns:r="http://schemas.openxmlformats.org/officeDocument/2006/relationships" xmlns:p="http://schemas.openxmlformats.org/presentationml/2006/main" type="title">
+<p:sldLayout xmlns:p="http://schemas.openxmlformats.org/presentationml/2006/main" type="title">
   <p:cSld name="Title Slide">
     <p:spTree>
       <p:nvGrpSpPr>
@@ -446,48 +657,43 @@
         <p:nvPr/>
       </p:nvGrpSpPr>
       <p:grpSpPr>
-        <a:xfrm>
-          <a:off x="0" y="0"/>
-          <a:ext cx="0" cy="0"/>
-          <a:chOff x="0" y="0"/>
-          <a:chExt cx="0" cy="0"/>
-        </a:xfrm>
+        <a:xfrm xmlns:a="http://schemas.openxmlformats.org/drawingml/2006/main"/>
       </p:grpSpPr>
       <p:sp>
         <p:nvSpPr>
           <p:cNvPr id="3" name="Title">
-            <a:extLst>
+            <a:extLst xmlns:a="http://schemas.openxmlformats.org/drawingml/2006/main">
               <a:ext uri="{FF2B5EF4-FFF2-40B4-BE49-F238E27FC236}">
                 <a16:creationId xmlns:a16="http://schemas.microsoft.com/office/drawing/2014/main" id="{84DE15CD-8102-4270-8835-43D8FCFC1D2A}"/>
               </a:ext>
             </a:extLst>
           </p:cNvPr>
           <p:cNvSpPr>
-            <a:spLocks noGrp="1"/>
+            <a:spLocks xmlns:a="http://schemas.openxmlformats.org/drawingml/2006/main" noGrp="1"/>
           </p:cNvSpPr>
           <p:nvPr>
-            <p:ph type="title"/>
+            <p:ph type="title" idx="0"/>
           </p:nvPr>
         </p:nvSpPr>
         <p:spPr>
-          <a:xfrm>
+          <a:xfrm xmlns:a="http://schemas.openxmlformats.org/drawingml/2006/main">
             <a:off x="1219200" y="2590800"/>
             <a:ext cx="9753600" cy="990600"/>
           </a:xfrm>
-          <a:prstGeom prst="rect">
+          <a:prstGeom xmlns:a="http://schemas.openxmlformats.org/drawingml/2006/main" prst="rect">
             <a:avLst/>
           </a:prstGeom>
-          <a:noFill/>
-          <a:ln>
+          <a:noFill xmlns:a="http://schemas.openxmlformats.org/drawingml/2006/main"/>
+          <a:ln xmlns:a="http://schemas.openxmlformats.org/drawingml/2006/main">
             <a:noFill/>
             <a:prstDash val="solid"/>
           </a:ln>
         </p:spPr>
         <p:txBody>
-          <a:bodyPr wrap="square" lIns="0" tIns="0" rIns="0" bIns="0" anchor="ctr">
+          <a:bodyPr xmlns:a="http://schemas.openxmlformats.org/drawingml/2006/main" wrap="square" lIns="0" tIns="0" rIns="0" bIns="0" anchor="ctr">
             <a:normAutofit/>
           </a:bodyPr>
-          <a:lstStyle>
+          <a:lstStyle xmlns:a="http://schemas.openxmlformats.org/drawingml/2006/main">
             <a:defPPr algn="ctr">
               <a:defRPr sz="4800" b="1">
                 <a:solidFill>
@@ -679,7 +885,7 @@
               </a:defRPr>
             </a:lvl9pPr>
           </a:lstStyle>
-          <a:p>
+          <a:p xmlns:a="http://schemas.openxmlformats.org/drawingml/2006/main">
             <a:endParaRPr/>
           </a:p>
         </p:txBody>
@@ -687,38 +893,38 @@
       <p:sp>
         <p:nvSpPr>
           <p:cNvPr id="2" name="Subtitle">
-            <a:extLst>
+            <a:extLst xmlns:a="http://schemas.openxmlformats.org/drawingml/2006/main">
               <a:ext uri="{FF2B5EF4-FFF2-40B4-BE49-F238E27FC236}">
                 <a16:creationId xmlns:a16="http://schemas.microsoft.com/office/drawing/2014/main" id="{C12AABB4-3B96-4CA9-963B-3F37A9854A8A}"/>
               </a:ext>
             </a:extLst>
           </p:cNvPr>
           <p:cNvSpPr>
-            <a:spLocks noGrp="1"/>
+            <a:spLocks xmlns:a="http://schemas.openxmlformats.org/drawingml/2006/main" noGrp="1"/>
           </p:cNvSpPr>
           <p:nvPr>
             <p:ph type="subTitle" idx="1"/>
           </p:nvPr>
         </p:nvSpPr>
         <p:spPr>
-          <a:xfrm>
+          <a:xfrm xmlns:a="http://schemas.openxmlformats.org/drawingml/2006/main">
             <a:off x="1828800" y="3771900"/>
             <a:ext cx="8534400" cy="762000"/>
           </a:xfrm>
-          <a:prstGeom prst="rect">
+          <a:prstGeom xmlns:a="http://schemas.openxmlformats.org/drawingml/2006/main" prst="rect">
             <a:avLst/>
           </a:prstGeom>
-          <a:noFill/>
-          <a:ln>
+          <a:noFill xmlns:a="http://schemas.openxmlformats.org/drawingml/2006/main"/>
+          <a:ln xmlns:a="http://schemas.openxmlformats.org/drawingml/2006/main">
             <a:noFill/>
             <a:prstDash val="solid"/>
           </a:ln>
         </p:spPr>
         <p:txBody>
-          <a:bodyPr wrap="square" lIns="0" tIns="0" rIns="0" bIns="0" anchor="ctr">
+          <a:bodyPr xmlns:a="http://schemas.openxmlformats.org/drawingml/2006/main" wrap="square" lIns="0" tIns="0" rIns="0" bIns="0" anchor="ctr">
             <a:normAutofit/>
           </a:bodyPr>
-          <a:lstStyle>
+          <a:lstStyle xmlns:a="http://schemas.openxmlformats.org/drawingml/2006/main">
             <a:defPPr algn="ctr">
               <a:defRPr sz="2100" b="0">
                 <a:solidFill>
@@ -910,21 +1116,18 @@
               </a:defRPr>
             </a:lvl9pPr>
           </a:lstStyle>
-          <a:p>
+          <a:p xmlns:a="http://schemas.openxmlformats.org/drawingml/2006/main">
             <a:endParaRPr/>
           </a:p>
         </p:txBody>
       </p:sp>
     </p:spTree>
   </p:cSld>
-  <p:clrMapOvr>
-    <a:masterClrMapping/>
-  </p:clrMapOvr>
 </p:sldLayout>
 </file>
 
 <file path=ppt/slideLayouts/slideLayout2.xml><?xml version="1.0" encoding="utf-8"?>
-<p:sldLayout xmlns:a="http://schemas.openxmlformats.org/drawingml/2006/main" xmlns:r="http://schemas.openxmlformats.org/officeDocument/2006/relationships" xmlns:p="http://schemas.openxmlformats.org/presentationml/2006/main">
+<p:sldLayout xmlns:p="http://schemas.openxmlformats.org/presentationml/2006/main">
   <p:cSld name="Section Header">
     <p:spTree>
       <p:nvGrpSpPr>
@@ -933,48 +1136,43 @@
         <p:nvPr/>
       </p:nvGrpSpPr>
       <p:grpSpPr>
-        <a:xfrm>
-          <a:off x="0" y="0"/>
-          <a:ext cx="0" cy="0"/>
-          <a:chOff x="0" y="0"/>
-          <a:chExt cx="0" cy="0"/>
-        </a:xfrm>
+        <a:xfrm xmlns:a="http://schemas.openxmlformats.org/drawingml/2006/main"/>
       </p:grpSpPr>
       <p:sp>
         <p:nvSpPr>
           <p:cNvPr id="2" name="Section title">
-            <a:extLst>
+            <a:extLst xmlns:a="http://schemas.openxmlformats.org/drawingml/2006/main">
               <a:ext uri="{FF2B5EF4-FFF2-40B4-BE49-F238E27FC236}">
                 <a16:creationId xmlns:a16="http://schemas.microsoft.com/office/drawing/2014/main" id="{9BD37093-CAF5-4C77-BA25-FACB12738367}"/>
               </a:ext>
             </a:extLst>
           </p:cNvPr>
           <p:cNvSpPr>
-            <a:spLocks noGrp="1"/>
+            <a:spLocks xmlns:a="http://schemas.openxmlformats.org/drawingml/2006/main" noGrp="1"/>
           </p:cNvSpPr>
           <p:nvPr>
-            <p:ph type="title"/>
+            <p:ph type="title" idx="0"/>
           </p:nvPr>
         </p:nvSpPr>
         <p:spPr>
-          <a:xfrm>
+          <a:xfrm xmlns:a="http://schemas.openxmlformats.org/drawingml/2006/main">
             <a:off x="1219200" y="2857500"/>
             <a:ext cx="9753600" cy="1143000"/>
           </a:xfrm>
-          <a:prstGeom prst="rect">
+          <a:prstGeom xmlns:a="http://schemas.openxmlformats.org/drawingml/2006/main" prst="rect">
             <a:avLst/>
           </a:prstGeom>
-          <a:noFill/>
-          <a:ln>
+          <a:noFill xmlns:a="http://schemas.openxmlformats.org/drawingml/2006/main"/>
+          <a:ln xmlns:a="http://schemas.openxmlformats.org/drawingml/2006/main">
             <a:noFill/>
             <a:prstDash val="solid"/>
           </a:ln>
         </p:spPr>
         <p:txBody>
-          <a:bodyPr wrap="square" lIns="0" tIns="0" rIns="0" bIns="0" anchor="ctr">
+          <a:bodyPr xmlns:a="http://schemas.openxmlformats.org/drawingml/2006/main" wrap="square" lIns="0" tIns="0" rIns="0" bIns="0" anchor="ctr">
             <a:normAutofit/>
           </a:bodyPr>
-          <a:lstStyle>
+          <a:lstStyle xmlns:a="http://schemas.openxmlformats.org/drawingml/2006/main">
             <a:defPPr algn="ctr">
               <a:defRPr sz="4200" b="1">
                 <a:solidFill>
@@ -1166,21 +1364,18 @@
               </a:defRPr>
             </a:lvl9pPr>
           </a:lstStyle>
-          <a:p>
+          <a:p xmlns:a="http://schemas.openxmlformats.org/drawingml/2006/main">
             <a:endParaRPr/>
           </a:p>
         </p:txBody>
       </p:sp>
     </p:spTree>
   </p:cSld>
-  <p:clrMapOvr>
-    <a:masterClrMapping/>
-  </p:clrMapOvr>
 </p:sldLayout>
 </file>
 
 <file path=ppt/slideLayouts/slideLayout3.xml><?xml version="1.0" encoding="utf-8"?>
-<p:sldLayout xmlns:a="http://schemas.openxmlformats.org/drawingml/2006/main" xmlns:r="http://schemas.openxmlformats.org/officeDocument/2006/relationships" xmlns:p="http://schemas.openxmlformats.org/presentationml/2006/main">
+<p:sldLayout xmlns:p="http://schemas.openxmlformats.org/presentationml/2006/main">
   <p:cSld name="Title and Body">
     <p:spTree>
       <p:nvGrpSpPr>
@@ -1189,48 +1384,43 @@
         <p:nvPr/>
       </p:nvGrpSpPr>
       <p:grpSpPr>
-        <a:xfrm>
-          <a:off x="0" y="0"/>
-          <a:ext cx="0" cy="0"/>
-          <a:chOff x="0" y="0"/>
-          <a:chExt cx="0" cy="0"/>
-        </a:xfrm>
+        <a:xfrm xmlns:a="http://schemas.openxmlformats.org/drawingml/2006/main"/>
       </p:grpSpPr>
       <p:sp>
         <p:nvSpPr>
           <p:cNvPr id="3" name="Title">
-            <a:extLst>
+            <a:extLst xmlns:a="http://schemas.openxmlformats.org/drawingml/2006/main">
               <a:ext uri="{FF2B5EF4-FFF2-40B4-BE49-F238E27FC236}">
                 <a16:creationId xmlns:a16="http://schemas.microsoft.com/office/drawing/2014/main" id="{B440B907-D1A9-4C61-A02F-F7FD7B1BD065}"/>
               </a:ext>
             </a:extLst>
           </p:cNvPr>
           <p:cNvSpPr>
-            <a:spLocks noGrp="1"/>
+            <a:spLocks xmlns:a="http://schemas.openxmlformats.org/drawingml/2006/main" noGrp="1"/>
           </p:cNvSpPr>
           <p:nvPr>
-            <p:ph type="title"/>
+            <p:ph type="title" idx="0"/>
           </p:nvPr>
         </p:nvSpPr>
         <p:spPr>
-          <a:xfrm>
+          <a:xfrm xmlns:a="http://schemas.openxmlformats.org/drawingml/2006/main">
             <a:off x="685800" y="533400"/>
             <a:ext cx="10820400" cy="838200"/>
           </a:xfrm>
-          <a:prstGeom prst="rect">
+          <a:prstGeom xmlns:a="http://schemas.openxmlformats.org/drawingml/2006/main" prst="rect">
             <a:avLst/>
           </a:prstGeom>
-          <a:noFill/>
-          <a:ln>
+          <a:noFill xmlns:a="http://schemas.openxmlformats.org/drawingml/2006/main"/>
+          <a:ln xmlns:a="http://schemas.openxmlformats.org/drawingml/2006/main">
             <a:noFill/>
             <a:prstDash val="solid"/>
           </a:ln>
         </p:spPr>
         <p:txBody>
-          <a:bodyPr wrap="square" lIns="0" tIns="0" rIns="0" bIns="0" anchor="t">
+          <a:bodyPr xmlns:a="http://schemas.openxmlformats.org/drawingml/2006/main" wrap="square" lIns="0" tIns="0" rIns="0" bIns="0" anchor="t">
             <a:normAutofit/>
           </a:bodyPr>
-          <a:lstStyle>
+          <a:lstStyle xmlns:a="http://schemas.openxmlformats.org/drawingml/2006/main">
             <a:defPPr algn="l">
               <a:defRPr sz="3300" b="1">
                 <a:solidFill>
@@ -1422,7 +1612,7 @@
               </a:defRPr>
             </a:lvl9pPr>
           </a:lstStyle>
-          <a:p>
+          <a:p xmlns:a="http://schemas.openxmlformats.org/drawingml/2006/main">
             <a:endParaRPr/>
           </a:p>
         </p:txBody>
@@ -1430,38 +1620,38 @@
       <p:sp>
         <p:nvSpPr>
           <p:cNvPr id="2" name="Body">
-            <a:extLst>
+            <a:extLst xmlns:a="http://schemas.openxmlformats.org/drawingml/2006/main">
               <a:ext uri="{FF2B5EF4-FFF2-40B4-BE49-F238E27FC236}">
                 <a16:creationId xmlns:a16="http://schemas.microsoft.com/office/drawing/2014/main" id="{486438D3-8A17-4D92-A96D-F7ADF6C65DB2}"/>
               </a:ext>
             </a:extLst>
           </p:cNvPr>
           <p:cNvSpPr>
-            <a:spLocks noGrp="1"/>
+            <a:spLocks xmlns:a="http://schemas.openxmlformats.org/drawingml/2006/main" noGrp="1"/>
           </p:cNvSpPr>
           <p:nvPr>
             <p:ph type="body" idx="1"/>
           </p:nvPr>
         </p:nvSpPr>
         <p:spPr>
-          <a:xfrm>
+          <a:xfrm xmlns:a="http://schemas.openxmlformats.org/drawingml/2006/main">
             <a:off x="685800" y="1905000"/>
             <a:ext cx="10820400" cy="4267200"/>
           </a:xfrm>
-          <a:prstGeom prst="rect">
+          <a:prstGeom xmlns:a="http://schemas.openxmlformats.org/drawingml/2006/main" prst="rect">
             <a:avLst/>
           </a:prstGeom>
-          <a:noFill/>
-          <a:ln>
+          <a:noFill xmlns:a="http://schemas.openxmlformats.org/drawingml/2006/main"/>
+          <a:ln xmlns:a="http://schemas.openxmlformats.org/drawingml/2006/main">
             <a:noFill/>
             <a:prstDash val="solid"/>
           </a:ln>
         </p:spPr>
         <p:txBody>
-          <a:bodyPr wrap="square" lIns="0" tIns="0" rIns="0" bIns="0" anchor="t">
+          <a:bodyPr xmlns:a="http://schemas.openxmlformats.org/drawingml/2006/main" wrap="square" lIns="0" tIns="0" rIns="0" bIns="0" anchor="t">
             <a:normAutofit/>
           </a:bodyPr>
-          <a:lstStyle>
+          <a:lstStyle xmlns:a="http://schemas.openxmlformats.org/drawingml/2006/main">
             <a:defPPr algn="l">
               <a:defRPr sz="2250" b="0">
                 <a:solidFill>
@@ -1653,21 +1843,18 @@
               </a:defRPr>
             </a:lvl9pPr>
           </a:lstStyle>
-          <a:p>
+          <a:p xmlns:a="http://schemas.openxmlformats.org/drawingml/2006/main">
             <a:endParaRPr/>
           </a:p>
         </p:txBody>
       </p:sp>
     </p:spTree>
   </p:cSld>
-  <p:clrMapOvr>
-    <a:masterClrMapping/>
-  </p:clrMapOvr>
 </p:sldLayout>
 </file>
 
 <file path=ppt/slideLayouts/slideLayout4.xml><?xml version="1.0" encoding="utf-8"?>
-<p:sldLayout xmlns:a="http://schemas.openxmlformats.org/drawingml/2006/main" xmlns:r="http://schemas.openxmlformats.org/officeDocument/2006/relationships" xmlns:p="http://schemas.openxmlformats.org/presentationml/2006/main">
+<p:sldLayout xmlns:p="http://schemas.openxmlformats.org/presentationml/2006/main">
   <p:cSld name="Title and Two Column">
     <p:spTree>
       <p:nvGrpSpPr>
@@ -1676,48 +1863,43 @@
         <p:nvPr/>
       </p:nvGrpSpPr>
       <p:grpSpPr>
-        <a:xfrm>
-          <a:off x="0" y="0"/>
-          <a:ext cx="0" cy="0"/>
-          <a:chOff x="0" y="0"/>
-          <a:chExt cx="0" cy="0"/>
-        </a:xfrm>
+        <a:xfrm xmlns:a="http://schemas.openxmlformats.org/drawingml/2006/main"/>
       </p:grpSpPr>
       <p:sp>
         <p:nvSpPr>
           <p:cNvPr id="4" name="Title">
-            <a:extLst>
+            <a:extLst xmlns:a="http://schemas.openxmlformats.org/drawingml/2006/main">
               <a:ext uri="{FF2B5EF4-FFF2-40B4-BE49-F238E27FC236}">
                 <a16:creationId xmlns:a16="http://schemas.microsoft.com/office/drawing/2014/main" id="{2F63A30C-A4B1-4A7E-9DB4-AB5CA5F72D8C}"/>
               </a:ext>
             </a:extLst>
           </p:cNvPr>
           <p:cNvSpPr>
-            <a:spLocks noGrp="1"/>
+            <a:spLocks xmlns:a="http://schemas.openxmlformats.org/drawingml/2006/main" noGrp="1"/>
           </p:cNvSpPr>
           <p:nvPr>
-            <p:ph type="title"/>
+            <p:ph type="title" idx="0"/>
           </p:nvPr>
         </p:nvSpPr>
         <p:spPr>
-          <a:xfrm>
+          <a:xfrm xmlns:a="http://schemas.openxmlformats.org/drawingml/2006/main">
             <a:off x="685800" y="533400"/>
             <a:ext cx="10820400" cy="838200"/>
           </a:xfrm>
-          <a:prstGeom prst="rect">
+          <a:prstGeom xmlns:a="http://schemas.openxmlformats.org/drawingml/2006/main" prst="rect">
             <a:avLst/>
           </a:prstGeom>
-          <a:noFill/>
-          <a:ln>
+          <a:noFill xmlns:a="http://schemas.openxmlformats.org/drawingml/2006/main"/>
+          <a:ln xmlns:a="http://schemas.openxmlformats.org/drawingml/2006/main">
             <a:noFill/>
             <a:prstDash val="solid"/>
           </a:ln>
         </p:spPr>
         <p:txBody>
-          <a:bodyPr wrap="square" lIns="0" tIns="0" rIns="0" bIns="0" anchor="t">
+          <a:bodyPr xmlns:a="http://schemas.openxmlformats.org/drawingml/2006/main" wrap="square" lIns="0" tIns="0" rIns="0" bIns="0" anchor="t">
             <a:normAutofit/>
           </a:bodyPr>
-          <a:lstStyle>
+          <a:lstStyle xmlns:a="http://schemas.openxmlformats.org/drawingml/2006/main">
             <a:defPPr algn="l">
               <a:defRPr sz="3300" b="1">
                 <a:solidFill>
@@ -1909,7 +2091,7 @@
               </a:defRPr>
             </a:lvl9pPr>
           </a:lstStyle>
-          <a:p>
+          <a:p xmlns:a="http://schemas.openxmlformats.org/drawingml/2006/main">
             <a:endParaRPr/>
           </a:p>
         </p:txBody>
@@ -1917,38 +2099,38 @@
       <p:sp>
         <p:nvSpPr>
           <p:cNvPr id="2" name="Left column">
-            <a:extLst>
+            <a:extLst xmlns:a="http://schemas.openxmlformats.org/drawingml/2006/main">
               <a:ext uri="{FF2B5EF4-FFF2-40B4-BE49-F238E27FC236}">
                 <a16:creationId xmlns:a16="http://schemas.microsoft.com/office/drawing/2014/main" id="{ED69C9F4-DE60-4D6E-BD41-90A90F56D44E}"/>
               </a:ext>
             </a:extLst>
           </p:cNvPr>
           <p:cNvSpPr>
-            <a:spLocks noGrp="1"/>
+            <a:spLocks xmlns:a="http://schemas.openxmlformats.org/drawingml/2006/main" noGrp="1"/>
           </p:cNvSpPr>
           <p:nvPr>
             <p:ph type="body" idx="1"/>
           </p:nvPr>
         </p:nvSpPr>
         <p:spPr>
-          <a:xfrm>
+          <a:xfrm xmlns:a="http://schemas.openxmlformats.org/drawingml/2006/main">
             <a:off x="685800" y="1905000"/>
             <a:ext cx="5029200" cy="4267200"/>
           </a:xfrm>
-          <a:prstGeom prst="rect">
+          <a:prstGeom xmlns:a="http://schemas.openxmlformats.org/drawingml/2006/main" prst="rect">
             <a:avLst/>
           </a:prstGeom>
-          <a:noFill/>
-          <a:ln>
+          <a:noFill xmlns:a="http://schemas.openxmlformats.org/drawingml/2006/main"/>
+          <a:ln xmlns:a="http://schemas.openxmlformats.org/drawingml/2006/main">
             <a:noFill/>
             <a:prstDash val="solid"/>
           </a:ln>
         </p:spPr>
         <p:txBody>
-          <a:bodyPr wrap="square" lIns="0" tIns="0" rIns="0" bIns="0" anchor="t">
+          <a:bodyPr xmlns:a="http://schemas.openxmlformats.org/drawingml/2006/main" wrap="square" lIns="0" tIns="0" rIns="0" bIns="0" anchor="t">
             <a:normAutofit/>
           </a:bodyPr>
-          <a:lstStyle>
+          <a:lstStyle xmlns:a="http://schemas.openxmlformats.org/drawingml/2006/main">
             <a:defPPr algn="l">
               <a:defRPr sz="2100" b="0">
                 <a:solidFill>
@@ -2140,7 +2322,7 @@
               </a:defRPr>
             </a:lvl9pPr>
           </a:lstStyle>
-          <a:p>
+          <a:p xmlns:a="http://schemas.openxmlformats.org/drawingml/2006/main">
             <a:endParaRPr/>
           </a:p>
         </p:txBody>
@@ -2148,38 +2330,38 @@
       <p:sp>
         <p:nvSpPr>
           <p:cNvPr id="3" name="Right column">
-            <a:extLst>
+            <a:extLst xmlns:a="http://schemas.openxmlformats.org/drawingml/2006/main">
               <a:ext uri="{FF2B5EF4-FFF2-40B4-BE49-F238E27FC236}">
                 <a16:creationId xmlns:a16="http://schemas.microsoft.com/office/drawing/2014/main" id="{7CD90A04-9CF5-4E58-8FC2-994FD64AC0B0}"/>
               </a:ext>
             </a:extLst>
           </p:cNvPr>
           <p:cNvSpPr>
-            <a:spLocks noGrp="1"/>
+            <a:spLocks xmlns:a="http://schemas.openxmlformats.org/drawingml/2006/main" noGrp="1"/>
           </p:cNvSpPr>
           <p:nvPr>
             <p:ph type="body" idx="2"/>
           </p:nvPr>
         </p:nvSpPr>
         <p:spPr>
-          <a:xfrm>
+          <a:xfrm xmlns:a="http://schemas.openxmlformats.org/drawingml/2006/main">
             <a:off x="6477000" y="1905000"/>
             <a:ext cx="5029200" cy="4267200"/>
           </a:xfrm>
-          <a:prstGeom prst="rect">
+          <a:prstGeom xmlns:a="http://schemas.openxmlformats.org/drawingml/2006/main" prst="rect">
             <a:avLst/>
           </a:prstGeom>
-          <a:noFill/>
-          <a:ln>
+          <a:noFill xmlns:a="http://schemas.openxmlformats.org/drawingml/2006/main"/>
+          <a:ln xmlns:a="http://schemas.openxmlformats.org/drawingml/2006/main">
             <a:noFill/>
             <a:prstDash val="solid"/>
           </a:ln>
         </p:spPr>
         <p:txBody>
-          <a:bodyPr wrap="square" lIns="0" tIns="0" rIns="0" bIns="0" anchor="t">
+          <a:bodyPr xmlns:a="http://schemas.openxmlformats.org/drawingml/2006/main" wrap="square" lIns="0" tIns="0" rIns="0" bIns="0" anchor="t">
             <a:normAutofit/>
           </a:bodyPr>
-          <a:lstStyle>
+          <a:lstStyle xmlns:a="http://schemas.openxmlformats.org/drawingml/2006/main">
             <a:defPPr algn="l">
               <a:defRPr sz="2100" b="0">
                 <a:solidFill>
@@ -2371,21 +2553,18 @@
               </a:defRPr>
             </a:lvl9pPr>
           </a:lstStyle>
-          <a:p>
+          <a:p xmlns:a="http://schemas.openxmlformats.org/drawingml/2006/main">
             <a:endParaRPr/>
           </a:p>
         </p:txBody>
       </p:sp>
     </p:spTree>
   </p:cSld>
-  <p:clrMapOvr>
-    <a:masterClrMapping/>
-  </p:clrMapOvr>
 </p:sldLayout>
 </file>
 
 <file path=ppt/slideLayouts/slideLayout5.xml><?xml version="1.0" encoding="utf-8"?>
-<p:sldLayout xmlns:a="http://schemas.openxmlformats.org/drawingml/2006/main" xmlns:r="http://schemas.openxmlformats.org/officeDocument/2006/relationships" xmlns:p="http://schemas.openxmlformats.org/presentationml/2006/main">
+<p:sldLayout xmlns:p="http://schemas.openxmlformats.org/presentationml/2006/main">
   <p:cSld name="Title and One Column">
     <p:spTree>
       <p:nvGrpSpPr>
@@ -2394,48 +2573,43 @@
         <p:nvPr/>
       </p:nvGrpSpPr>
       <p:grpSpPr>
-        <a:xfrm>
-          <a:off x="0" y="0"/>
-          <a:ext cx="0" cy="0"/>
-          <a:chOff x="0" y="0"/>
-          <a:chExt cx="0" cy="0"/>
-        </a:xfrm>
+        <a:xfrm xmlns:a="http://schemas.openxmlformats.org/drawingml/2006/main"/>
       </p:grpSpPr>
       <p:sp>
         <p:nvSpPr>
           <p:cNvPr id="3" name="Title">
-            <a:extLst>
+            <a:extLst xmlns:a="http://schemas.openxmlformats.org/drawingml/2006/main">
               <a:ext uri="{FF2B5EF4-FFF2-40B4-BE49-F238E27FC236}">
                 <a16:creationId xmlns:a16="http://schemas.microsoft.com/office/drawing/2014/main" id="{BD1130AB-62AD-4BFE-B679-B6905D509979}"/>
               </a:ext>
             </a:extLst>
           </p:cNvPr>
           <p:cNvSpPr>
-            <a:spLocks noGrp="1"/>
+            <a:spLocks xmlns:a="http://schemas.openxmlformats.org/drawingml/2006/main" noGrp="1"/>
           </p:cNvSpPr>
           <p:nvPr>
-            <p:ph type="title"/>
+            <p:ph type="title" idx="0"/>
           </p:nvPr>
         </p:nvSpPr>
         <p:spPr>
-          <a:xfrm>
+          <a:xfrm xmlns:a="http://schemas.openxmlformats.org/drawingml/2006/main">
             <a:off x="685800" y="533400"/>
             <a:ext cx="10820400" cy="838200"/>
           </a:xfrm>
-          <a:prstGeom prst="rect">
+          <a:prstGeom xmlns:a="http://schemas.openxmlformats.org/drawingml/2006/main" prst="rect">
             <a:avLst/>
           </a:prstGeom>
-          <a:noFill/>
-          <a:ln>
+          <a:noFill xmlns:a="http://schemas.openxmlformats.org/drawingml/2006/main"/>
+          <a:ln xmlns:a="http://schemas.openxmlformats.org/drawingml/2006/main">
             <a:noFill/>
             <a:prstDash val="solid"/>
           </a:ln>
         </p:spPr>
         <p:txBody>
-          <a:bodyPr wrap="square" lIns="0" tIns="0" rIns="0" bIns="0" anchor="t">
+          <a:bodyPr xmlns:a="http://schemas.openxmlformats.org/drawingml/2006/main" wrap="square" lIns="0" tIns="0" rIns="0" bIns="0" anchor="t">
             <a:normAutofit/>
           </a:bodyPr>
-          <a:lstStyle>
+          <a:lstStyle xmlns:a="http://schemas.openxmlformats.org/drawingml/2006/main">
             <a:defPPr algn="l">
               <a:defRPr sz="3300" b="1">
                 <a:solidFill>
@@ -2627,7 +2801,7 @@
               </a:defRPr>
             </a:lvl9pPr>
           </a:lstStyle>
-          <a:p>
+          <a:p xmlns:a="http://schemas.openxmlformats.org/drawingml/2006/main">
             <a:endParaRPr/>
           </a:p>
         </p:txBody>
@@ -2635,38 +2809,38 @@
       <p:sp>
         <p:nvSpPr>
           <p:cNvPr id="2" name="Left column">
-            <a:extLst>
+            <a:extLst xmlns:a="http://schemas.openxmlformats.org/drawingml/2006/main">
               <a:ext uri="{FF2B5EF4-FFF2-40B4-BE49-F238E27FC236}">
                 <a16:creationId xmlns:a16="http://schemas.microsoft.com/office/drawing/2014/main" id="{E668900B-3BA5-4A3D-89A6-77D00B568C83}"/>
               </a:ext>
             </a:extLst>
           </p:cNvPr>
           <p:cNvSpPr>
-            <a:spLocks noGrp="1"/>
+            <a:spLocks xmlns:a="http://schemas.openxmlformats.org/drawingml/2006/main" noGrp="1"/>
           </p:cNvSpPr>
           <p:nvPr>
             <p:ph type="body" idx="1"/>
           </p:nvPr>
         </p:nvSpPr>
         <p:spPr>
-          <a:xfrm>
+          <a:xfrm xmlns:a="http://schemas.openxmlformats.org/drawingml/2006/main">
             <a:off x="685800" y="1905000"/>
             <a:ext cx="5029200" cy="4267200"/>
           </a:xfrm>
-          <a:prstGeom prst="rect">
+          <a:prstGeom xmlns:a="http://schemas.openxmlformats.org/drawingml/2006/main" prst="rect">
             <a:avLst/>
           </a:prstGeom>
-          <a:noFill/>
-          <a:ln>
+          <a:noFill xmlns:a="http://schemas.openxmlformats.org/drawingml/2006/main"/>
+          <a:ln xmlns:a="http://schemas.openxmlformats.org/drawingml/2006/main">
             <a:noFill/>
             <a:prstDash val="solid"/>
           </a:ln>
         </p:spPr>
         <p:txBody>
-          <a:bodyPr wrap="square" lIns="0" tIns="0" rIns="0" bIns="0" anchor="t">
+          <a:bodyPr xmlns:a="http://schemas.openxmlformats.org/drawingml/2006/main" wrap="square" lIns="0" tIns="0" rIns="0" bIns="0" anchor="t">
             <a:normAutofit/>
           </a:bodyPr>
-          <a:lstStyle>
+          <a:lstStyle xmlns:a="http://schemas.openxmlformats.org/drawingml/2006/main">
             <a:defPPr algn="l">
               <a:defRPr sz="2250" b="0">
                 <a:solidFill>
@@ -2858,21 +3032,18 @@
               </a:defRPr>
             </a:lvl9pPr>
           </a:lstStyle>
-          <a:p>
+          <a:p xmlns:a="http://schemas.openxmlformats.org/drawingml/2006/main">
             <a:endParaRPr/>
           </a:p>
         </p:txBody>
       </p:sp>
     </p:spTree>
   </p:cSld>
-  <p:clrMapOvr>
-    <a:masterClrMapping/>
-  </p:clrMapOvr>
 </p:sldLayout>
 </file>
 
 <file path=ppt/slideLayouts/slideLayout6.xml><?xml version="1.0" encoding="utf-8"?>
-<p:sldLayout xmlns:a="http://schemas.openxmlformats.org/drawingml/2006/main" xmlns:r="http://schemas.openxmlformats.org/officeDocument/2006/relationships" xmlns:p="http://schemas.openxmlformats.org/presentationml/2006/main" type="blank">
+<p:sldLayout xmlns:p="http://schemas.openxmlformats.org/presentationml/2006/main" type="blank">
   <p:cSld name="Blank">
     <p:spTree>
       <p:nvGrpSpPr>
@@ -2881,27 +3052,19 @@
         <p:nvPr/>
       </p:nvGrpSpPr>
       <p:grpSpPr>
-        <a:xfrm>
-          <a:off x="0" y="0"/>
-          <a:ext cx="0" cy="0"/>
-          <a:chOff x="0" y="0"/>
-          <a:chExt cx="0" cy="0"/>
-        </a:xfrm>
+        <a:xfrm xmlns:a="http://schemas.openxmlformats.org/drawingml/2006/main"/>
       </p:grpSpPr>
     </p:spTree>
   </p:cSld>
-  <p:clrMapOvr>
-    <a:masterClrMapping/>
-  </p:clrMapOvr>
 </p:sldLayout>
 </file>
 
 <file path=ppt/slideMasters/slideMaster1.xml><?xml version="1.0" encoding="utf-8"?>
-<p:sldMaster xmlns:a="http://schemas.openxmlformats.org/drawingml/2006/main" xmlns:r="http://schemas.openxmlformats.org/officeDocument/2006/relationships" xmlns:p="http://schemas.openxmlformats.org/presentationml/2006/main">
+<p:sldMaster xmlns:p="http://schemas.openxmlformats.org/presentationml/2006/main">
   <p:cSld name="Master">
     <p:bg>
       <p:bgRef idx="1001">
-        <a:schemeClr val="bg1"/>
+        <a:schemeClr xmlns:a="http://schemas.openxmlformats.org/drawingml/2006/main" val="bg1"/>
       </p:bgRef>
     </p:bg>
     <p:spTree>
@@ -2911,27 +3074,22 @@
         <p:nvPr/>
       </p:nvGrpSpPr>
       <p:grpSpPr>
-        <a:xfrm>
-          <a:off x="0" y="0"/>
-          <a:ext cx="0" cy="0"/>
-          <a:chOff x="0" y="0"/>
-          <a:chExt cx="0" cy="0"/>
-        </a:xfrm>
+        <a:xfrm xmlns:a="http://schemas.openxmlformats.org/drawingml/2006/main"/>
       </p:grpSpPr>
     </p:spTree>
   </p:cSld>
   <p:clrMap bg1="lt1" tx1="dk1" bg2="lt2" tx2="dk2" accent1="accent1" accent2="accent2" accent3="accent3" accent4="accent4" accent5="accent5" accent6="accent6" hlink="hlink" folHlink="folHlink"/>
   <p:sldLayoutIdLst>
-    <p:sldLayoutId id="2147483649" r:id="rId1"/>
-    <p:sldLayoutId id="2147483650" r:id="rId2"/>
-    <p:sldLayoutId id="2147483651" r:id="rId3"/>
-    <p:sldLayoutId id="2147483652" r:id="rId4"/>
-    <p:sldLayoutId id="2147483653" r:id="rId5"/>
-    <p:sldLayoutId id="2147483654" r:id="rId6"/>
+    <p:sldLayoutId xmlns:r="http://schemas.openxmlformats.org/officeDocument/2006/relationships" id="2147483649" r:id="R25243f9d460c4fdf"/>
+    <p:sldLayoutId xmlns:r="http://schemas.openxmlformats.org/officeDocument/2006/relationships" id="2147483650" r:id="R555e76455c084a64"/>
+    <p:sldLayoutId xmlns:r="http://schemas.openxmlformats.org/officeDocument/2006/relationships" id="2147483651" r:id="Rd03385edcf99485c"/>
+    <p:sldLayoutId xmlns:r="http://schemas.openxmlformats.org/officeDocument/2006/relationships" id="2147483652" r:id="R3bfc03f8f66e4933"/>
+    <p:sldLayoutId xmlns:r="http://schemas.openxmlformats.org/officeDocument/2006/relationships" id="2147483653" r:id="Rb5b6aa7234d24542"/>
+    <p:sldLayoutId xmlns:r="http://schemas.openxmlformats.org/officeDocument/2006/relationships" id="2147483654" r:id="Rd71e833b60cb40e6"/>
   </p:sldLayoutIdLst>
   <p:txStyles>
     <p:titleStyle>
-      <a:lvl1pPr algn="l">
+      <a:lvl1pPr xmlns:a="http://schemas.openxmlformats.org/drawingml/2006/main" algn="l">
         <a:lnSpc>
           <a:spcPct val="90000"/>
         </a:lnSpc>
@@ -2950,7 +3108,7 @@
       </a:lvl1pPr>
     </p:titleStyle>
     <p:bodyStyle>
-      <a:lvl1pPr marL="228600" indent="-228600" algn="l">
+      <a:lvl1pPr xmlns:a="http://schemas.openxmlformats.org/drawingml/2006/main" marL="228600" indent="-228600" algn="l">
         <a:lnSpc>
           <a:spcPct val="90000"/>
         </a:lnSpc>
@@ -2967,7 +3125,7 @@
           <a:cs typeface="+mn-lt"/>
         </a:defRPr>
       </a:lvl1pPr>
-      <a:lvl2pPr marL="685800" indent="-228600" algn="l">
+      <a:lvl2pPr xmlns:a="http://schemas.openxmlformats.org/drawingml/2006/main" marL="685800" indent="-228600" algn="l">
         <a:lnSpc>
           <a:spcPct val="90000"/>
         </a:lnSpc>
@@ -2984,7 +3142,7 @@
           <a:cs typeface="+mn-lt"/>
         </a:defRPr>
       </a:lvl2pPr>
-      <a:lvl3pPr marL="1143000" indent="-228600" algn="l">
+      <a:lvl3pPr xmlns:a="http://schemas.openxmlformats.org/drawingml/2006/main" marL="1143000" indent="-228600" algn="l">
         <a:lnSpc>
           <a:spcPct val="90000"/>
         </a:lnSpc>
@@ -3001,7 +3159,7 @@
           <a:cs typeface="+mn-lt"/>
         </a:defRPr>
       </a:lvl3pPr>
-      <a:lvl4pPr marL="1600200" indent="-228600" algn="l">
+      <a:lvl4pPr xmlns:a="http://schemas.openxmlformats.org/drawingml/2006/main" marL="1600200" indent="-228600" algn="l">
         <a:lnSpc>
           <a:spcPct val="90000"/>
         </a:lnSpc>
@@ -3018,7 +3176,7 @@
           <a:cs typeface="+mn-lt"/>
         </a:defRPr>
       </a:lvl4pPr>
-      <a:lvl5pPr marL="2057400" indent="-228600" algn="l">
+      <a:lvl5pPr xmlns:a="http://schemas.openxmlformats.org/drawingml/2006/main" marL="2057400" indent="-228600" algn="l">
         <a:lnSpc>
           <a:spcPct val="90000"/>
         </a:lnSpc>
@@ -3035,7 +3193,7 @@
           <a:cs typeface="+mn-lt"/>
         </a:defRPr>
       </a:lvl5pPr>
-      <a:lvl6pPr marL="2514600" indent="-228600" algn="l">
+      <a:lvl6pPr xmlns:a="http://schemas.openxmlformats.org/drawingml/2006/main" marL="2514600" indent="-228600" algn="l">
         <a:lnSpc>
           <a:spcPct val="90000"/>
         </a:lnSpc>
@@ -3052,7 +3210,7 @@
           <a:cs typeface="+mn-lt"/>
         </a:defRPr>
       </a:lvl6pPr>
-      <a:lvl7pPr marL="2971800" indent="-228600" algn="l">
+      <a:lvl7pPr xmlns:a="http://schemas.openxmlformats.org/drawingml/2006/main" marL="2971800" indent="-228600" algn="l">
         <a:lnSpc>
           <a:spcPct val="90000"/>
         </a:lnSpc>
@@ -3069,7 +3227,7 @@
           <a:cs typeface="+mn-lt"/>
         </a:defRPr>
       </a:lvl7pPr>
-      <a:lvl8pPr marL="3429000" indent="-228600" algn="l">
+      <a:lvl8pPr xmlns:a="http://schemas.openxmlformats.org/drawingml/2006/main" marL="3429000" indent="-228600" algn="l">
         <a:lnSpc>
           <a:spcPct val="90000"/>
         </a:lnSpc>
@@ -3086,7 +3244,7 @@
           <a:cs typeface="+mn-lt"/>
         </a:defRPr>
       </a:lvl8pPr>
-      <a:lvl9pPr marL="3886200" indent="-228600" algn="l">
+      <a:lvl9pPr xmlns:a="http://schemas.openxmlformats.org/drawingml/2006/main" marL="3886200" indent="-228600" algn="l">
         <a:lnSpc>
           <a:spcPct val="90000"/>
         </a:lnSpc>
@@ -3105,7 +3263,7 @@
       </a:lvl9pPr>
     </p:bodyStyle>
     <p:otherStyle>
-      <a:lvl1pPr marL="0" algn="l">
+      <a:lvl1pPr xmlns:a="http://schemas.openxmlformats.org/drawingml/2006/main" marL="0" algn="l">
         <a:buNone/>
         <a:defRPr sz="1800">
           <a:solidFill>
@@ -3116,7 +3274,7 @@
           <a:cs typeface="+mn-lt"/>
         </a:defRPr>
       </a:lvl1pPr>
-      <a:lvl2pPr marL="457200" algn="l">
+      <a:lvl2pPr xmlns:a="http://schemas.openxmlformats.org/drawingml/2006/main" marL="457200" algn="l">
         <a:buNone/>
         <a:defRPr sz="1800">
           <a:solidFill>
@@ -3127,7 +3285,7 @@
           <a:cs typeface="+mn-lt"/>
         </a:defRPr>
       </a:lvl2pPr>
-      <a:lvl3pPr marL="914400" algn="l">
+      <a:lvl3pPr xmlns:a="http://schemas.openxmlformats.org/drawingml/2006/main" marL="914400" algn="l">
         <a:buNone/>
         <a:defRPr sz="1800">
           <a:solidFill>
@@ -3138,7 +3296,7 @@
           <a:cs typeface="+mn-lt"/>
         </a:defRPr>
       </a:lvl3pPr>
-      <a:lvl4pPr marL="1371600" algn="l">
+      <a:lvl4pPr xmlns:a="http://schemas.openxmlformats.org/drawingml/2006/main" marL="1371600" algn="l">
         <a:buNone/>
         <a:defRPr sz="1800">
           <a:solidFill>
@@ -3149,7 +3307,7 @@
           <a:cs typeface="+mn-lt"/>
         </a:defRPr>
       </a:lvl4pPr>
-      <a:lvl5pPr marL="1828800" algn="l">
+      <a:lvl5pPr xmlns:a="http://schemas.openxmlformats.org/drawingml/2006/main" marL="1828800" algn="l">
         <a:buNone/>
         <a:defRPr sz="1800">
           <a:solidFill>
@@ -3160,7 +3318,7 @@
           <a:cs typeface="+mn-lt"/>
         </a:defRPr>
       </a:lvl5pPr>
-      <a:lvl6pPr marL="2286000" algn="l">
+      <a:lvl6pPr xmlns:a="http://schemas.openxmlformats.org/drawingml/2006/main" marL="2286000" algn="l">
         <a:buNone/>
         <a:defRPr sz="1800">
           <a:solidFill>
@@ -3171,7 +3329,7 @@
           <a:cs typeface="+mn-lt"/>
         </a:defRPr>
       </a:lvl6pPr>
-      <a:lvl7pPr marL="2743200" algn="l">
+      <a:lvl7pPr xmlns:a="http://schemas.openxmlformats.org/drawingml/2006/main" marL="2743200" algn="l">
         <a:buNone/>
         <a:defRPr sz="1800">
           <a:solidFill>
@@ -3182,7 +3340,7 @@
           <a:cs typeface="+mn-lt"/>
         </a:defRPr>
       </a:lvl7pPr>
-      <a:lvl8pPr marL="3200400" algn="l">
+      <a:lvl8pPr xmlns:a="http://schemas.openxmlformats.org/drawingml/2006/main" marL="3200400" algn="l">
         <a:buNone/>
         <a:defRPr sz="1800">
           <a:solidFill>
@@ -3193,7 +3351,7 @@
           <a:cs typeface="+mn-lt"/>
         </a:defRPr>
       </a:lvl8pPr>
-      <a:lvl9pPr marL="3657600" algn="l">
+      <a:lvl9pPr xmlns:a="http://schemas.openxmlformats.org/drawingml/2006/main" marL="3657600" algn="l">
         <a:buNone/>
         <a:defRPr sz="1800">
           <a:solidFill>
@@ -3209,15 +3367,259 @@
 </p:sldMaster>
 </file>
 
+<file path=ppt/slideMasters/theme/theme2.xml><?xml version="1.0" encoding="utf-8"?>
+<a:theme xmlns:a="http://schemas.openxmlformats.org/drawingml/2006/main" name="ChatGPT">
+  <a:themeElements>
+    <a:clrScheme name="ChatGPT">
+      <a:dk1>
+        <a:srgbClr val="000000"/>
+      </a:dk1>
+      <a:lt1>
+        <a:srgbClr val="FFFFFF"/>
+      </a:lt1>
+      <a:dk2>
+        <a:srgbClr val="0E2841"/>
+      </a:dk2>
+      <a:lt2>
+        <a:srgbClr val="E8E8E8"/>
+      </a:lt2>
+      <a:accent1>
+        <a:srgbClr val="156082"/>
+      </a:accent1>
+      <a:accent2>
+        <a:srgbClr val="E97132"/>
+      </a:accent2>
+      <a:accent3>
+        <a:srgbClr val="196B24"/>
+      </a:accent3>
+      <a:accent4>
+        <a:srgbClr val="0F9ED5"/>
+      </a:accent4>
+      <a:accent5>
+        <a:srgbClr val="A02B93"/>
+      </a:accent5>
+      <a:accent6>
+        <a:srgbClr val="4EA72E"/>
+      </a:accent6>
+      <a:hlink>
+        <a:srgbClr val="467886"/>
+      </a:hlink>
+      <a:folHlink>
+        <a:srgbClr val="96607D"/>
+      </a:folHlink>
+    </a:clrScheme>
+    <a:fontScheme name="">
+      <a:majorFont>
+        <a:latin typeface="Aptos"/>
+        <a:ea typeface=""/>
+        <a:cs typeface=""/>
+      </a:majorFont>
+      <a:minorFont>
+        <a:latin typeface="Aptos"/>
+        <a:ea typeface=""/>
+        <a:cs typeface=""/>
+      </a:minorFont>
+    </a:fontScheme>
+    <a:fmtScheme name="ChatGPT">
+      <a:fillStyleLst>
+        <a:solidFill>
+          <a:schemeClr val="phClr"/>
+        </a:solidFill>
+        <a:gradFill>
+          <a:gsLst>
+            <a:gs pos="0">
+              <a:schemeClr val="phClr">
+                <a:tint val="67000"/>
+                <a:lumMod val="110000"/>
+                <a:satMod val="105000"/>
+              </a:schemeClr>
+            </a:gs>
+            <a:gs pos="50000">
+              <a:schemeClr val="phClr">
+                <a:tint val="73000"/>
+                <a:lumMod val="105000"/>
+                <a:satMod val="103000"/>
+              </a:schemeClr>
+            </a:gs>
+            <a:gs pos="100000">
+              <a:schemeClr val="phClr">
+                <a:tint val="81000"/>
+                <a:lumMod val="105000"/>
+                <a:satMod val="109000"/>
+              </a:schemeClr>
+            </a:gs>
+          </a:gsLst>
+          <a:lin ang="5400000" scaled="0"/>
+        </a:gradFill>
+        <a:gradFill>
+          <a:gsLst>
+            <a:gs pos="0">
+              <a:schemeClr val="phClr">
+                <a:tint val="94000"/>
+                <a:lumMod val="102000"/>
+                <a:satMod val="103000"/>
+              </a:schemeClr>
+            </a:gs>
+            <a:gs pos="50000">
+              <a:schemeClr val="phClr">
+                <a:shade val="100000"/>
+                <a:lumMod val="100000"/>
+                <a:satMod val="110000"/>
+              </a:schemeClr>
+            </a:gs>
+            <a:gs pos="100000">
+              <a:schemeClr val="phClr">
+                <a:shade val="78000"/>
+                <a:lumMod val="99000"/>
+                <a:satMod val="120000"/>
+              </a:schemeClr>
+            </a:gs>
+          </a:gsLst>
+          <a:lin ang="5400000" scaled="0"/>
+        </a:gradFill>
+      </a:fillStyleLst>
+      <a:lnStyleLst>
+        <a:ln w="12700">
+          <a:solidFill>
+            <a:schemeClr val="phClr"/>
+          </a:solidFill>
+          <a:prstDash val="solid"/>
+        </a:ln>
+        <a:ln w="19050">
+          <a:solidFill>
+            <a:schemeClr val="phClr"/>
+          </a:solidFill>
+          <a:prstDash val="solid"/>
+        </a:ln>
+        <a:ln w="25400">
+          <a:solidFill>
+            <a:schemeClr val="phClr"/>
+          </a:solidFill>
+          <a:prstDash val="solid"/>
+        </a:ln>
+      </a:lnStyleLst>
+      <a:effectStyleLst>
+        <a:effectStyle>
+          <a:effectLst/>
+        </a:effectStyle>
+        <a:effectStyle>
+          <a:effectLst/>
+        </a:effectStyle>
+        <a:effectStyle>
+          <a:effectLst>
+            <a:outerShdw blurRad="57150" dist="19050" dir="5400000">
+              <a:srgbClr val="000000">
+                <a:alpha val="16000"/>
+              </a:srgbClr>
+            </a:outerShdw>
+          </a:effectLst>
+        </a:effectStyle>
+        <a:effectStyle>
+          <a:effectLst>
+            <a:outerShdw blurRad="19050" dist="9525" dir="5400000">
+              <a:srgbClr val="000000">
+                <a:alpha val="6000"/>
+              </a:srgbClr>
+            </a:outerShdw>
+          </a:effectLst>
+        </a:effectStyle>
+        <a:effectStyle>
+          <a:effectLst>
+            <a:outerShdw blurRad="28575" dist="9525" dir="5400000">
+              <a:srgbClr val="000000">
+                <a:alpha val="8000"/>
+              </a:srgbClr>
+            </a:outerShdw>
+          </a:effectLst>
+        </a:effectStyle>
+        <a:effectStyle>
+          <a:effectLst>
+            <a:outerShdw blurRad="57150" dist="19050" dir="5400000">
+              <a:srgbClr val="000000">
+                <a:alpha val="10000"/>
+              </a:srgbClr>
+            </a:outerShdw>
+          </a:effectLst>
+        </a:effectStyle>
+        <a:effectStyle>
+          <a:effectLst>
+            <a:outerShdw blurRad="114300" dist="38100" dir="5400000">
+              <a:srgbClr val="000000">
+                <a:alpha val="12000"/>
+              </a:srgbClr>
+            </a:outerShdw>
+          </a:effectLst>
+        </a:effectStyle>
+        <a:effectStyle>
+          <a:effectLst>
+            <a:outerShdw blurRad="171450" dist="57150" dir="5400000">
+              <a:srgbClr val="000000">
+                <a:alpha val="16000"/>
+              </a:srgbClr>
+            </a:outerShdw>
+          </a:effectLst>
+        </a:effectStyle>
+        <a:effectStyle>
+          <a:effectLst>
+            <a:outerShdw blurRad="266700" dist="95250" dir="5400000">
+              <a:srgbClr val="000000">
+                <a:alpha val="24000"/>
+              </a:srgbClr>
+            </a:outerShdw>
+          </a:effectLst>
+        </a:effectStyle>
+      </a:effectStyleLst>
+      <a:bgFillStyleLst>
+        <a:solidFill>
+          <a:schemeClr val="phClr"/>
+        </a:solidFill>
+        <a:solidFill>
+          <a:schemeClr val="phClr">
+            <a:tint val="95000"/>
+            <a:satMod val="170000"/>
+          </a:schemeClr>
+        </a:solidFill>
+        <a:gradFill>
+          <a:gsLst>
+            <a:gs pos="0">
+              <a:schemeClr val="phClr">
+                <a:tint val="93000"/>
+                <a:shade val="98000"/>
+                <a:lumMod val="102000"/>
+                <a:satMod val="150000"/>
+              </a:schemeClr>
+            </a:gs>
+            <a:gs pos="50000">
+              <a:schemeClr val="phClr">
+                <a:tint val="98000"/>
+                <a:shade val="90000"/>
+                <a:lumMod val="103000"/>
+                <a:satMod val="130000"/>
+              </a:schemeClr>
+            </a:gs>
+            <a:gs pos="100000">
+              <a:schemeClr val="phClr">
+                <a:shade val="63000"/>
+                <a:satMod val="120000"/>
+              </a:schemeClr>
+            </a:gs>
+          </a:gsLst>
+          <a:lin ang="5400000" scaled="0"/>
+        </a:gradFill>
+      </a:bgFillStyleLst>
+    </a:fmtScheme>
+  </a:themeElements>
+</a:theme>
+</file>
+
 <file path=ppt/slides/slide1.xml><?xml version="1.0" encoding="utf-8"?>
-<p:sld xmlns:a="http://schemas.openxmlformats.org/drawingml/2006/main" xmlns:r="http://schemas.openxmlformats.org/officeDocument/2006/relationships" xmlns:p="http://schemas.openxmlformats.org/presentationml/2006/main">
+<p:sld xmlns:p="http://schemas.openxmlformats.org/presentationml/2006/main">
   <p:cSld>
     <p:bg>
       <p:bgPr>
-        <a:solidFill>
+        <a:solidFill xmlns:a="http://schemas.openxmlformats.org/drawingml/2006/main">
           <a:srgbClr val="F7F6F2"/>
         </a:solidFill>
-        <a:effectLst/>
       </p:bgPr>
     </p:bg>
     <p:spTree>
@@ -3227,44 +3629,39 @@
         <p:nvPr/>
       </p:nvGrpSpPr>
       <p:grpSpPr>
-        <a:xfrm>
-          <a:off x="0" y="0"/>
-          <a:ext cx="0" cy="0"/>
-          <a:chOff x="0" y="0"/>
-          <a:chExt cx="0" cy="0"/>
-        </a:xfrm>
+        <a:xfrm xmlns:a="http://schemas.openxmlformats.org/drawingml/2006/main"/>
       </p:grpSpPr>
       <p:sp>
         <p:nvSpPr>
           <p:cNvPr id="14" name="seccio">
-            <a:extLst>
+            <a:extLst xmlns:a="http://schemas.openxmlformats.org/drawingml/2006/main">
               <a:ext uri="{FF2B5EF4-FFF2-40B4-BE49-F238E27FC236}">
                 <a16:creationId xmlns:a16="http://schemas.microsoft.com/office/drawing/2014/main" id="{FD9E4CCB-79DC-42FE-A396-7AE86143A83E}"/>
               </a:ext>
             </a:extLst>
           </p:cNvPr>
           <p:cNvSpPr>
-            <a:spLocks noGrp="1"/>
+            <a:spLocks xmlns:a="http://schemas.openxmlformats.org/drawingml/2006/main" noGrp="1"/>
           </p:cNvSpPr>
           <p:nvPr/>
         </p:nvSpPr>
         <p:spPr>
-          <a:xfrm>
+          <a:xfrm xmlns:a="http://schemas.openxmlformats.org/drawingml/2006/main">
             <a:off x="609600" y="447675"/>
             <a:ext cx="4476750" cy="266700"/>
           </a:xfrm>
-          <a:prstGeom prst="rect">
+          <a:prstGeom xmlns:a="http://schemas.openxmlformats.org/drawingml/2006/main" prst="rect">
             <a:avLst/>
           </a:prstGeom>
-          <a:noFill/>
-          <a:ln w="0">
+          <a:noFill xmlns:a="http://schemas.openxmlformats.org/drawingml/2006/main"/>
+          <a:ln xmlns:a="http://schemas.openxmlformats.org/drawingml/2006/main" w="0">
             <a:noFill/>
             <a:prstDash val="solid"/>
           </a:ln>
         </p:spPr>
         <p:txBody>
-          <a:bodyPr/>
-          <a:lstStyle>
+          <a:bodyPr xmlns:a="http://schemas.openxmlformats.org/drawingml/2006/main"/>
+          <a:lstStyle xmlns:a="http://schemas.openxmlformats.org/drawingml/2006/main">
             <a:defPPr>
               <a:defRPr sz="1350" b="1">
                 <a:solidFill>
@@ -3276,6 +3673,7 @@
               </a:defRPr>
             </a:defPPr>
             <a:lvl1pPr>
+              <a:buNone/>
               <a:defRPr sz="1350" b="1">
                 <a:solidFill>
                   <a:srgbClr val="183D34"/>
@@ -3286,6 +3684,7 @@
               </a:defRPr>
             </a:lvl1pPr>
             <a:lvl2pPr>
+              <a:buNone/>
               <a:defRPr sz="1350" b="1">
                 <a:solidFill>
                   <a:srgbClr val="183D34"/>
@@ -3296,6 +3695,7 @@
               </a:defRPr>
             </a:lvl2pPr>
             <a:lvl3pPr>
+              <a:buNone/>
               <a:defRPr sz="1350" b="1">
                 <a:solidFill>
                   <a:srgbClr val="183D34"/>
@@ -3306,6 +3706,7 @@
               </a:defRPr>
             </a:lvl3pPr>
             <a:lvl4pPr>
+              <a:buNone/>
               <a:defRPr sz="1350" b="1">
                 <a:solidFill>
                   <a:srgbClr val="183D34"/>
@@ -3316,6 +3717,7 @@
               </a:defRPr>
             </a:lvl4pPr>
             <a:lvl5pPr>
+              <a:buNone/>
               <a:defRPr sz="1350" b="1">
                 <a:solidFill>
                   <a:srgbClr val="183D34"/>
@@ -3326,6 +3728,7 @@
               </a:defRPr>
             </a:lvl5pPr>
             <a:lvl6pPr>
+              <a:buNone/>
               <a:defRPr sz="1350" b="1">
                 <a:solidFill>
                   <a:srgbClr val="183D34"/>
@@ -3336,6 +3739,7 @@
               </a:defRPr>
             </a:lvl6pPr>
             <a:lvl7pPr>
+              <a:buNone/>
               <a:defRPr sz="1350" b="1">
                 <a:solidFill>
                   <a:srgbClr val="183D34"/>
@@ -3346,6 +3750,7 @@
               </a:defRPr>
             </a:lvl7pPr>
             <a:lvl8pPr>
+              <a:buNone/>
               <a:defRPr sz="1350" b="1">
                 <a:solidFill>
                   <a:srgbClr val="183D34"/>
@@ -3356,6 +3761,7 @@
               </a:defRPr>
             </a:lvl8pPr>
             <a:lvl9pPr>
+              <a:buNone/>
               <a:defRPr sz="1350" b="1">
                 <a:solidFill>
                   <a:srgbClr val="183D34"/>
@@ -3366,8 +3772,9 @@
               </a:defRPr>
             </a:lvl9pPr>
           </a:lstStyle>
-          <a:p>
+          <a:p xmlns:a="http://schemas.openxmlformats.org/drawingml/2006/main">
             <a:pPr>
+              <a:buNone/>
               <a:defRPr sz="1350" b="1">
                 <a:solidFill>
                   <a:srgbClr val="183D34"/>
@@ -3386,7 +3793,7 @@
                 <a:ea typeface="Arial"/>
                 <a:cs typeface="Arial"/>
               </a:rPr>
-              <a:t>PRÀCTICA 1 · DEMOSTRACIÓ</a:t>
+              <a:t>PRÀCTICA 1 · APP DE WINDOWS</a:t>
             </a:r>
           </a:p>
         </p:txBody>
@@ -3394,34 +3801,34 @@
       <p:sp>
         <p:nvSpPr>
           <p:cNvPr id="2" name="titol">
-            <a:extLst>
+            <a:extLst xmlns:a="http://schemas.openxmlformats.org/drawingml/2006/main">
               <a:ext uri="{FF2B5EF4-FFF2-40B4-BE49-F238E27FC236}">
                 <a16:creationId xmlns:a16="http://schemas.microsoft.com/office/drawing/2014/main" id="{4C65DA44-5476-412D-BBBF-30C99842FAE5}"/>
               </a:ext>
             </a:extLst>
           </p:cNvPr>
           <p:cNvSpPr>
-            <a:spLocks noGrp="1"/>
+            <a:spLocks xmlns:a="http://schemas.openxmlformats.org/drawingml/2006/main" noGrp="1"/>
           </p:cNvSpPr>
           <p:nvPr/>
         </p:nvSpPr>
         <p:spPr>
-          <a:xfrm>
+          <a:xfrm xmlns:a="http://schemas.openxmlformats.org/drawingml/2006/main">
             <a:off x="609600" y="847725"/>
             <a:ext cx="4953000" cy="762000"/>
           </a:xfrm>
-          <a:prstGeom prst="rect">
+          <a:prstGeom xmlns:a="http://schemas.openxmlformats.org/drawingml/2006/main" prst="rect">
             <a:avLst/>
           </a:prstGeom>
-          <a:noFill/>
-          <a:ln w="0">
+          <a:noFill xmlns:a="http://schemas.openxmlformats.org/drawingml/2006/main"/>
+          <a:ln xmlns:a="http://schemas.openxmlformats.org/drawingml/2006/main" w="0">
             <a:noFill/>
             <a:prstDash val="solid"/>
           </a:ln>
         </p:spPr>
         <p:txBody>
-          <a:bodyPr/>
-          <a:lstStyle>
+          <a:bodyPr xmlns:a="http://schemas.openxmlformats.org/drawingml/2006/main"/>
+          <a:lstStyle xmlns:a="http://schemas.openxmlformats.org/drawingml/2006/main">
             <a:defPPr>
               <a:defRPr sz="4650" b="1">
                 <a:solidFill>
@@ -3433,6 +3840,7 @@
               </a:defRPr>
             </a:defPPr>
             <a:lvl1pPr>
+              <a:buNone/>
               <a:defRPr sz="4650" b="1">
                 <a:solidFill>
                   <a:srgbClr val="183D34"/>
@@ -3443,6 +3851,7 @@
               </a:defRPr>
             </a:lvl1pPr>
             <a:lvl2pPr>
+              <a:buNone/>
               <a:defRPr sz="4650" b="1">
                 <a:solidFill>
                   <a:srgbClr val="183D34"/>
@@ -3453,6 +3862,7 @@
               </a:defRPr>
             </a:lvl2pPr>
             <a:lvl3pPr>
+              <a:buNone/>
               <a:defRPr sz="4650" b="1">
                 <a:solidFill>
                   <a:srgbClr val="183D34"/>
@@ -3463,6 +3873,7 @@
               </a:defRPr>
             </a:lvl3pPr>
             <a:lvl4pPr>
+              <a:buNone/>
               <a:defRPr sz="4650" b="1">
                 <a:solidFill>
                   <a:srgbClr val="183D34"/>
@@ -3473,6 +3884,7 @@
               </a:defRPr>
             </a:lvl4pPr>
             <a:lvl5pPr>
+              <a:buNone/>
               <a:defRPr sz="4650" b="1">
                 <a:solidFill>
                   <a:srgbClr val="183D34"/>
@@ -3483,6 +3895,7 @@
               </a:defRPr>
             </a:lvl5pPr>
             <a:lvl6pPr>
+              <a:buNone/>
               <a:defRPr sz="4650" b="1">
                 <a:solidFill>
                   <a:srgbClr val="183D34"/>
@@ -3493,6 +3906,7 @@
               </a:defRPr>
             </a:lvl6pPr>
             <a:lvl7pPr>
+              <a:buNone/>
               <a:defRPr sz="4650" b="1">
                 <a:solidFill>
                   <a:srgbClr val="183D34"/>
@@ -3503,6 +3917,7 @@
               </a:defRPr>
             </a:lvl7pPr>
             <a:lvl8pPr>
+              <a:buNone/>
               <a:defRPr sz="4650" b="1">
                 <a:solidFill>
                   <a:srgbClr val="183D34"/>
@@ -3513,6 +3928,7 @@
               </a:defRPr>
             </a:lvl8pPr>
             <a:lvl9pPr>
+              <a:buNone/>
               <a:defRPr sz="4650" b="1">
                 <a:solidFill>
                   <a:srgbClr val="183D34"/>
@@ -3523,8 +3939,9 @@
               </a:defRPr>
             </a:lvl9pPr>
           </a:lstStyle>
-          <a:p>
+          <a:p xmlns:a="http://schemas.openxmlformats.org/drawingml/2006/main">
             <a:pPr>
+              <a:buNone/>
               <a:defRPr sz="4650" b="1">
                 <a:solidFill>
                   <a:srgbClr val="183D34"/>
@@ -3551,34 +3968,34 @@
       <p:sp>
         <p:nvSpPr>
           <p:cNvPr id="3" name="resum">
-            <a:extLst>
+            <a:extLst xmlns:a="http://schemas.openxmlformats.org/drawingml/2006/main">
               <a:ext uri="{FF2B5EF4-FFF2-40B4-BE49-F238E27FC236}">
                 <a16:creationId xmlns:a16="http://schemas.microsoft.com/office/drawing/2014/main" id="{444278B0-E610-4DB5-A6DA-5AFE1DFFD444}"/>
               </a:ext>
             </a:extLst>
           </p:cNvPr>
           <p:cNvSpPr>
-            <a:spLocks noGrp="1"/>
+            <a:spLocks xmlns:a="http://schemas.openxmlformats.org/drawingml/2006/main" noGrp="1"/>
           </p:cNvSpPr>
           <p:nvPr/>
         </p:nvSpPr>
         <p:spPr>
-          <a:xfrm>
+          <a:xfrm xmlns:a="http://schemas.openxmlformats.org/drawingml/2006/main">
             <a:off x="609600" y="1609725"/>
             <a:ext cx="10572750" cy="762000"/>
           </a:xfrm>
-          <a:prstGeom prst="rect">
+          <a:prstGeom xmlns:a="http://schemas.openxmlformats.org/drawingml/2006/main" prst="rect">
             <a:avLst/>
           </a:prstGeom>
-          <a:noFill/>
-          <a:ln w="0">
+          <a:noFill xmlns:a="http://schemas.openxmlformats.org/drawingml/2006/main"/>
+          <a:ln xmlns:a="http://schemas.openxmlformats.org/drawingml/2006/main" w="0">
             <a:noFill/>
             <a:prstDash val="solid"/>
           </a:ln>
         </p:spPr>
         <p:txBody>
-          <a:bodyPr/>
-          <a:lstStyle>
+          <a:bodyPr xmlns:a="http://schemas.openxmlformats.org/drawingml/2006/main"/>
+          <a:lstStyle xmlns:a="http://schemas.openxmlformats.org/drawingml/2006/main">
             <a:defPPr>
               <a:defRPr sz="2175" b="0">
                 <a:solidFill>
@@ -3590,6 +4007,7 @@
               </a:defRPr>
             </a:defPPr>
             <a:lvl1pPr>
+              <a:buNone/>
               <a:defRPr sz="2175" b="0">
                 <a:solidFill>
                   <a:srgbClr val="172B27"/>
@@ -3600,6 +4018,7 @@
               </a:defRPr>
             </a:lvl1pPr>
             <a:lvl2pPr>
+              <a:buNone/>
               <a:defRPr sz="2175" b="0">
                 <a:solidFill>
                   <a:srgbClr val="172B27"/>
@@ -3610,6 +4029,7 @@
               </a:defRPr>
             </a:lvl2pPr>
             <a:lvl3pPr>
+              <a:buNone/>
               <a:defRPr sz="2175" b="0">
                 <a:solidFill>
                   <a:srgbClr val="172B27"/>
@@ -3620,6 +4040,7 @@
               </a:defRPr>
             </a:lvl3pPr>
             <a:lvl4pPr>
+              <a:buNone/>
               <a:defRPr sz="2175" b="0">
                 <a:solidFill>
                   <a:srgbClr val="172B27"/>
@@ -3630,6 +4051,7 @@
               </a:defRPr>
             </a:lvl4pPr>
             <a:lvl5pPr>
+              <a:buNone/>
               <a:defRPr sz="2175" b="0">
                 <a:solidFill>
                   <a:srgbClr val="172B27"/>
@@ -3640,6 +4062,7 @@
               </a:defRPr>
             </a:lvl5pPr>
             <a:lvl6pPr>
+              <a:buNone/>
               <a:defRPr sz="2175" b="0">
                 <a:solidFill>
                   <a:srgbClr val="172B27"/>
@@ -3650,6 +4073,7 @@
               </a:defRPr>
             </a:lvl6pPr>
             <a:lvl7pPr>
+              <a:buNone/>
               <a:defRPr sz="2175" b="0">
                 <a:solidFill>
                   <a:srgbClr val="172B27"/>
@@ -3660,6 +4084,7 @@
               </a:defRPr>
             </a:lvl7pPr>
             <a:lvl8pPr>
+              <a:buNone/>
               <a:defRPr sz="2175" b="0">
                 <a:solidFill>
                   <a:srgbClr val="172B27"/>
@@ -3670,6 +4095,7 @@
               </a:defRPr>
             </a:lvl8pPr>
             <a:lvl9pPr>
+              <a:buNone/>
               <a:defRPr sz="2175" b="0">
                 <a:solidFill>
                   <a:srgbClr val="172B27"/>
@@ -3680,8 +4106,9 @@
               </a:defRPr>
             </a:lvl9pPr>
           </a:lstStyle>
-          <a:p>
+          <a:p xmlns:a="http://schemas.openxmlformats.org/drawingml/2006/main">
             <a:pPr>
+              <a:buNone/>
               <a:defRPr sz="2175" b="0">
                 <a:solidFill>
                   <a:srgbClr val="172B27"/>
@@ -3692,7 +4119,7 @@
               </a:defRPr>
             </a:pPr>
             <a:r>
-              <a:rPr sz="2175" b="0" dirty="0" err="1">
+              <a:rPr sz="2175" b="0">
                 <a:solidFill>
                   <a:srgbClr val="172B27"/>
                 </a:solidFill>
@@ -3700,185 +4127,9 @@
                 <a:ea typeface="Arial"/>
                 <a:cs typeface="Arial"/>
               </a:rPr>
-              <a:t>Menús</a:t>
+              <a:t>Menús personalitzats · client i administrador en una mateixa app</a:t>
             </a:r>
-            <a:r>
-              <a:rPr sz="2175" b="0" dirty="0">
-                <a:solidFill>
-                  <a:srgbClr val="172B27"/>
-                </a:solidFill>
-                <a:latin typeface="Arial"/>
-                <a:ea typeface="Arial"/>
-                <a:cs typeface="Arial"/>
-              </a:rPr>
-              <a:t> </a:t>
-            </a:r>
-            <a:r>
-              <a:rPr sz="2175" b="0" dirty="0" err="1">
-                <a:solidFill>
-                  <a:srgbClr val="172B27"/>
-                </a:solidFill>
-                <a:latin typeface="Arial"/>
-                <a:ea typeface="Arial"/>
-                <a:cs typeface="Arial"/>
-              </a:rPr>
-              <a:t>segons</a:t>
-            </a:r>
-            <a:r>
-              <a:rPr sz="2175" b="0" dirty="0">
-                <a:solidFill>
-                  <a:srgbClr val="172B27"/>
-                </a:solidFill>
-                <a:latin typeface="Arial"/>
-                <a:ea typeface="Arial"/>
-                <a:cs typeface="Arial"/>
-              </a:rPr>
-              <a:t> els dies, els </a:t>
-            </a:r>
-            <a:r>
-              <a:rPr sz="2175" b="0" dirty="0" err="1">
-                <a:solidFill>
-                  <a:srgbClr val="172B27"/>
-                </a:solidFill>
-                <a:latin typeface="Arial"/>
-                <a:ea typeface="Arial"/>
-                <a:cs typeface="Arial"/>
-              </a:rPr>
-              <a:t>àpats</a:t>
-            </a:r>
-            <a:r>
-              <a:rPr sz="2175" b="0" dirty="0">
-                <a:solidFill>
-                  <a:srgbClr val="172B27"/>
-                </a:solidFill>
-                <a:latin typeface="Arial"/>
-                <a:ea typeface="Arial"/>
-                <a:cs typeface="Arial"/>
-              </a:rPr>
-              <a:t> </a:t>
-            </a:r>
-            <a:r>
-              <a:rPr sz="2175" b="0" dirty="0" err="1">
-                <a:solidFill>
-                  <a:srgbClr val="172B27"/>
-                </a:solidFill>
-                <a:latin typeface="Arial"/>
-                <a:ea typeface="Arial"/>
-                <a:cs typeface="Arial"/>
-              </a:rPr>
-              <a:t>i</a:t>
-            </a:r>
-            <a:r>
-              <a:rPr sz="2175" b="0" dirty="0">
-                <a:solidFill>
-                  <a:srgbClr val="172B27"/>
-                </a:solidFill>
-                <a:latin typeface="Arial"/>
-                <a:ea typeface="Arial"/>
-                <a:cs typeface="Arial"/>
-              </a:rPr>
-              <a:t> les </a:t>
-            </a:r>
-            <a:r>
-              <a:rPr sz="2175" b="0" dirty="0" err="1">
-                <a:solidFill>
-                  <a:srgbClr val="172B27"/>
-                </a:solidFill>
-                <a:latin typeface="Arial"/>
-                <a:ea typeface="Arial"/>
-                <a:cs typeface="Arial"/>
-              </a:rPr>
-              <a:t>restriccions</a:t>
-            </a:r>
-            <a:r>
-              <a:rPr sz="2175" b="0" dirty="0">
-                <a:solidFill>
-                  <a:srgbClr val="172B27"/>
-                </a:solidFill>
-                <a:latin typeface="Arial"/>
-                <a:ea typeface="Arial"/>
-                <a:cs typeface="Arial"/>
-              </a:rPr>
-              <a:t> </a:t>
-            </a:r>
-            <a:r>
-              <a:rPr sz="2175" b="0" dirty="0" err="1">
-                <a:solidFill>
-                  <a:srgbClr val="172B27"/>
-                </a:solidFill>
-                <a:latin typeface="Arial"/>
-                <a:ea typeface="Arial"/>
-                <a:cs typeface="Arial"/>
-              </a:rPr>
-              <a:t>que</a:t>
-            </a:r>
-            <a:r>
-              <a:rPr sz="2175" b="0" dirty="0">
-                <a:solidFill>
-                  <a:srgbClr val="172B27"/>
-                </a:solidFill>
-                <a:latin typeface="Arial"/>
-                <a:ea typeface="Arial"/>
-                <a:cs typeface="Arial"/>
-              </a:rPr>
-              <a:t> </a:t>
-            </a:r>
-            <a:r>
-              <a:rPr sz="2175" b="0" dirty="0" err="1">
-                <a:solidFill>
-                  <a:srgbClr val="172B27"/>
-                </a:solidFill>
-                <a:latin typeface="Arial"/>
-                <a:ea typeface="Arial"/>
-                <a:cs typeface="Arial"/>
-              </a:rPr>
-              <a:t>tria</a:t>
-            </a:r>
-            <a:r>
-              <a:rPr sz="2175" b="0" dirty="0">
-                <a:solidFill>
-                  <a:srgbClr val="172B27"/>
-                </a:solidFill>
-                <a:latin typeface="Arial"/>
-                <a:ea typeface="Arial"/>
-                <a:cs typeface="Arial"/>
-              </a:rPr>
-              <a:t> </a:t>
-            </a:r>
-            <a:r>
-              <a:rPr sz="2175" b="0" dirty="0" err="1">
-                <a:solidFill>
-                  <a:srgbClr val="172B27"/>
-                </a:solidFill>
-                <a:latin typeface="Arial"/>
-                <a:ea typeface="Arial"/>
-                <a:cs typeface="Arial"/>
-              </a:rPr>
-              <a:t>cada</a:t>
-            </a:r>
-            <a:r>
-              <a:rPr sz="2175" b="0" dirty="0">
-                <a:solidFill>
-                  <a:srgbClr val="172B27"/>
-                </a:solidFill>
-                <a:latin typeface="Arial"/>
-                <a:ea typeface="Arial"/>
-                <a:cs typeface="Arial"/>
-              </a:rPr>
-              <a:t> </a:t>
-            </a:r>
-            <a:r>
-              <a:rPr sz="2175" b="0" dirty="0" err="1">
-                <a:solidFill>
-                  <a:srgbClr val="172B27"/>
-                </a:solidFill>
-                <a:latin typeface="Arial"/>
-                <a:ea typeface="Arial"/>
-                <a:cs typeface="Arial"/>
-              </a:rPr>
-              <a:t>usuari</a:t>
-            </a:r>
-            <a:endParaRPr sz="2175" b="0" dirty="0">
+            <a:endParaRPr sz="2175" b="0">
               <a:solidFill>
                 <a:srgbClr val="172B27"/>
               </a:solidFill>
@@ -3892,34 +4143,34 @@
       <p:sp>
         <p:nvSpPr>
           <p:cNvPr id="4" name="pas-num-1">
-            <a:extLst>
+            <a:extLst xmlns:a="http://schemas.openxmlformats.org/drawingml/2006/main">
               <a:ext uri="{FF2B5EF4-FFF2-40B4-BE49-F238E27FC236}">
                 <a16:creationId xmlns:a16="http://schemas.microsoft.com/office/drawing/2014/main" id="{B97805FE-BDA4-48DB-B3E1-BFED094B26C2}"/>
               </a:ext>
             </a:extLst>
           </p:cNvPr>
           <p:cNvSpPr>
-            <a:spLocks noGrp="1"/>
+            <a:spLocks xmlns:a="http://schemas.openxmlformats.org/drawingml/2006/main" noGrp="1"/>
           </p:cNvSpPr>
           <p:nvPr/>
         </p:nvSpPr>
         <p:spPr>
-          <a:xfrm>
+          <a:xfrm xmlns:a="http://schemas.openxmlformats.org/drawingml/2006/main">
             <a:off x="619125" y="2714625"/>
             <a:ext cx="523875" cy="323850"/>
           </a:xfrm>
-          <a:prstGeom prst="rect">
+          <a:prstGeom xmlns:a="http://schemas.openxmlformats.org/drawingml/2006/main" prst="rect">
             <a:avLst/>
           </a:prstGeom>
-          <a:noFill/>
-          <a:ln w="0">
+          <a:noFill xmlns:a="http://schemas.openxmlformats.org/drawingml/2006/main"/>
+          <a:ln xmlns:a="http://schemas.openxmlformats.org/drawingml/2006/main" w="0">
             <a:noFill/>
             <a:prstDash val="solid"/>
           </a:ln>
         </p:spPr>
         <p:txBody>
-          <a:bodyPr/>
-          <a:lstStyle>
+          <a:bodyPr xmlns:a="http://schemas.openxmlformats.org/drawingml/2006/main"/>
+          <a:lstStyle xmlns:a="http://schemas.openxmlformats.org/drawingml/2006/main">
             <a:defPPr>
               <a:defRPr sz="1725" b="1">
                 <a:solidFill>
@@ -3931,6 +4182,7 @@
               </a:defRPr>
             </a:defPPr>
             <a:lvl1pPr>
+              <a:buNone/>
               <a:defRPr sz="1725" b="1">
                 <a:solidFill>
                   <a:srgbClr val="E76553"/>
@@ -3941,6 +4193,7 @@
               </a:defRPr>
             </a:lvl1pPr>
             <a:lvl2pPr>
+              <a:buNone/>
               <a:defRPr sz="1725" b="1">
                 <a:solidFill>
                   <a:srgbClr val="E76553"/>
@@ -3951,6 +4204,7 @@
               </a:defRPr>
             </a:lvl2pPr>
             <a:lvl3pPr>
+              <a:buNone/>
               <a:defRPr sz="1725" b="1">
                 <a:solidFill>
                   <a:srgbClr val="E76553"/>
@@ -3961,6 +4215,7 @@
               </a:defRPr>
             </a:lvl3pPr>
             <a:lvl4pPr>
+              <a:buNone/>
               <a:defRPr sz="1725" b="1">
                 <a:solidFill>
                   <a:srgbClr val="E76553"/>
@@ -3971,6 +4226,7 @@
               </a:defRPr>
             </a:lvl4pPr>
             <a:lvl5pPr>
+              <a:buNone/>
               <a:defRPr sz="1725" b="1">
                 <a:solidFill>
                   <a:srgbClr val="E76553"/>
@@ -3981,6 +4237,7 @@
               </a:defRPr>
             </a:lvl5pPr>
             <a:lvl6pPr>
+              <a:buNone/>
               <a:defRPr sz="1725" b="1">
                 <a:solidFill>
                   <a:srgbClr val="E76553"/>
@@ -3991,6 +4248,7 @@
               </a:defRPr>
             </a:lvl6pPr>
             <a:lvl7pPr>
+              <a:buNone/>
               <a:defRPr sz="1725" b="1">
                 <a:solidFill>
                   <a:srgbClr val="E76553"/>
@@ -4001,6 +4259,7 @@
               </a:defRPr>
             </a:lvl7pPr>
             <a:lvl8pPr>
+              <a:buNone/>
               <a:defRPr sz="1725" b="1">
                 <a:solidFill>
                   <a:srgbClr val="E76553"/>
@@ -4011,6 +4270,7 @@
               </a:defRPr>
             </a:lvl8pPr>
             <a:lvl9pPr>
+              <a:buNone/>
               <a:defRPr sz="1725" b="1">
                 <a:solidFill>
                   <a:srgbClr val="E76553"/>
@@ -4021,8 +4281,9 @@
               </a:defRPr>
             </a:lvl9pPr>
           </a:lstStyle>
-          <a:p>
+          <a:p xmlns:a="http://schemas.openxmlformats.org/drawingml/2006/main">
             <a:pPr>
+              <a:buNone/>
               <a:defRPr sz="1725" b="1">
                 <a:solidFill>
                   <a:srgbClr val="E76553"/>
@@ -4049,34 +4310,34 @@
       <p:sp>
         <p:nvSpPr>
           <p:cNvPr id="5" name="pas-text-1">
-            <a:extLst>
+            <a:extLst xmlns:a="http://schemas.openxmlformats.org/drawingml/2006/main">
               <a:ext uri="{FF2B5EF4-FFF2-40B4-BE49-F238E27FC236}">
                 <a16:creationId xmlns:a16="http://schemas.microsoft.com/office/drawing/2014/main" id="{999171C5-C964-4062-9318-77DC0AA86E9E}"/>
               </a:ext>
             </a:extLst>
           </p:cNvPr>
           <p:cNvSpPr>
-            <a:spLocks noGrp="1"/>
+            <a:spLocks xmlns:a="http://schemas.openxmlformats.org/drawingml/2006/main" noGrp="1"/>
           </p:cNvSpPr>
           <p:nvPr/>
         </p:nvSpPr>
         <p:spPr>
-          <a:xfrm>
+          <a:xfrm xmlns:a="http://schemas.openxmlformats.org/drawingml/2006/main">
             <a:off x="1143000" y="2714625"/>
             <a:ext cx="4095750" cy="571500"/>
           </a:xfrm>
-          <a:prstGeom prst="rect">
+          <a:prstGeom xmlns:a="http://schemas.openxmlformats.org/drawingml/2006/main" prst="rect">
             <a:avLst/>
           </a:prstGeom>
-          <a:noFill/>
-          <a:ln w="0">
+          <a:noFill xmlns:a="http://schemas.openxmlformats.org/drawingml/2006/main"/>
+          <a:ln xmlns:a="http://schemas.openxmlformats.org/drawingml/2006/main" w="0">
             <a:noFill/>
             <a:prstDash val="solid"/>
           </a:ln>
         </p:spPr>
         <p:txBody>
-          <a:bodyPr/>
-          <a:lstStyle>
+          <a:bodyPr xmlns:a="http://schemas.openxmlformats.org/drawingml/2006/main"/>
+          <a:lstStyle xmlns:a="http://schemas.openxmlformats.org/drawingml/2006/main">
             <a:defPPr>
               <a:defRPr sz="1725" b="0">
                 <a:solidFill>
@@ -4088,6 +4349,7 @@
               </a:defRPr>
             </a:defPPr>
             <a:lvl1pPr>
+              <a:buNone/>
               <a:defRPr sz="1725" b="0">
                 <a:solidFill>
                   <a:srgbClr val="172B27"/>
@@ -4098,6 +4360,7 @@
               </a:defRPr>
             </a:lvl1pPr>
             <a:lvl2pPr>
+              <a:buNone/>
               <a:defRPr sz="1725" b="0">
                 <a:solidFill>
                   <a:srgbClr val="172B27"/>
@@ -4108,6 +4371,7 @@
               </a:defRPr>
             </a:lvl2pPr>
             <a:lvl3pPr>
+              <a:buNone/>
               <a:defRPr sz="1725" b="0">
                 <a:solidFill>
                   <a:srgbClr val="172B27"/>
@@ -4118,6 +4382,7 @@
               </a:defRPr>
             </a:lvl3pPr>
             <a:lvl4pPr>
+              <a:buNone/>
               <a:defRPr sz="1725" b="0">
                 <a:solidFill>
                   <a:srgbClr val="172B27"/>
@@ -4128,6 +4393,7 @@
               </a:defRPr>
             </a:lvl4pPr>
             <a:lvl5pPr>
+              <a:buNone/>
               <a:defRPr sz="1725" b="0">
                 <a:solidFill>
                   <a:srgbClr val="172B27"/>
@@ -4138,6 +4404,7 @@
               </a:defRPr>
             </a:lvl5pPr>
             <a:lvl6pPr>
+              <a:buNone/>
               <a:defRPr sz="1725" b="0">
                 <a:solidFill>
                   <a:srgbClr val="172B27"/>
@@ -4148,6 +4415,7 @@
               </a:defRPr>
             </a:lvl6pPr>
             <a:lvl7pPr>
+              <a:buNone/>
               <a:defRPr sz="1725" b="0">
                 <a:solidFill>
                   <a:srgbClr val="172B27"/>
@@ -4158,6 +4426,7 @@
               </a:defRPr>
             </a:lvl7pPr>
             <a:lvl8pPr>
+              <a:buNone/>
               <a:defRPr sz="1725" b="0">
                 <a:solidFill>
                   <a:srgbClr val="172B27"/>
@@ -4168,6 +4437,7 @@
               </a:defRPr>
             </a:lvl8pPr>
             <a:lvl9pPr>
+              <a:buNone/>
               <a:defRPr sz="1725" b="0">
                 <a:solidFill>
                   <a:srgbClr val="172B27"/>
@@ -4178,8 +4448,9 @@
               </a:defRPr>
             </a:lvl9pPr>
           </a:lstStyle>
-          <a:p>
+          <a:p xmlns:a="http://schemas.openxmlformats.org/drawingml/2006/main">
             <a:pPr>
+              <a:buNone/>
               <a:defRPr sz="1725" b="0">
                 <a:solidFill>
                   <a:srgbClr val="172B27"/>
@@ -4190,7 +4461,7 @@
               </a:defRPr>
             </a:pPr>
             <a:r>
-              <a:rPr sz="1725" b="0" dirty="0" err="1">
+              <a:rPr sz="1725" b="0">
                 <a:solidFill>
                   <a:srgbClr val="172B27"/>
                 </a:solidFill>
@@ -4198,75 +4469,9 @@
                 <a:ea typeface="Arial"/>
                 <a:cs typeface="Arial"/>
               </a:rPr>
-              <a:t>Configurar</a:t>
+              <a:t>Configurar dies, àpats i dieta</a:t>
             </a:r>
-            <a:r>
-              <a:rPr sz="1725" b="0" dirty="0">
-                <a:solidFill>
-                  <a:srgbClr val="172B27"/>
-                </a:solidFill>
-                <a:latin typeface="Arial"/>
-                <a:ea typeface="Arial"/>
-                <a:cs typeface="Arial"/>
-              </a:rPr>
-              <a:t> dies, </a:t>
-            </a:r>
-            <a:r>
-              <a:rPr sz="1725" b="0" dirty="0" err="1">
-                <a:solidFill>
-                  <a:srgbClr val="172B27"/>
-                </a:solidFill>
-                <a:latin typeface="Arial"/>
-                <a:ea typeface="Arial"/>
-                <a:cs typeface="Arial"/>
-              </a:rPr>
-              <a:t>àpats</a:t>
-            </a:r>
-            <a:r>
-              <a:rPr sz="1725" b="0" dirty="0">
-                <a:solidFill>
-                  <a:srgbClr val="172B27"/>
-                </a:solidFill>
-                <a:latin typeface="Arial"/>
-                <a:ea typeface="Arial"/>
-                <a:cs typeface="Arial"/>
-              </a:rPr>
-              <a:t> </a:t>
-            </a:r>
-            <a:r>
-              <a:rPr sz="1725" b="0" dirty="0" err="1">
-                <a:solidFill>
-                  <a:srgbClr val="172B27"/>
-                </a:solidFill>
-                <a:latin typeface="Arial"/>
-                <a:ea typeface="Arial"/>
-                <a:cs typeface="Arial"/>
-              </a:rPr>
-              <a:t>i</a:t>
-            </a:r>
-            <a:r>
-              <a:rPr sz="1725" b="0" dirty="0">
-                <a:solidFill>
-                  <a:srgbClr val="172B27"/>
-                </a:solidFill>
-                <a:latin typeface="Arial"/>
-                <a:ea typeface="Arial"/>
-                <a:cs typeface="Arial"/>
-              </a:rPr>
-              <a:t> </a:t>
-            </a:r>
-            <a:r>
-              <a:rPr sz="1725" b="0" dirty="0" err="1">
-                <a:solidFill>
-                  <a:srgbClr val="172B27"/>
-                </a:solidFill>
-                <a:latin typeface="Arial"/>
-                <a:ea typeface="Arial"/>
-                <a:cs typeface="Arial"/>
-              </a:rPr>
-              <a:t>dieta</a:t>
-            </a:r>
-            <a:endParaRPr sz="1725" b="0" dirty="0">
+            <a:endParaRPr sz="1725" b="0">
               <a:solidFill>
                 <a:srgbClr val="172B27"/>
               </a:solidFill>
@@ -4280,34 +4485,34 @@
       <p:sp>
         <p:nvSpPr>
           <p:cNvPr id="6" name="pas-num-2">
-            <a:extLst>
+            <a:extLst xmlns:a="http://schemas.openxmlformats.org/drawingml/2006/main">
               <a:ext uri="{FF2B5EF4-FFF2-40B4-BE49-F238E27FC236}">
                 <a16:creationId xmlns:a16="http://schemas.microsoft.com/office/drawing/2014/main" id="{BB5FBB23-57DB-4A51-AE02-814E2B68A951}"/>
               </a:ext>
             </a:extLst>
           </p:cNvPr>
           <p:cNvSpPr>
-            <a:spLocks noGrp="1"/>
+            <a:spLocks xmlns:a="http://schemas.openxmlformats.org/drawingml/2006/main" noGrp="1"/>
           </p:cNvSpPr>
           <p:nvPr/>
         </p:nvSpPr>
         <p:spPr>
-          <a:xfrm>
+          <a:xfrm xmlns:a="http://schemas.openxmlformats.org/drawingml/2006/main">
             <a:off x="619125" y="3419475"/>
             <a:ext cx="523875" cy="323850"/>
           </a:xfrm>
-          <a:prstGeom prst="rect">
+          <a:prstGeom xmlns:a="http://schemas.openxmlformats.org/drawingml/2006/main" prst="rect">
             <a:avLst/>
           </a:prstGeom>
-          <a:noFill/>
-          <a:ln w="0">
+          <a:noFill xmlns:a="http://schemas.openxmlformats.org/drawingml/2006/main"/>
+          <a:ln xmlns:a="http://schemas.openxmlformats.org/drawingml/2006/main" w="0">
             <a:noFill/>
             <a:prstDash val="solid"/>
           </a:ln>
         </p:spPr>
         <p:txBody>
-          <a:bodyPr/>
-          <a:lstStyle>
+          <a:bodyPr xmlns:a="http://schemas.openxmlformats.org/drawingml/2006/main"/>
+          <a:lstStyle xmlns:a="http://schemas.openxmlformats.org/drawingml/2006/main">
             <a:defPPr>
               <a:defRPr sz="1725" b="1">
                 <a:solidFill>
@@ -4319,6 +4524,7 @@
               </a:defRPr>
             </a:defPPr>
             <a:lvl1pPr>
+              <a:buNone/>
               <a:defRPr sz="1725" b="1">
                 <a:solidFill>
                   <a:srgbClr val="E76553"/>
@@ -4329,6 +4535,7 @@
               </a:defRPr>
             </a:lvl1pPr>
             <a:lvl2pPr>
+              <a:buNone/>
               <a:defRPr sz="1725" b="1">
                 <a:solidFill>
                   <a:srgbClr val="E76553"/>
@@ -4339,6 +4546,7 @@
               </a:defRPr>
             </a:lvl2pPr>
             <a:lvl3pPr>
+              <a:buNone/>
               <a:defRPr sz="1725" b="1">
                 <a:solidFill>
                   <a:srgbClr val="E76553"/>
@@ -4349,6 +4557,7 @@
               </a:defRPr>
             </a:lvl3pPr>
             <a:lvl4pPr>
+              <a:buNone/>
               <a:defRPr sz="1725" b="1">
                 <a:solidFill>
                   <a:srgbClr val="E76553"/>
@@ -4359,6 +4568,7 @@
               </a:defRPr>
             </a:lvl4pPr>
             <a:lvl5pPr>
+              <a:buNone/>
               <a:defRPr sz="1725" b="1">
                 <a:solidFill>
                   <a:srgbClr val="E76553"/>
@@ -4369,6 +4579,7 @@
               </a:defRPr>
             </a:lvl5pPr>
             <a:lvl6pPr>
+              <a:buNone/>
               <a:defRPr sz="1725" b="1">
                 <a:solidFill>
                   <a:srgbClr val="E76553"/>
@@ -4379,6 +4590,7 @@
               </a:defRPr>
             </a:lvl6pPr>
             <a:lvl7pPr>
+              <a:buNone/>
               <a:defRPr sz="1725" b="1">
                 <a:solidFill>
                   <a:srgbClr val="E76553"/>
@@ -4389,6 +4601,7 @@
               </a:defRPr>
             </a:lvl7pPr>
             <a:lvl8pPr>
+              <a:buNone/>
               <a:defRPr sz="1725" b="1">
                 <a:solidFill>
                   <a:srgbClr val="E76553"/>
@@ -4399,6 +4612,7 @@
               </a:defRPr>
             </a:lvl8pPr>
             <a:lvl9pPr>
+              <a:buNone/>
               <a:defRPr sz="1725" b="1">
                 <a:solidFill>
                   <a:srgbClr val="E76553"/>
@@ -4409,8 +4623,9 @@
               </a:defRPr>
             </a:lvl9pPr>
           </a:lstStyle>
-          <a:p>
+          <a:p xmlns:a="http://schemas.openxmlformats.org/drawingml/2006/main">
             <a:pPr>
+              <a:buNone/>
               <a:defRPr sz="1725" b="1">
                 <a:solidFill>
                   <a:srgbClr val="E76553"/>
@@ -4437,34 +4652,34 @@
       <p:sp>
         <p:nvSpPr>
           <p:cNvPr id="7" name="pas-text-2">
-            <a:extLst>
+            <a:extLst xmlns:a="http://schemas.openxmlformats.org/drawingml/2006/main">
               <a:ext uri="{FF2B5EF4-FFF2-40B4-BE49-F238E27FC236}">
                 <a16:creationId xmlns:a16="http://schemas.microsoft.com/office/drawing/2014/main" id="{CC251D72-86D2-4AEC-8946-00BA845DB498}"/>
               </a:ext>
             </a:extLst>
           </p:cNvPr>
           <p:cNvSpPr>
-            <a:spLocks noGrp="1"/>
+            <a:spLocks xmlns:a="http://schemas.openxmlformats.org/drawingml/2006/main" noGrp="1"/>
           </p:cNvSpPr>
           <p:nvPr/>
         </p:nvSpPr>
         <p:spPr>
-          <a:xfrm>
+          <a:xfrm xmlns:a="http://schemas.openxmlformats.org/drawingml/2006/main">
             <a:off x="1143000" y="3419475"/>
             <a:ext cx="4095750" cy="571500"/>
           </a:xfrm>
-          <a:prstGeom prst="rect">
+          <a:prstGeom xmlns:a="http://schemas.openxmlformats.org/drawingml/2006/main" prst="rect">
             <a:avLst/>
           </a:prstGeom>
-          <a:noFill/>
-          <a:ln w="0">
+          <a:noFill xmlns:a="http://schemas.openxmlformats.org/drawingml/2006/main"/>
+          <a:ln xmlns:a="http://schemas.openxmlformats.org/drawingml/2006/main" w="0">
             <a:noFill/>
             <a:prstDash val="solid"/>
           </a:ln>
         </p:spPr>
         <p:txBody>
-          <a:bodyPr/>
-          <a:lstStyle>
+          <a:bodyPr xmlns:a="http://schemas.openxmlformats.org/drawingml/2006/main"/>
+          <a:lstStyle xmlns:a="http://schemas.openxmlformats.org/drawingml/2006/main">
             <a:defPPr>
               <a:defRPr sz="1725" b="0">
                 <a:solidFill>
@@ -4476,6 +4691,7 @@
               </a:defRPr>
             </a:defPPr>
             <a:lvl1pPr>
+              <a:buNone/>
               <a:defRPr sz="1725" b="0">
                 <a:solidFill>
                   <a:srgbClr val="172B27"/>
@@ -4486,6 +4702,7 @@
               </a:defRPr>
             </a:lvl1pPr>
             <a:lvl2pPr>
+              <a:buNone/>
               <a:defRPr sz="1725" b="0">
                 <a:solidFill>
                   <a:srgbClr val="172B27"/>
@@ -4496,6 +4713,7 @@
               </a:defRPr>
             </a:lvl2pPr>
             <a:lvl3pPr>
+              <a:buNone/>
               <a:defRPr sz="1725" b="0">
                 <a:solidFill>
                   <a:srgbClr val="172B27"/>
@@ -4506,6 +4724,7 @@
               </a:defRPr>
             </a:lvl3pPr>
             <a:lvl4pPr>
+              <a:buNone/>
               <a:defRPr sz="1725" b="0">
                 <a:solidFill>
                   <a:srgbClr val="172B27"/>
@@ -4516,6 +4735,7 @@
               </a:defRPr>
             </a:lvl4pPr>
             <a:lvl5pPr>
+              <a:buNone/>
               <a:defRPr sz="1725" b="0">
                 <a:solidFill>
                   <a:srgbClr val="172B27"/>
@@ -4526,6 +4746,7 @@
               </a:defRPr>
             </a:lvl5pPr>
             <a:lvl6pPr>
+              <a:buNone/>
               <a:defRPr sz="1725" b="0">
                 <a:solidFill>
                   <a:srgbClr val="172B27"/>
@@ -4536,6 +4757,7 @@
               </a:defRPr>
             </a:lvl6pPr>
             <a:lvl7pPr>
+              <a:buNone/>
               <a:defRPr sz="1725" b="0">
                 <a:solidFill>
                   <a:srgbClr val="172B27"/>
@@ -4546,6 +4768,7 @@
               </a:defRPr>
             </a:lvl7pPr>
             <a:lvl8pPr>
+              <a:buNone/>
               <a:defRPr sz="1725" b="0">
                 <a:solidFill>
                   <a:srgbClr val="172B27"/>
@@ -4556,6 +4779,7 @@
               </a:defRPr>
             </a:lvl8pPr>
             <a:lvl9pPr>
+              <a:buNone/>
               <a:defRPr sz="1725" b="0">
                 <a:solidFill>
                   <a:srgbClr val="172B27"/>
@@ -4566,8 +4790,9 @@
               </a:defRPr>
             </a:lvl9pPr>
           </a:lstStyle>
-          <a:p>
+          <a:p xmlns:a="http://schemas.openxmlformats.org/drawingml/2006/main">
             <a:pPr>
+              <a:buNone/>
               <a:defRPr sz="1725" b="0">
                 <a:solidFill>
                   <a:srgbClr val="172B27"/>
@@ -4594,34 +4819,34 @@
       <p:sp>
         <p:nvSpPr>
           <p:cNvPr id="8" name="pas-num-3">
-            <a:extLst>
+            <a:extLst xmlns:a="http://schemas.openxmlformats.org/drawingml/2006/main">
               <a:ext uri="{FF2B5EF4-FFF2-40B4-BE49-F238E27FC236}">
                 <a16:creationId xmlns:a16="http://schemas.microsoft.com/office/drawing/2014/main" id="{6EF89BE5-0E7B-4773-A506-E8B496E0EA02}"/>
               </a:ext>
             </a:extLst>
           </p:cNvPr>
           <p:cNvSpPr>
-            <a:spLocks noGrp="1"/>
+            <a:spLocks xmlns:a="http://schemas.openxmlformats.org/drawingml/2006/main" noGrp="1"/>
           </p:cNvSpPr>
           <p:nvPr/>
         </p:nvSpPr>
         <p:spPr>
-          <a:xfrm>
+          <a:xfrm xmlns:a="http://schemas.openxmlformats.org/drawingml/2006/main">
             <a:off x="619125" y="4124325"/>
             <a:ext cx="523875" cy="323850"/>
           </a:xfrm>
-          <a:prstGeom prst="rect">
+          <a:prstGeom xmlns:a="http://schemas.openxmlformats.org/drawingml/2006/main" prst="rect">
             <a:avLst/>
           </a:prstGeom>
-          <a:noFill/>
-          <a:ln w="0">
+          <a:noFill xmlns:a="http://schemas.openxmlformats.org/drawingml/2006/main"/>
+          <a:ln xmlns:a="http://schemas.openxmlformats.org/drawingml/2006/main" w="0">
             <a:noFill/>
             <a:prstDash val="solid"/>
           </a:ln>
         </p:spPr>
         <p:txBody>
-          <a:bodyPr/>
-          <a:lstStyle>
+          <a:bodyPr xmlns:a="http://schemas.openxmlformats.org/drawingml/2006/main"/>
+          <a:lstStyle xmlns:a="http://schemas.openxmlformats.org/drawingml/2006/main">
             <a:defPPr>
               <a:defRPr sz="1725" b="1">
                 <a:solidFill>
@@ -4633,6 +4858,7 @@
               </a:defRPr>
             </a:defPPr>
             <a:lvl1pPr>
+              <a:buNone/>
               <a:defRPr sz="1725" b="1">
                 <a:solidFill>
                   <a:srgbClr val="E76553"/>
@@ -4643,6 +4869,7 @@
               </a:defRPr>
             </a:lvl1pPr>
             <a:lvl2pPr>
+              <a:buNone/>
               <a:defRPr sz="1725" b="1">
                 <a:solidFill>
                   <a:srgbClr val="E76553"/>
@@ -4653,6 +4880,7 @@
               </a:defRPr>
             </a:lvl2pPr>
             <a:lvl3pPr>
+              <a:buNone/>
               <a:defRPr sz="1725" b="1">
                 <a:solidFill>
                   <a:srgbClr val="E76553"/>
@@ -4663,6 +4891,7 @@
               </a:defRPr>
             </a:lvl3pPr>
             <a:lvl4pPr>
+              <a:buNone/>
               <a:defRPr sz="1725" b="1">
                 <a:solidFill>
                   <a:srgbClr val="E76553"/>
@@ -4673,6 +4902,7 @@
               </a:defRPr>
             </a:lvl4pPr>
             <a:lvl5pPr>
+              <a:buNone/>
               <a:defRPr sz="1725" b="1">
                 <a:solidFill>
                   <a:srgbClr val="E76553"/>
@@ -4683,6 +4913,7 @@
               </a:defRPr>
             </a:lvl5pPr>
             <a:lvl6pPr>
+              <a:buNone/>
               <a:defRPr sz="1725" b="1">
                 <a:solidFill>
                   <a:srgbClr val="E76553"/>
@@ -4693,6 +4924,7 @@
               </a:defRPr>
             </a:lvl6pPr>
             <a:lvl7pPr>
+              <a:buNone/>
               <a:defRPr sz="1725" b="1">
                 <a:solidFill>
                   <a:srgbClr val="E76553"/>
@@ -4703,6 +4935,7 @@
               </a:defRPr>
             </a:lvl7pPr>
             <a:lvl8pPr>
+              <a:buNone/>
               <a:defRPr sz="1725" b="1">
                 <a:solidFill>
                   <a:srgbClr val="E76553"/>
@@ -4713,6 +4946,7 @@
               </a:defRPr>
             </a:lvl8pPr>
             <a:lvl9pPr>
+              <a:buNone/>
               <a:defRPr sz="1725" b="1">
                 <a:solidFill>
                   <a:srgbClr val="E76553"/>
@@ -4723,8 +4957,9 @@
               </a:defRPr>
             </a:lvl9pPr>
           </a:lstStyle>
-          <a:p>
+          <a:p xmlns:a="http://schemas.openxmlformats.org/drawingml/2006/main">
             <a:pPr>
+              <a:buNone/>
               <a:defRPr sz="1725" b="1">
                 <a:solidFill>
                   <a:srgbClr val="E76553"/>
@@ -4751,34 +4986,34 @@
       <p:sp>
         <p:nvSpPr>
           <p:cNvPr id="9" name="pas-text-3">
-            <a:extLst>
+            <a:extLst xmlns:a="http://schemas.openxmlformats.org/drawingml/2006/main">
               <a:ext uri="{FF2B5EF4-FFF2-40B4-BE49-F238E27FC236}">
                 <a16:creationId xmlns:a16="http://schemas.microsoft.com/office/drawing/2014/main" id="{8B89BCE6-B772-4FFA-8769-AAF75EB4CFF2}"/>
               </a:ext>
             </a:extLst>
           </p:cNvPr>
           <p:cNvSpPr>
-            <a:spLocks noGrp="1"/>
+            <a:spLocks xmlns:a="http://schemas.openxmlformats.org/drawingml/2006/main" noGrp="1"/>
           </p:cNvSpPr>
           <p:nvPr/>
         </p:nvSpPr>
         <p:spPr>
-          <a:xfrm>
+          <a:xfrm xmlns:a="http://schemas.openxmlformats.org/drawingml/2006/main">
             <a:off x="1143000" y="4124325"/>
             <a:ext cx="4095750" cy="571500"/>
           </a:xfrm>
-          <a:prstGeom prst="rect">
+          <a:prstGeom xmlns:a="http://schemas.openxmlformats.org/drawingml/2006/main" prst="rect">
             <a:avLst/>
           </a:prstGeom>
-          <a:noFill/>
-          <a:ln w="0">
+          <a:noFill xmlns:a="http://schemas.openxmlformats.org/drawingml/2006/main"/>
+          <a:ln xmlns:a="http://schemas.openxmlformats.org/drawingml/2006/main" w="0">
             <a:noFill/>
             <a:prstDash val="solid"/>
           </a:ln>
         </p:spPr>
         <p:txBody>
-          <a:bodyPr/>
-          <a:lstStyle>
+          <a:bodyPr xmlns:a="http://schemas.openxmlformats.org/drawingml/2006/main"/>
+          <a:lstStyle xmlns:a="http://schemas.openxmlformats.org/drawingml/2006/main">
             <a:defPPr>
               <a:defRPr sz="1725" b="0">
                 <a:solidFill>
@@ -4790,6 +5025,7 @@
               </a:defRPr>
             </a:defPPr>
             <a:lvl1pPr>
+              <a:buNone/>
               <a:defRPr sz="1725" b="0">
                 <a:solidFill>
                   <a:srgbClr val="172B27"/>
@@ -4800,6 +5036,7 @@
               </a:defRPr>
             </a:lvl1pPr>
             <a:lvl2pPr>
+              <a:buNone/>
               <a:defRPr sz="1725" b="0">
                 <a:solidFill>
                   <a:srgbClr val="172B27"/>
@@ -4810,6 +5047,7 @@
               </a:defRPr>
             </a:lvl2pPr>
             <a:lvl3pPr>
+              <a:buNone/>
               <a:defRPr sz="1725" b="0">
                 <a:solidFill>
                   <a:srgbClr val="172B27"/>
@@ -4820,6 +5058,7 @@
               </a:defRPr>
             </a:lvl3pPr>
             <a:lvl4pPr>
+              <a:buNone/>
               <a:defRPr sz="1725" b="0">
                 <a:solidFill>
                   <a:srgbClr val="172B27"/>
@@ -4830,6 +5069,7 @@
               </a:defRPr>
             </a:lvl4pPr>
             <a:lvl5pPr>
+              <a:buNone/>
               <a:defRPr sz="1725" b="0">
                 <a:solidFill>
                   <a:srgbClr val="172B27"/>
@@ -4840,6 +5080,7 @@
               </a:defRPr>
             </a:lvl5pPr>
             <a:lvl6pPr>
+              <a:buNone/>
               <a:defRPr sz="1725" b="0">
                 <a:solidFill>
                   <a:srgbClr val="172B27"/>
@@ -4850,6 +5091,7 @@
               </a:defRPr>
             </a:lvl6pPr>
             <a:lvl7pPr>
+              <a:buNone/>
               <a:defRPr sz="1725" b="0">
                 <a:solidFill>
                   <a:srgbClr val="172B27"/>
@@ -4860,6 +5102,7 @@
               </a:defRPr>
             </a:lvl7pPr>
             <a:lvl8pPr>
+              <a:buNone/>
               <a:defRPr sz="1725" b="0">
                 <a:solidFill>
                   <a:srgbClr val="172B27"/>
@@ -4870,6 +5113,7 @@
               </a:defRPr>
             </a:lvl8pPr>
             <a:lvl9pPr>
+              <a:buNone/>
               <a:defRPr sz="1725" b="0">
                 <a:solidFill>
                   <a:srgbClr val="172B27"/>
@@ -4880,8 +5124,9 @@
               </a:defRPr>
             </a:lvl9pPr>
           </a:lstStyle>
-          <a:p>
+          <a:p xmlns:a="http://schemas.openxmlformats.org/drawingml/2006/main">
             <a:pPr>
+              <a:buNone/>
               <a:defRPr sz="1725" b="0">
                 <a:solidFill>
                   <a:srgbClr val="172B27"/>
@@ -4900,7 +5145,7 @@
                 <a:ea typeface="Arial"/>
                 <a:cs typeface="Arial"/>
               </a:rPr>
-              <a:t>Revisar el primer menú com a operari</a:t>
+              <a:t>Revisar i aprovar com a operari</a:t>
             </a:r>
           </a:p>
         </p:txBody>
@@ -4908,34 +5153,34 @@
       <p:sp>
         <p:nvSpPr>
           <p:cNvPr id="10" name="pas-num-4">
-            <a:extLst>
+            <a:extLst xmlns:a="http://schemas.openxmlformats.org/drawingml/2006/main">
               <a:ext uri="{FF2B5EF4-FFF2-40B4-BE49-F238E27FC236}">
                 <a16:creationId xmlns:a16="http://schemas.microsoft.com/office/drawing/2014/main" id="{028CC50D-C479-4155-AAE3-C9B5E2AF341A}"/>
               </a:ext>
             </a:extLst>
           </p:cNvPr>
           <p:cNvSpPr>
-            <a:spLocks noGrp="1"/>
+            <a:spLocks xmlns:a="http://schemas.openxmlformats.org/drawingml/2006/main" noGrp="1"/>
           </p:cNvSpPr>
           <p:nvPr/>
         </p:nvSpPr>
         <p:spPr>
-          <a:xfrm>
+          <a:xfrm xmlns:a="http://schemas.openxmlformats.org/drawingml/2006/main">
             <a:off x="619125" y="4829175"/>
             <a:ext cx="523875" cy="323850"/>
           </a:xfrm>
-          <a:prstGeom prst="rect">
+          <a:prstGeom xmlns:a="http://schemas.openxmlformats.org/drawingml/2006/main" prst="rect">
             <a:avLst/>
           </a:prstGeom>
-          <a:noFill/>
-          <a:ln w="0">
+          <a:noFill xmlns:a="http://schemas.openxmlformats.org/drawingml/2006/main"/>
+          <a:ln xmlns:a="http://schemas.openxmlformats.org/drawingml/2006/main" w="0">
             <a:noFill/>
             <a:prstDash val="solid"/>
           </a:ln>
         </p:spPr>
         <p:txBody>
-          <a:bodyPr/>
-          <a:lstStyle>
+          <a:bodyPr xmlns:a="http://schemas.openxmlformats.org/drawingml/2006/main"/>
+          <a:lstStyle xmlns:a="http://schemas.openxmlformats.org/drawingml/2006/main">
             <a:defPPr>
               <a:defRPr sz="1725" b="1">
                 <a:solidFill>
@@ -4947,6 +5192,7 @@
               </a:defRPr>
             </a:defPPr>
             <a:lvl1pPr>
+              <a:buNone/>
               <a:defRPr sz="1725" b="1">
                 <a:solidFill>
                   <a:srgbClr val="E76553"/>
@@ -4957,6 +5203,7 @@
               </a:defRPr>
             </a:lvl1pPr>
             <a:lvl2pPr>
+              <a:buNone/>
               <a:defRPr sz="1725" b="1">
                 <a:solidFill>
                   <a:srgbClr val="E76553"/>
@@ -4967,6 +5214,7 @@
               </a:defRPr>
             </a:lvl2pPr>
             <a:lvl3pPr>
+              <a:buNone/>
               <a:defRPr sz="1725" b="1">
                 <a:solidFill>
                   <a:srgbClr val="E76553"/>
@@ -4977,6 +5225,7 @@
               </a:defRPr>
             </a:lvl3pPr>
             <a:lvl4pPr>
+              <a:buNone/>
               <a:defRPr sz="1725" b="1">
                 <a:solidFill>
                   <a:srgbClr val="E76553"/>
@@ -4987,6 +5236,7 @@
               </a:defRPr>
             </a:lvl4pPr>
             <a:lvl5pPr>
+              <a:buNone/>
               <a:defRPr sz="1725" b="1">
                 <a:solidFill>
                   <a:srgbClr val="E76553"/>
@@ -4997,6 +5247,7 @@
               </a:defRPr>
             </a:lvl5pPr>
             <a:lvl6pPr>
+              <a:buNone/>
               <a:defRPr sz="1725" b="1">
                 <a:solidFill>
                   <a:srgbClr val="E76553"/>
@@ -5007,6 +5258,7 @@
               </a:defRPr>
             </a:lvl6pPr>
             <a:lvl7pPr>
+              <a:buNone/>
               <a:defRPr sz="1725" b="1">
                 <a:solidFill>
                   <a:srgbClr val="E76553"/>
@@ -5017,6 +5269,7 @@
               </a:defRPr>
             </a:lvl7pPr>
             <a:lvl8pPr>
+              <a:buNone/>
               <a:defRPr sz="1725" b="1">
                 <a:solidFill>
                   <a:srgbClr val="E76553"/>
@@ -5027,6 +5280,7 @@
               </a:defRPr>
             </a:lvl8pPr>
             <a:lvl9pPr>
+              <a:buNone/>
               <a:defRPr sz="1725" b="1">
                 <a:solidFill>
                   <a:srgbClr val="E76553"/>
@@ -5037,8 +5291,9 @@
               </a:defRPr>
             </a:lvl9pPr>
           </a:lstStyle>
-          <a:p>
+          <a:p xmlns:a="http://schemas.openxmlformats.org/drawingml/2006/main">
             <a:pPr>
+              <a:buNone/>
               <a:defRPr sz="1725" b="1">
                 <a:solidFill>
                   <a:srgbClr val="E76553"/>
@@ -5065,34 +5320,34 @@
       <p:sp>
         <p:nvSpPr>
           <p:cNvPr id="11" name="pas-text-4">
-            <a:extLst>
+            <a:extLst xmlns:a="http://schemas.openxmlformats.org/drawingml/2006/main">
               <a:ext uri="{FF2B5EF4-FFF2-40B4-BE49-F238E27FC236}">
                 <a16:creationId xmlns:a16="http://schemas.microsoft.com/office/drawing/2014/main" id="{7343B5C3-F61F-4C4C-9AA6-525E9DE5A136}"/>
               </a:ext>
             </a:extLst>
           </p:cNvPr>
           <p:cNvSpPr>
-            <a:spLocks noGrp="1"/>
+            <a:spLocks xmlns:a="http://schemas.openxmlformats.org/drawingml/2006/main" noGrp="1"/>
           </p:cNvSpPr>
           <p:nvPr/>
         </p:nvSpPr>
         <p:spPr>
-          <a:xfrm>
+          <a:xfrm xmlns:a="http://schemas.openxmlformats.org/drawingml/2006/main">
             <a:off x="1143000" y="4829175"/>
             <a:ext cx="4095750" cy="571500"/>
           </a:xfrm>
-          <a:prstGeom prst="rect">
+          <a:prstGeom xmlns:a="http://schemas.openxmlformats.org/drawingml/2006/main" prst="rect">
             <a:avLst/>
           </a:prstGeom>
-          <a:noFill/>
-          <a:ln w="0">
+          <a:noFill xmlns:a="http://schemas.openxmlformats.org/drawingml/2006/main"/>
+          <a:ln xmlns:a="http://schemas.openxmlformats.org/drawingml/2006/main" w="0">
             <a:noFill/>
             <a:prstDash val="solid"/>
           </a:ln>
         </p:spPr>
         <p:txBody>
-          <a:bodyPr/>
-          <a:lstStyle>
+          <a:bodyPr xmlns:a="http://schemas.openxmlformats.org/drawingml/2006/main"/>
+          <a:lstStyle xmlns:a="http://schemas.openxmlformats.org/drawingml/2006/main">
             <a:defPPr>
               <a:defRPr sz="1725" b="0">
                 <a:solidFill>
@@ -5104,6 +5359,7 @@
               </a:defRPr>
             </a:defPPr>
             <a:lvl1pPr>
+              <a:buNone/>
               <a:defRPr sz="1725" b="0">
                 <a:solidFill>
                   <a:srgbClr val="172B27"/>
@@ -5114,6 +5370,7 @@
               </a:defRPr>
             </a:lvl1pPr>
             <a:lvl2pPr>
+              <a:buNone/>
               <a:defRPr sz="1725" b="0">
                 <a:solidFill>
                   <a:srgbClr val="172B27"/>
@@ -5124,6 +5381,7 @@
               </a:defRPr>
             </a:lvl2pPr>
             <a:lvl3pPr>
+              <a:buNone/>
               <a:defRPr sz="1725" b="0">
                 <a:solidFill>
                   <a:srgbClr val="172B27"/>
@@ -5134,6 +5392,7 @@
               </a:defRPr>
             </a:lvl3pPr>
             <a:lvl4pPr>
+              <a:buNone/>
               <a:defRPr sz="1725" b="0">
                 <a:solidFill>
                   <a:srgbClr val="172B27"/>
@@ -5144,6 +5403,7 @@
               </a:defRPr>
             </a:lvl4pPr>
             <a:lvl5pPr>
+              <a:buNone/>
               <a:defRPr sz="1725" b="0">
                 <a:solidFill>
                   <a:srgbClr val="172B27"/>
@@ -5154,6 +5414,7 @@
               </a:defRPr>
             </a:lvl5pPr>
             <a:lvl6pPr>
+              <a:buNone/>
               <a:defRPr sz="1725" b="0">
                 <a:solidFill>
                   <a:srgbClr val="172B27"/>
@@ -5164,6 +5425,7 @@
               </a:defRPr>
             </a:lvl6pPr>
             <a:lvl7pPr>
+              <a:buNone/>
               <a:defRPr sz="1725" b="0">
                 <a:solidFill>
                   <a:srgbClr val="172B27"/>
@@ -5174,6 +5436,7 @@
               </a:defRPr>
             </a:lvl7pPr>
             <a:lvl8pPr>
+              <a:buNone/>
               <a:defRPr sz="1725" b="0">
                 <a:solidFill>
                   <a:srgbClr val="172B27"/>
@@ -5184,6 +5447,7 @@
               </a:defRPr>
             </a:lvl8pPr>
             <a:lvl9pPr>
+              <a:buNone/>
               <a:defRPr sz="1725" b="0">
                 <a:solidFill>
                   <a:srgbClr val="172B27"/>
@@ -5194,8 +5458,9 @@
               </a:defRPr>
             </a:lvl9pPr>
           </a:lstStyle>
-          <a:p>
+          <a:p xmlns:a="http://schemas.openxmlformats.org/drawingml/2006/main">
             <a:pPr>
+              <a:buNone/>
               <a:defRPr sz="1725" b="0">
                 <a:solidFill>
                   <a:srgbClr val="172B27"/>
@@ -5214,39 +5479,791 @@
                 <a:ea typeface="Arial"/>
                 <a:cs typeface="Arial"/>
               </a:rPr>
-              <a:t>Consultar la setmana i canviar plats futurs</a:t>
+              <a:t>Consultar el menú i canviar plats futurs</a:t>
             </a:r>
           </a:p>
         </p:txBody>
       </p:sp>
-      <p:pic>
-        <p:nvPicPr>
-          <p:cNvPr id="12" name="Imagen 11">
-            <a:extLst>
+      <p:sp>
+        <p:nvSpPr>
+          <p:cNvPr id="15" name="inici-titol">
+            <a:extLst xmlns:a="http://schemas.openxmlformats.org/drawingml/2006/main">
               <a:ext uri="{FF2B5EF4-FFF2-40B4-BE49-F238E27FC236}">
-                <a16:creationId xmlns:a16="http://schemas.microsoft.com/office/drawing/2014/main" id="{298DAA20-CBDD-4F5C-BA5D-0D4595205453}"/>
+                <a16:creationId xmlns:a16="http://schemas.microsoft.com/office/drawing/2014/main" id="{3C9D09C6-BB07-438C-9266-C3698A978D41}"/>
               </a:ext>
             </a:extLst>
           </p:cNvPr>
-          <p:cNvPicPr>
-            <a:picLocks noChangeAspect="1"/>
-          </p:cNvPicPr>
+          <p:cNvSpPr>
+            <a:spLocks xmlns:a="http://schemas.openxmlformats.org/drawingml/2006/main" noGrp="1"/>
+          </p:cNvSpPr>
           <p:nvPr/>
-        </p:nvPicPr>
-        <p:blipFill>
-          <a:blip r:embed="rId3"/>
-          <a:stretch/>
-        </p:blipFill>
+        </p:nvSpPr>
         <p:spPr>
-          <a:xfrm>
-            <a:off x="5306483" y="2590800"/>
-            <a:ext cx="6417733" cy="3609975"/>
+          <a:xfrm xmlns:a="http://schemas.openxmlformats.org/drawingml/2006/main">
+            <a:off x="5810250" y="2695575"/>
+            <a:ext cx="5562600" cy="495300"/>
           </a:xfrm>
-          <a:prstGeom prst="rect">
+          <a:prstGeom xmlns:a="http://schemas.openxmlformats.org/drawingml/2006/main" prst="rect">
             <a:avLst/>
           </a:prstGeom>
+          <a:noFill xmlns:a="http://schemas.openxmlformats.org/drawingml/2006/main"/>
+          <a:ln xmlns:a="http://schemas.openxmlformats.org/drawingml/2006/main" w="0">
+            <a:noFill/>
+          </a:ln>
         </p:spPr>
-      </p:pic>
+        <p:txBody>
+          <a:bodyPr xmlns:a="http://schemas.openxmlformats.org/drawingml/2006/main" lIns="0" tIns="0" rIns="0" bIns="0"/>
+          <a:lstStyle xmlns:a="http://schemas.openxmlformats.org/drawingml/2006/main">
+            <a:defPPr>
+              <a:defRPr sz="2175" b="1">
+                <a:solidFill>
+                  <a:srgbClr val="183D34"/>
+                </a:solidFill>
+                <a:latin typeface="Arial"/>
+                <a:ea typeface="Arial"/>
+                <a:cs typeface="Arial"/>
+              </a:defRPr>
+            </a:defPPr>
+            <a:lvl1pPr>
+              <a:defRPr sz="2175" b="1">
+                <a:solidFill>
+                  <a:srgbClr val="183D34"/>
+                </a:solidFill>
+                <a:latin typeface="Arial"/>
+                <a:ea typeface="Arial"/>
+                <a:cs typeface="Arial"/>
+              </a:defRPr>
+            </a:lvl1pPr>
+            <a:lvl2pPr>
+              <a:defRPr sz="2175" b="1">
+                <a:solidFill>
+                  <a:srgbClr val="183D34"/>
+                </a:solidFill>
+                <a:latin typeface="Arial"/>
+                <a:ea typeface="Arial"/>
+                <a:cs typeface="Arial"/>
+              </a:defRPr>
+            </a:lvl2pPr>
+            <a:lvl3pPr>
+              <a:defRPr sz="2175" b="1">
+                <a:solidFill>
+                  <a:srgbClr val="183D34"/>
+                </a:solidFill>
+                <a:latin typeface="Arial"/>
+                <a:ea typeface="Arial"/>
+                <a:cs typeface="Arial"/>
+              </a:defRPr>
+            </a:lvl3pPr>
+            <a:lvl4pPr>
+              <a:defRPr sz="2175" b="1">
+                <a:solidFill>
+                  <a:srgbClr val="183D34"/>
+                </a:solidFill>
+                <a:latin typeface="Arial"/>
+                <a:ea typeface="Arial"/>
+                <a:cs typeface="Arial"/>
+              </a:defRPr>
+            </a:lvl4pPr>
+            <a:lvl5pPr>
+              <a:defRPr sz="2175" b="1">
+                <a:solidFill>
+                  <a:srgbClr val="183D34"/>
+                </a:solidFill>
+                <a:latin typeface="Arial"/>
+                <a:ea typeface="Arial"/>
+                <a:cs typeface="Arial"/>
+              </a:defRPr>
+            </a:lvl5pPr>
+            <a:lvl6pPr>
+              <a:defRPr sz="2175" b="1">
+                <a:solidFill>
+                  <a:srgbClr val="183D34"/>
+                </a:solidFill>
+                <a:latin typeface="Arial"/>
+                <a:ea typeface="Arial"/>
+                <a:cs typeface="Arial"/>
+              </a:defRPr>
+            </a:lvl6pPr>
+            <a:lvl7pPr>
+              <a:defRPr sz="2175" b="1">
+                <a:solidFill>
+                  <a:srgbClr val="183D34"/>
+                </a:solidFill>
+                <a:latin typeface="Arial"/>
+                <a:ea typeface="Arial"/>
+                <a:cs typeface="Arial"/>
+              </a:defRPr>
+            </a:lvl7pPr>
+            <a:lvl8pPr>
+              <a:defRPr sz="2175" b="1">
+                <a:solidFill>
+                  <a:srgbClr val="183D34"/>
+                </a:solidFill>
+                <a:latin typeface="Arial"/>
+                <a:ea typeface="Arial"/>
+                <a:cs typeface="Arial"/>
+              </a:defRPr>
+            </a:lvl8pPr>
+            <a:lvl9pPr>
+              <a:defRPr sz="2175" b="1">
+                <a:solidFill>
+                  <a:srgbClr val="183D34"/>
+                </a:solidFill>
+                <a:latin typeface="Arial"/>
+                <a:ea typeface="Arial"/>
+                <a:cs typeface="Arial"/>
+              </a:defRPr>
+            </a:lvl9pPr>
+          </a:lstStyle>
+          <a:p xmlns:a="http://schemas.openxmlformats.org/drawingml/2006/main">
+            <a:pPr>
+              <a:defRPr sz="2175" b="1">
+                <a:solidFill>
+                  <a:srgbClr val="183D34"/>
+                </a:solidFill>
+                <a:latin typeface="Arial"/>
+                <a:ea typeface="Arial"/>
+                <a:cs typeface="Arial"/>
+              </a:defRPr>
+            </a:pPr>
+            <a:r>
+              <a:rPr sz="2175" b="1">
+                <a:solidFill>
+                  <a:srgbClr val="183D34"/>
+                </a:solidFill>
+                <a:latin typeface="Arial"/>
+                <a:ea typeface="Arial"/>
+                <a:cs typeface="Arial"/>
+              </a:rPr>
+              <a:t>Primer accés</a:t>
+            </a:r>
+          </a:p>
+        </p:txBody>
+      </p:sp>
+      <p:sp>
+        <p:nvSpPr>
+          <p:cNvPr id="16" name="inici-1">
+            <a:extLst xmlns:a="http://schemas.openxmlformats.org/drawingml/2006/main">
+              <a:ext uri="{FF2B5EF4-FFF2-40B4-BE49-F238E27FC236}">
+                <a16:creationId xmlns:a16="http://schemas.microsoft.com/office/drawing/2014/main" id="{AB4BE255-28CC-438B-BABF-03A36B001277}"/>
+              </a:ext>
+            </a:extLst>
+          </p:cNvPr>
+          <p:cNvSpPr>
+            <a:spLocks xmlns:a="http://schemas.openxmlformats.org/drawingml/2006/main" noGrp="1"/>
+          </p:cNvSpPr>
+          <p:nvPr/>
+        </p:nvSpPr>
+        <p:spPr>
+          <a:xfrm xmlns:a="http://schemas.openxmlformats.org/drawingml/2006/main">
+            <a:off x="5810250" y="3333750"/>
+            <a:ext cx="5562600" cy="495300"/>
+          </a:xfrm>
+          <a:prstGeom xmlns:a="http://schemas.openxmlformats.org/drawingml/2006/main" prst="rect">
+            <a:avLst/>
+          </a:prstGeom>
+          <a:noFill xmlns:a="http://schemas.openxmlformats.org/drawingml/2006/main"/>
+          <a:ln xmlns:a="http://schemas.openxmlformats.org/drawingml/2006/main" w="0">
+            <a:noFill/>
+          </a:ln>
+        </p:spPr>
+        <p:txBody>
+          <a:bodyPr xmlns:a="http://schemas.openxmlformats.org/drawingml/2006/main" lIns="0" tIns="0" rIns="0" bIns="0"/>
+          <a:lstStyle xmlns:a="http://schemas.openxmlformats.org/drawingml/2006/main">
+            <a:defPPr>
+              <a:defRPr sz="1875" b="0">
+                <a:solidFill>
+                  <a:srgbClr val="172B27"/>
+                </a:solidFill>
+                <a:latin typeface="Arial"/>
+                <a:ea typeface="Arial"/>
+                <a:cs typeface="Arial"/>
+              </a:defRPr>
+            </a:defPPr>
+            <a:lvl1pPr>
+              <a:defRPr sz="1875" b="0">
+                <a:solidFill>
+                  <a:srgbClr val="172B27"/>
+                </a:solidFill>
+                <a:latin typeface="Arial"/>
+                <a:ea typeface="Arial"/>
+                <a:cs typeface="Arial"/>
+              </a:defRPr>
+            </a:lvl1pPr>
+            <a:lvl2pPr>
+              <a:defRPr sz="1875" b="0">
+                <a:solidFill>
+                  <a:srgbClr val="172B27"/>
+                </a:solidFill>
+                <a:latin typeface="Arial"/>
+                <a:ea typeface="Arial"/>
+                <a:cs typeface="Arial"/>
+              </a:defRPr>
+            </a:lvl2pPr>
+            <a:lvl3pPr>
+              <a:defRPr sz="1875" b="0">
+                <a:solidFill>
+                  <a:srgbClr val="172B27"/>
+                </a:solidFill>
+                <a:latin typeface="Arial"/>
+                <a:ea typeface="Arial"/>
+                <a:cs typeface="Arial"/>
+              </a:defRPr>
+            </a:lvl3pPr>
+            <a:lvl4pPr>
+              <a:defRPr sz="1875" b="0">
+                <a:solidFill>
+                  <a:srgbClr val="172B27"/>
+                </a:solidFill>
+                <a:latin typeface="Arial"/>
+                <a:ea typeface="Arial"/>
+                <a:cs typeface="Arial"/>
+              </a:defRPr>
+            </a:lvl4pPr>
+            <a:lvl5pPr>
+              <a:defRPr sz="1875" b="0">
+                <a:solidFill>
+                  <a:srgbClr val="172B27"/>
+                </a:solidFill>
+                <a:latin typeface="Arial"/>
+                <a:ea typeface="Arial"/>
+                <a:cs typeface="Arial"/>
+              </a:defRPr>
+            </a:lvl5pPr>
+            <a:lvl6pPr>
+              <a:defRPr sz="1875" b="0">
+                <a:solidFill>
+                  <a:srgbClr val="172B27"/>
+                </a:solidFill>
+                <a:latin typeface="Arial"/>
+                <a:ea typeface="Arial"/>
+                <a:cs typeface="Arial"/>
+              </a:defRPr>
+            </a:lvl6pPr>
+            <a:lvl7pPr>
+              <a:defRPr sz="1875" b="0">
+                <a:solidFill>
+                  <a:srgbClr val="172B27"/>
+                </a:solidFill>
+                <a:latin typeface="Arial"/>
+                <a:ea typeface="Arial"/>
+                <a:cs typeface="Arial"/>
+              </a:defRPr>
+            </a:lvl7pPr>
+            <a:lvl8pPr>
+              <a:defRPr sz="1875" b="0">
+                <a:solidFill>
+                  <a:srgbClr val="172B27"/>
+                </a:solidFill>
+                <a:latin typeface="Arial"/>
+                <a:ea typeface="Arial"/>
+                <a:cs typeface="Arial"/>
+              </a:defRPr>
+            </a:lvl8pPr>
+            <a:lvl9pPr>
+              <a:defRPr sz="1875" b="0">
+                <a:solidFill>
+                  <a:srgbClr val="172B27"/>
+                </a:solidFill>
+                <a:latin typeface="Arial"/>
+                <a:ea typeface="Arial"/>
+                <a:cs typeface="Arial"/>
+              </a:defRPr>
+            </a:lvl9pPr>
+          </a:lstStyle>
+          <a:p xmlns:a="http://schemas.openxmlformats.org/drawingml/2006/main">
+            <a:pPr>
+              <a:defRPr sz="1875" b="0">
+                <a:solidFill>
+                  <a:srgbClr val="172B27"/>
+                </a:solidFill>
+                <a:latin typeface="Arial"/>
+                <a:ea typeface="Arial"/>
+                <a:cs typeface="Arial"/>
+              </a:defRPr>
+            </a:pPr>
+            <a:r>
+              <a:rPr sz="1875" b="0">
+                <a:solidFill>
+                  <a:srgbClr val="172B27"/>
+                </a:solidFill>
+                <a:latin typeface="Arial"/>
+                <a:ea typeface="Arial"/>
+                <a:cs typeface="Arial"/>
+              </a:rPr>
+              <a:t>1. Descomprimir el paquet</a:t>
+            </a:r>
+          </a:p>
+        </p:txBody>
+      </p:sp>
+      <p:sp>
+        <p:nvSpPr>
+          <p:cNvPr id="17" name="inici-2">
+            <a:extLst xmlns:a="http://schemas.openxmlformats.org/drawingml/2006/main">
+              <a:ext uri="{FF2B5EF4-FFF2-40B4-BE49-F238E27FC236}">
+                <a16:creationId xmlns:a16="http://schemas.microsoft.com/office/drawing/2014/main" id="{63160AA6-5837-40A0-A569-EA6EFEE38DC5}"/>
+              </a:ext>
+            </a:extLst>
+          </p:cNvPr>
+          <p:cNvSpPr>
+            <a:spLocks xmlns:a="http://schemas.openxmlformats.org/drawingml/2006/main" noGrp="1"/>
+          </p:cNvSpPr>
+          <p:nvPr/>
+        </p:nvSpPr>
+        <p:spPr>
+          <a:xfrm xmlns:a="http://schemas.openxmlformats.org/drawingml/2006/main">
+            <a:off x="5810250" y="3895725"/>
+            <a:ext cx="5562600" cy="495300"/>
+          </a:xfrm>
+          <a:prstGeom xmlns:a="http://schemas.openxmlformats.org/drawingml/2006/main" prst="rect">
+            <a:avLst/>
+          </a:prstGeom>
+          <a:noFill xmlns:a="http://schemas.openxmlformats.org/drawingml/2006/main"/>
+          <a:ln xmlns:a="http://schemas.openxmlformats.org/drawingml/2006/main" w="0">
+            <a:noFill/>
+          </a:ln>
+        </p:spPr>
+        <p:txBody>
+          <a:bodyPr xmlns:a="http://schemas.openxmlformats.org/drawingml/2006/main" lIns="0" tIns="0" rIns="0" bIns="0"/>
+          <a:lstStyle xmlns:a="http://schemas.openxmlformats.org/drawingml/2006/main">
+            <a:defPPr>
+              <a:defRPr sz="1875" b="0">
+                <a:solidFill>
+                  <a:srgbClr val="172B27"/>
+                </a:solidFill>
+                <a:latin typeface="Arial"/>
+                <a:ea typeface="Arial"/>
+                <a:cs typeface="Arial"/>
+              </a:defRPr>
+            </a:defPPr>
+            <a:lvl1pPr>
+              <a:defRPr sz="1875" b="0">
+                <a:solidFill>
+                  <a:srgbClr val="172B27"/>
+                </a:solidFill>
+                <a:latin typeface="Arial"/>
+                <a:ea typeface="Arial"/>
+                <a:cs typeface="Arial"/>
+              </a:defRPr>
+            </a:lvl1pPr>
+            <a:lvl2pPr>
+              <a:defRPr sz="1875" b="0">
+                <a:solidFill>
+                  <a:srgbClr val="172B27"/>
+                </a:solidFill>
+                <a:latin typeface="Arial"/>
+                <a:ea typeface="Arial"/>
+                <a:cs typeface="Arial"/>
+              </a:defRPr>
+            </a:lvl2pPr>
+            <a:lvl3pPr>
+              <a:defRPr sz="1875" b="0">
+                <a:solidFill>
+                  <a:srgbClr val="172B27"/>
+                </a:solidFill>
+                <a:latin typeface="Arial"/>
+                <a:ea typeface="Arial"/>
+                <a:cs typeface="Arial"/>
+              </a:defRPr>
+            </a:lvl3pPr>
+            <a:lvl4pPr>
+              <a:defRPr sz="1875" b="0">
+                <a:solidFill>
+                  <a:srgbClr val="172B27"/>
+                </a:solidFill>
+                <a:latin typeface="Arial"/>
+                <a:ea typeface="Arial"/>
+                <a:cs typeface="Arial"/>
+              </a:defRPr>
+            </a:lvl4pPr>
+            <a:lvl5pPr>
+              <a:defRPr sz="1875" b="0">
+                <a:solidFill>
+                  <a:srgbClr val="172B27"/>
+                </a:solidFill>
+                <a:latin typeface="Arial"/>
+                <a:ea typeface="Arial"/>
+                <a:cs typeface="Arial"/>
+              </a:defRPr>
+            </a:lvl5pPr>
+            <a:lvl6pPr>
+              <a:defRPr sz="1875" b="0">
+                <a:solidFill>
+                  <a:srgbClr val="172B27"/>
+                </a:solidFill>
+                <a:latin typeface="Arial"/>
+                <a:ea typeface="Arial"/>
+                <a:cs typeface="Arial"/>
+              </a:defRPr>
+            </a:lvl6pPr>
+            <a:lvl7pPr>
+              <a:defRPr sz="1875" b="0">
+                <a:solidFill>
+                  <a:srgbClr val="172B27"/>
+                </a:solidFill>
+                <a:latin typeface="Arial"/>
+                <a:ea typeface="Arial"/>
+                <a:cs typeface="Arial"/>
+              </a:defRPr>
+            </a:lvl7pPr>
+            <a:lvl8pPr>
+              <a:defRPr sz="1875" b="0">
+                <a:solidFill>
+                  <a:srgbClr val="172B27"/>
+                </a:solidFill>
+                <a:latin typeface="Arial"/>
+                <a:ea typeface="Arial"/>
+                <a:cs typeface="Arial"/>
+              </a:defRPr>
+            </a:lvl8pPr>
+            <a:lvl9pPr>
+              <a:defRPr sz="1875" b="0">
+                <a:solidFill>
+                  <a:srgbClr val="172B27"/>
+                </a:solidFill>
+                <a:latin typeface="Arial"/>
+                <a:ea typeface="Arial"/>
+                <a:cs typeface="Arial"/>
+              </a:defRPr>
+            </a:lvl9pPr>
+          </a:lstStyle>
+          <a:p xmlns:a="http://schemas.openxmlformats.org/drawingml/2006/main">
+            <a:pPr>
+              <a:defRPr sz="1875" b="0">
+                <a:solidFill>
+                  <a:srgbClr val="172B27"/>
+                </a:solidFill>
+                <a:latin typeface="Arial"/>
+                <a:ea typeface="Arial"/>
+                <a:cs typeface="Arial"/>
+              </a:defRPr>
+            </a:pPr>
+            <a:r>
+              <a:rPr sz="1875" b="0">
+                <a:solidFill>
+                  <a:srgbClr val="172B27"/>
+                </a:solidFill>
+                <a:latin typeface="Arial"/>
+                <a:ea typeface="Arial"/>
+                <a:cs typeface="Arial"/>
+              </a:rPr>
+              <a:t>2. Obrir easyeats.exe</a:t>
+            </a:r>
+          </a:p>
+        </p:txBody>
+      </p:sp>
+      <p:sp>
+        <p:nvSpPr>
+          <p:cNvPr id="18" name="inici-3">
+            <a:extLst xmlns:a="http://schemas.openxmlformats.org/drawingml/2006/main">
+              <a:ext uri="{FF2B5EF4-FFF2-40B4-BE49-F238E27FC236}">
+                <a16:creationId xmlns:a16="http://schemas.microsoft.com/office/drawing/2014/main" id="{E21C7939-1EDB-4C26-99C4-89AE936A50E7}"/>
+              </a:ext>
+            </a:extLst>
+          </p:cNvPr>
+          <p:cNvSpPr>
+            <a:spLocks xmlns:a="http://schemas.openxmlformats.org/drawingml/2006/main" noGrp="1"/>
+          </p:cNvSpPr>
+          <p:nvPr/>
+        </p:nvSpPr>
+        <p:spPr>
+          <a:xfrm xmlns:a="http://schemas.openxmlformats.org/drawingml/2006/main">
+            <a:off x="5810250" y="4457700"/>
+            <a:ext cx="5562600" cy="495300"/>
+          </a:xfrm>
+          <a:prstGeom xmlns:a="http://schemas.openxmlformats.org/drawingml/2006/main" prst="rect">
+            <a:avLst/>
+          </a:prstGeom>
+          <a:noFill xmlns:a="http://schemas.openxmlformats.org/drawingml/2006/main"/>
+          <a:ln xmlns:a="http://schemas.openxmlformats.org/drawingml/2006/main" w="0">
+            <a:noFill/>
+          </a:ln>
+        </p:spPr>
+        <p:txBody>
+          <a:bodyPr xmlns:a="http://schemas.openxmlformats.org/drawingml/2006/main" lIns="0" tIns="0" rIns="0" bIns="0"/>
+          <a:lstStyle xmlns:a="http://schemas.openxmlformats.org/drawingml/2006/main">
+            <a:defPPr>
+              <a:defRPr sz="1875" b="0">
+                <a:solidFill>
+                  <a:srgbClr val="172B27"/>
+                </a:solidFill>
+                <a:latin typeface="Arial"/>
+                <a:ea typeface="Arial"/>
+                <a:cs typeface="Arial"/>
+              </a:defRPr>
+            </a:defPPr>
+            <a:lvl1pPr>
+              <a:defRPr sz="1875" b="0">
+                <a:solidFill>
+                  <a:srgbClr val="172B27"/>
+                </a:solidFill>
+                <a:latin typeface="Arial"/>
+                <a:ea typeface="Arial"/>
+                <a:cs typeface="Arial"/>
+              </a:defRPr>
+            </a:lvl1pPr>
+            <a:lvl2pPr>
+              <a:defRPr sz="1875" b="0">
+                <a:solidFill>
+                  <a:srgbClr val="172B27"/>
+                </a:solidFill>
+                <a:latin typeface="Arial"/>
+                <a:ea typeface="Arial"/>
+                <a:cs typeface="Arial"/>
+              </a:defRPr>
+            </a:lvl2pPr>
+            <a:lvl3pPr>
+              <a:defRPr sz="1875" b="0">
+                <a:solidFill>
+                  <a:srgbClr val="172B27"/>
+                </a:solidFill>
+                <a:latin typeface="Arial"/>
+                <a:ea typeface="Arial"/>
+                <a:cs typeface="Arial"/>
+              </a:defRPr>
+            </a:lvl3pPr>
+            <a:lvl4pPr>
+              <a:defRPr sz="1875" b="0">
+                <a:solidFill>
+                  <a:srgbClr val="172B27"/>
+                </a:solidFill>
+                <a:latin typeface="Arial"/>
+                <a:ea typeface="Arial"/>
+                <a:cs typeface="Arial"/>
+              </a:defRPr>
+            </a:lvl4pPr>
+            <a:lvl5pPr>
+              <a:defRPr sz="1875" b="0">
+                <a:solidFill>
+                  <a:srgbClr val="172B27"/>
+                </a:solidFill>
+                <a:latin typeface="Arial"/>
+                <a:ea typeface="Arial"/>
+                <a:cs typeface="Arial"/>
+              </a:defRPr>
+            </a:lvl5pPr>
+            <a:lvl6pPr>
+              <a:defRPr sz="1875" b="0">
+                <a:solidFill>
+                  <a:srgbClr val="172B27"/>
+                </a:solidFill>
+                <a:latin typeface="Arial"/>
+                <a:ea typeface="Arial"/>
+                <a:cs typeface="Arial"/>
+              </a:defRPr>
+            </a:lvl6pPr>
+            <a:lvl7pPr>
+              <a:defRPr sz="1875" b="0">
+                <a:solidFill>
+                  <a:srgbClr val="172B27"/>
+                </a:solidFill>
+                <a:latin typeface="Arial"/>
+                <a:ea typeface="Arial"/>
+                <a:cs typeface="Arial"/>
+              </a:defRPr>
+            </a:lvl7pPr>
+            <a:lvl8pPr>
+              <a:defRPr sz="1875" b="0">
+                <a:solidFill>
+                  <a:srgbClr val="172B27"/>
+                </a:solidFill>
+                <a:latin typeface="Arial"/>
+                <a:ea typeface="Arial"/>
+                <a:cs typeface="Arial"/>
+              </a:defRPr>
+            </a:lvl8pPr>
+            <a:lvl9pPr>
+              <a:defRPr sz="1875" b="0">
+                <a:solidFill>
+                  <a:srgbClr val="172B27"/>
+                </a:solidFill>
+                <a:latin typeface="Arial"/>
+                <a:ea typeface="Arial"/>
+                <a:cs typeface="Arial"/>
+              </a:defRPr>
+            </a:lvl9pPr>
+          </a:lstStyle>
+          <a:p xmlns:a="http://schemas.openxmlformats.org/drawingml/2006/main">
+            <a:pPr>
+              <a:defRPr sz="1875" b="0">
+                <a:solidFill>
+                  <a:srgbClr val="172B27"/>
+                </a:solidFill>
+                <a:latin typeface="Arial"/>
+                <a:ea typeface="Arial"/>
+                <a:cs typeface="Arial"/>
+              </a:defRPr>
+            </a:pPr>
+            <a:r>
+              <a:rPr sz="1875" b="0">
+                <a:solidFill>
+                  <a:srgbClr val="172B27"/>
+                </a:solidFill>
+                <a:latin typeface="Arial"/>
+                <a:ea typeface="Arial"/>
+                <a:cs typeface="Arial"/>
+              </a:rPr>
+              <a:t>3. Entrar com a client o operari</a:t>
+            </a:r>
+          </a:p>
+        </p:txBody>
+      </p:sp>
+      <p:sp>
+        <p:nvSpPr>
+          <p:cNvPr id="19" name="inici-nota">
+            <a:extLst xmlns:a="http://schemas.openxmlformats.org/drawingml/2006/main">
+              <a:ext uri="{FF2B5EF4-FFF2-40B4-BE49-F238E27FC236}">
+                <a16:creationId xmlns:a16="http://schemas.microsoft.com/office/drawing/2014/main" id="{7FD19147-6244-4E3F-AD5E-294E4A836509}"/>
+              </a:ext>
+            </a:extLst>
+          </p:cNvPr>
+          <p:cNvSpPr>
+            <a:spLocks xmlns:a="http://schemas.openxmlformats.org/drawingml/2006/main" noGrp="1"/>
+          </p:cNvSpPr>
+          <p:nvPr/>
+        </p:nvSpPr>
+        <p:spPr>
+          <a:xfrm xmlns:a="http://schemas.openxmlformats.org/drawingml/2006/main">
+            <a:off x="5810250" y="5219700"/>
+            <a:ext cx="5562600" cy="628650"/>
+          </a:xfrm>
+          <a:prstGeom xmlns:a="http://schemas.openxmlformats.org/drawingml/2006/main" prst="rect">
+            <a:avLst/>
+          </a:prstGeom>
+          <a:noFill xmlns:a="http://schemas.openxmlformats.org/drawingml/2006/main"/>
+          <a:ln xmlns:a="http://schemas.openxmlformats.org/drawingml/2006/main" w="0">
+            <a:noFill/>
+          </a:ln>
+        </p:spPr>
+        <p:txBody>
+          <a:bodyPr xmlns:a="http://schemas.openxmlformats.org/drawingml/2006/main" lIns="0" tIns="0" rIns="0" bIns="0"/>
+          <a:lstStyle xmlns:a="http://schemas.openxmlformats.org/drawingml/2006/main">
+            <a:defPPr>
+              <a:defRPr sz="1650" b="0">
+                <a:solidFill>
+                  <a:srgbClr val="183D34"/>
+                </a:solidFill>
+                <a:latin typeface="Arial"/>
+                <a:ea typeface="Arial"/>
+                <a:cs typeface="Arial"/>
+              </a:defRPr>
+            </a:defPPr>
+            <a:lvl1pPr>
+              <a:defRPr sz="1650" b="0">
+                <a:solidFill>
+                  <a:srgbClr val="183D34"/>
+                </a:solidFill>
+                <a:latin typeface="Arial"/>
+                <a:ea typeface="Arial"/>
+                <a:cs typeface="Arial"/>
+              </a:defRPr>
+            </a:lvl1pPr>
+            <a:lvl2pPr>
+              <a:defRPr sz="1650" b="0">
+                <a:solidFill>
+                  <a:srgbClr val="183D34"/>
+                </a:solidFill>
+                <a:latin typeface="Arial"/>
+                <a:ea typeface="Arial"/>
+                <a:cs typeface="Arial"/>
+              </a:defRPr>
+            </a:lvl2pPr>
+            <a:lvl3pPr>
+              <a:defRPr sz="1650" b="0">
+                <a:solidFill>
+                  <a:srgbClr val="183D34"/>
+                </a:solidFill>
+                <a:latin typeface="Arial"/>
+                <a:ea typeface="Arial"/>
+                <a:cs typeface="Arial"/>
+              </a:defRPr>
+            </a:lvl3pPr>
+            <a:lvl4pPr>
+              <a:defRPr sz="1650" b="0">
+                <a:solidFill>
+                  <a:srgbClr val="183D34"/>
+                </a:solidFill>
+                <a:latin typeface="Arial"/>
+                <a:ea typeface="Arial"/>
+                <a:cs typeface="Arial"/>
+              </a:defRPr>
+            </a:lvl4pPr>
+            <a:lvl5pPr>
+              <a:defRPr sz="1650" b="0">
+                <a:solidFill>
+                  <a:srgbClr val="183D34"/>
+                </a:solidFill>
+                <a:latin typeface="Arial"/>
+                <a:ea typeface="Arial"/>
+                <a:cs typeface="Arial"/>
+              </a:defRPr>
+            </a:lvl5pPr>
+            <a:lvl6pPr>
+              <a:defRPr sz="1650" b="0">
+                <a:solidFill>
+                  <a:srgbClr val="183D34"/>
+                </a:solidFill>
+                <a:latin typeface="Arial"/>
+                <a:ea typeface="Arial"/>
+                <a:cs typeface="Arial"/>
+              </a:defRPr>
+            </a:lvl6pPr>
+            <a:lvl7pPr>
+              <a:defRPr sz="1650" b="0">
+                <a:solidFill>
+                  <a:srgbClr val="183D34"/>
+                </a:solidFill>
+                <a:latin typeface="Arial"/>
+                <a:ea typeface="Arial"/>
+                <a:cs typeface="Arial"/>
+              </a:defRPr>
+            </a:lvl7pPr>
+            <a:lvl8pPr>
+              <a:defRPr sz="1650" b="0">
+                <a:solidFill>
+                  <a:srgbClr val="183D34"/>
+                </a:solidFill>
+                <a:latin typeface="Arial"/>
+                <a:ea typeface="Arial"/>
+                <a:cs typeface="Arial"/>
+              </a:defRPr>
+            </a:lvl8pPr>
+            <a:lvl9pPr>
+              <a:defRPr sz="1650" b="0">
+                <a:solidFill>
+                  <a:srgbClr val="183D34"/>
+                </a:solidFill>
+                <a:latin typeface="Arial"/>
+                <a:ea typeface="Arial"/>
+                <a:cs typeface="Arial"/>
+              </a:defRPr>
+            </a:lvl9pPr>
+          </a:lstStyle>
+          <a:p xmlns:a="http://schemas.openxmlformats.org/drawingml/2006/main">
+            <a:pPr>
+              <a:defRPr sz="1650" b="0">
+                <a:solidFill>
+                  <a:srgbClr val="183D34"/>
+                </a:solidFill>
+                <a:latin typeface="Arial"/>
+                <a:ea typeface="Arial"/>
+                <a:cs typeface="Arial"/>
+              </a:defRPr>
+            </a:pPr>
+            <a:r>
+              <a:rPr sz="1650" b="0">
+                <a:solidFill>
+                  <a:srgbClr val="183D34"/>
+                </a:solidFill>
+                <a:latin typeface="Arial"/>
+                <a:ea typeface="Arial"/>
+                <a:cs typeface="Arial"/>
+              </a:rPr>
+              <a:t>Connexió a Internet · servei remot del projecte</a:t>
+            </a:r>
+          </a:p>
+        </p:txBody>
+      </p:sp>
     </p:spTree>
     <p:extLst>
       <p:ext uri="{BB962C8B-B14F-4D97-AF65-F5344CB8AC3E}">
@@ -5254,21 +6271,17 @@
       </p:ext>
     </p:extLst>
   </p:cSld>
-  <p:clrMapOvr>
-    <a:masterClrMapping/>
-  </p:clrMapOvr>
 </p:sld>
 </file>
 
 <file path=ppt/slides/slide2.xml><?xml version="1.0" encoding="utf-8"?>
-<p:sld xmlns:a="http://schemas.openxmlformats.org/drawingml/2006/main" xmlns:r="http://schemas.openxmlformats.org/officeDocument/2006/relationships" xmlns:p="http://schemas.openxmlformats.org/presentationml/2006/main">
+<p:sld xmlns:p="http://schemas.openxmlformats.org/presentationml/2006/main">
   <p:cSld>
     <p:bg>
       <p:bgPr>
-        <a:solidFill>
+        <a:solidFill xmlns:a="http://schemas.openxmlformats.org/drawingml/2006/main">
           <a:srgbClr val="183D34"/>
         </a:solidFill>
-        <a:effectLst/>
       </p:bgPr>
     </p:bg>
     <p:spTree>
@@ -5278,44 +6291,39 @@
         <p:nvPr/>
       </p:nvGrpSpPr>
       <p:grpSpPr>
-        <a:xfrm>
-          <a:off x="0" y="0"/>
-          <a:ext cx="0" cy="0"/>
-          <a:chOff x="0" y="0"/>
-          <a:chExt cx="0" cy="0"/>
-        </a:xfrm>
+        <a:xfrm xmlns:a="http://schemas.openxmlformats.org/drawingml/2006/main"/>
       </p:grpSpPr>
       <p:sp>
         <p:nvSpPr>
           <p:cNvPr id="10" name="titol">
-            <a:extLst>
+            <a:extLst xmlns:a="http://schemas.openxmlformats.org/drawingml/2006/main">
               <a:ext uri="{FF2B5EF4-FFF2-40B4-BE49-F238E27FC236}">
                 <a16:creationId xmlns:a16="http://schemas.microsoft.com/office/drawing/2014/main" id="{117B66D5-1E80-485C-BC97-ED81D4BE8C23}"/>
               </a:ext>
             </a:extLst>
           </p:cNvPr>
           <p:cNvSpPr>
-            <a:spLocks noGrp="1"/>
+            <a:spLocks xmlns:a="http://schemas.openxmlformats.org/drawingml/2006/main" noGrp="1"/>
           </p:cNvSpPr>
           <p:nvPr/>
         </p:nvSpPr>
         <p:spPr>
-          <a:xfrm>
+          <a:xfrm xmlns:a="http://schemas.openxmlformats.org/drawingml/2006/main">
             <a:off x="609600" y="495300"/>
             <a:ext cx="10763250" cy="685800"/>
           </a:xfrm>
-          <a:prstGeom prst="rect">
+          <a:prstGeom xmlns:a="http://schemas.openxmlformats.org/drawingml/2006/main" prst="rect">
             <a:avLst/>
           </a:prstGeom>
-          <a:noFill/>
-          <a:ln w="0">
+          <a:noFill xmlns:a="http://schemas.openxmlformats.org/drawingml/2006/main"/>
+          <a:ln xmlns:a="http://schemas.openxmlformats.org/drawingml/2006/main" w="0">
             <a:noFill/>
             <a:prstDash val="solid"/>
           </a:ln>
         </p:spPr>
         <p:txBody>
-          <a:bodyPr/>
-          <a:lstStyle>
+          <a:bodyPr xmlns:a="http://schemas.openxmlformats.org/drawingml/2006/main"/>
+          <a:lstStyle xmlns:a="http://schemas.openxmlformats.org/drawingml/2006/main">
             <a:defPPr>
               <a:defRPr sz="3600" b="1">
                 <a:solidFill>
@@ -5327,6 +6335,7 @@
               </a:defRPr>
             </a:defPPr>
             <a:lvl1pPr>
+              <a:buNone/>
               <a:defRPr sz="3600" b="1">
                 <a:solidFill>
                   <a:srgbClr val="FFFFFF"/>
@@ -5337,6 +6346,7 @@
               </a:defRPr>
             </a:lvl1pPr>
             <a:lvl2pPr>
+              <a:buNone/>
               <a:defRPr sz="3600" b="1">
                 <a:solidFill>
                   <a:srgbClr val="FFFFFF"/>
@@ -5347,6 +6357,7 @@
               </a:defRPr>
             </a:lvl2pPr>
             <a:lvl3pPr>
+              <a:buNone/>
               <a:defRPr sz="3600" b="1">
                 <a:solidFill>
                   <a:srgbClr val="FFFFFF"/>
@@ -5357,6 +6368,7 @@
               </a:defRPr>
             </a:lvl3pPr>
             <a:lvl4pPr>
+              <a:buNone/>
               <a:defRPr sz="3600" b="1">
                 <a:solidFill>
                   <a:srgbClr val="FFFFFF"/>
@@ -5367,6 +6379,7 @@
               </a:defRPr>
             </a:lvl4pPr>
             <a:lvl5pPr>
+              <a:buNone/>
               <a:defRPr sz="3600" b="1">
                 <a:solidFill>
                   <a:srgbClr val="FFFFFF"/>
@@ -5377,6 +6390,7 @@
               </a:defRPr>
             </a:lvl5pPr>
             <a:lvl6pPr>
+              <a:buNone/>
               <a:defRPr sz="3600" b="1">
                 <a:solidFill>
                   <a:srgbClr val="FFFFFF"/>
@@ -5387,6 +6401,7 @@
               </a:defRPr>
             </a:lvl6pPr>
             <a:lvl7pPr>
+              <a:buNone/>
               <a:defRPr sz="3600" b="1">
                 <a:solidFill>
                   <a:srgbClr val="FFFFFF"/>
@@ -5397,6 +6412,7 @@
               </a:defRPr>
             </a:lvl7pPr>
             <a:lvl8pPr>
+              <a:buNone/>
               <a:defRPr sz="3600" b="1">
                 <a:solidFill>
                   <a:srgbClr val="FFFFFF"/>
@@ -5407,6 +6423,7 @@
               </a:defRPr>
             </a:lvl8pPr>
             <a:lvl9pPr>
+              <a:buNone/>
               <a:defRPr sz="3600" b="1">
                 <a:solidFill>
                   <a:srgbClr val="FFFFFF"/>
@@ -5417,8 +6434,9 @@
               </a:defRPr>
             </a:lvl9pPr>
           </a:lstStyle>
-          <a:p>
+          <a:p xmlns:a="http://schemas.openxmlformats.org/drawingml/2006/main">
             <a:pPr>
+              <a:buNone/>
               <a:defRPr sz="3600" b="1">
                 <a:solidFill>
                   <a:srgbClr val="FFFFFF"/>
@@ -5429,7 +6447,7 @@
               </a:defRPr>
             </a:pPr>
             <a:r>
-              <a:rPr sz="3600" b="1" dirty="0" err="1">
+              <a:rPr sz="3600" b="1">
                 <a:solidFill>
                   <a:srgbClr val="FFFFFF"/>
                 </a:solidFill>
@@ -5437,31 +6455,9 @@
                 <a:ea typeface="Arial"/>
                 <a:cs typeface="Arial"/>
               </a:rPr>
-              <a:t>Funció</a:t>
+              <a:t>Windows i servei remot</a:t>
             </a:r>
-            <a:r>
-              <a:rPr sz="3600" b="1" dirty="0">
-                <a:solidFill>
-                  <a:srgbClr val="FFFFFF"/>
-                </a:solidFill>
-                <a:latin typeface="Arial"/>
-                <a:ea typeface="Arial"/>
-                <a:cs typeface="Arial"/>
-              </a:rPr>
-              <a:t> </a:t>
-            </a:r>
-            <a:r>
-              <a:rPr sz="3600" b="1" dirty="0" err="1">
-                <a:solidFill>
-                  <a:srgbClr val="FFFFFF"/>
-                </a:solidFill>
-                <a:latin typeface="Arial"/>
-                <a:ea typeface="Arial"/>
-                <a:cs typeface="Arial"/>
-              </a:rPr>
-              <a:t>d’IA</a:t>
-            </a:r>
-            <a:endParaRPr sz="3600" b="1" dirty="0">
+            <a:endParaRPr sz="3600" b="1">
               <a:solidFill>
                 <a:srgbClr val="FFFFFF"/>
               </a:solidFill>
@@ -5475,34 +6471,34 @@
       <p:sp>
         <p:nvSpPr>
           <p:cNvPr id="2" name="sub-1">
-            <a:extLst>
+            <a:extLst xmlns:a="http://schemas.openxmlformats.org/drawingml/2006/main">
               <a:ext uri="{FF2B5EF4-FFF2-40B4-BE49-F238E27FC236}">
                 <a16:creationId xmlns:a16="http://schemas.microsoft.com/office/drawing/2014/main" id="{D62EF45A-8A8A-49CC-A4E9-61B6CC9FEC4F}"/>
               </a:ext>
             </a:extLst>
           </p:cNvPr>
           <p:cNvSpPr>
-            <a:spLocks noGrp="1"/>
+            <a:spLocks xmlns:a="http://schemas.openxmlformats.org/drawingml/2006/main" noGrp="1"/>
           </p:cNvSpPr>
           <p:nvPr/>
         </p:nvSpPr>
         <p:spPr>
-          <a:xfrm>
+          <a:xfrm xmlns:a="http://schemas.openxmlformats.org/drawingml/2006/main">
             <a:off x="609600" y="1600200"/>
             <a:ext cx="4667250" cy="304800"/>
           </a:xfrm>
-          <a:prstGeom prst="rect">
+          <a:prstGeom xmlns:a="http://schemas.openxmlformats.org/drawingml/2006/main" prst="rect">
             <a:avLst/>
           </a:prstGeom>
-          <a:noFill/>
-          <a:ln w="0">
+          <a:noFill xmlns:a="http://schemas.openxmlformats.org/drawingml/2006/main"/>
+          <a:ln xmlns:a="http://schemas.openxmlformats.org/drawingml/2006/main" w="0">
             <a:noFill/>
             <a:prstDash val="solid"/>
           </a:ln>
         </p:spPr>
         <p:txBody>
-          <a:bodyPr/>
-          <a:lstStyle>
+          <a:bodyPr xmlns:a="http://schemas.openxmlformats.org/drawingml/2006/main"/>
+          <a:lstStyle xmlns:a="http://schemas.openxmlformats.org/drawingml/2006/main">
             <a:defPPr>
               <a:defRPr sz="1500" b="1">
                 <a:solidFill>
@@ -5514,6 +6510,7 @@
               </a:defRPr>
             </a:defPPr>
             <a:lvl1pPr>
+              <a:buNone/>
               <a:defRPr sz="1500" b="1">
                 <a:solidFill>
                   <a:srgbClr val="BCE6D7"/>
@@ -5524,6 +6521,7 @@
               </a:defRPr>
             </a:lvl1pPr>
             <a:lvl2pPr>
+              <a:buNone/>
               <a:defRPr sz="1500" b="1">
                 <a:solidFill>
                   <a:srgbClr val="BCE6D7"/>
@@ -5534,6 +6532,7 @@
               </a:defRPr>
             </a:lvl2pPr>
             <a:lvl3pPr>
+              <a:buNone/>
               <a:defRPr sz="1500" b="1">
                 <a:solidFill>
                   <a:srgbClr val="BCE6D7"/>
@@ -5544,6 +6543,7 @@
               </a:defRPr>
             </a:lvl3pPr>
             <a:lvl4pPr>
+              <a:buNone/>
               <a:defRPr sz="1500" b="1">
                 <a:solidFill>
                   <a:srgbClr val="BCE6D7"/>
@@ -5554,6 +6554,7 @@
               </a:defRPr>
             </a:lvl4pPr>
             <a:lvl5pPr>
+              <a:buNone/>
               <a:defRPr sz="1500" b="1">
                 <a:solidFill>
                   <a:srgbClr val="BCE6D7"/>
@@ -5564,6 +6565,7 @@
               </a:defRPr>
             </a:lvl5pPr>
             <a:lvl6pPr>
+              <a:buNone/>
               <a:defRPr sz="1500" b="1">
                 <a:solidFill>
                   <a:srgbClr val="BCE6D7"/>
@@ -5574,6 +6576,7 @@
               </a:defRPr>
             </a:lvl6pPr>
             <a:lvl7pPr>
+              <a:buNone/>
               <a:defRPr sz="1500" b="1">
                 <a:solidFill>
                   <a:srgbClr val="BCE6D7"/>
@@ -5584,6 +6587,7 @@
               </a:defRPr>
             </a:lvl7pPr>
             <a:lvl8pPr>
+              <a:buNone/>
               <a:defRPr sz="1500" b="1">
                 <a:solidFill>
                   <a:srgbClr val="BCE6D7"/>
@@ -5594,6 +6598,7 @@
               </a:defRPr>
             </a:lvl8pPr>
             <a:lvl9pPr>
+              <a:buNone/>
               <a:defRPr sz="1500" b="1">
                 <a:solidFill>
                   <a:srgbClr val="BCE6D7"/>
@@ -5604,8 +6609,9 @@
               </a:defRPr>
             </a:lvl9pPr>
           </a:lstStyle>
-          <a:p>
+          <a:p xmlns:a="http://schemas.openxmlformats.org/drawingml/2006/main">
             <a:pPr>
+              <a:buNone/>
               <a:defRPr sz="1500" b="1">
                 <a:solidFill>
                   <a:srgbClr val="BCE6D7"/>
@@ -5624,7 +6630,7 @@
                 <a:ea typeface="Arial"/>
                 <a:cs typeface="Arial"/>
               </a:rPr>
-              <a:t>FUNCIONAMENT PREVIST</a:t>
+              <a:t>FUNCIONAMENT</a:t>
             </a:r>
           </a:p>
         </p:txBody>
@@ -5632,34 +6638,34 @@
       <p:sp>
         <p:nvSpPr>
           <p:cNvPr id="3" name="cos-1">
-            <a:extLst>
+            <a:extLst xmlns:a="http://schemas.openxmlformats.org/drawingml/2006/main">
               <a:ext uri="{FF2B5EF4-FFF2-40B4-BE49-F238E27FC236}">
                 <a16:creationId xmlns:a16="http://schemas.microsoft.com/office/drawing/2014/main" id="{86F10F3B-D5B5-4B53-822A-1858B09E1B7B}"/>
               </a:ext>
             </a:extLst>
           </p:cNvPr>
           <p:cNvSpPr>
-            <a:spLocks noGrp="1"/>
+            <a:spLocks xmlns:a="http://schemas.openxmlformats.org/drawingml/2006/main" noGrp="1"/>
           </p:cNvSpPr>
           <p:nvPr/>
         </p:nvSpPr>
         <p:spPr>
-          <a:xfrm>
+          <a:xfrm xmlns:a="http://schemas.openxmlformats.org/drawingml/2006/main">
             <a:off x="609600" y="2047875"/>
             <a:ext cx="4905375" cy="2190750"/>
           </a:xfrm>
-          <a:prstGeom prst="rect">
+          <a:prstGeom xmlns:a="http://schemas.openxmlformats.org/drawingml/2006/main" prst="rect">
             <a:avLst/>
           </a:prstGeom>
-          <a:noFill/>
-          <a:ln w="0">
+          <a:noFill xmlns:a="http://schemas.openxmlformats.org/drawingml/2006/main"/>
+          <a:ln xmlns:a="http://schemas.openxmlformats.org/drawingml/2006/main" w="0">
             <a:noFill/>
             <a:prstDash val="solid"/>
           </a:ln>
         </p:spPr>
         <p:txBody>
-          <a:bodyPr/>
-          <a:lstStyle>
+          <a:bodyPr xmlns:a="http://schemas.openxmlformats.org/drawingml/2006/main"/>
+          <a:lstStyle xmlns:a="http://schemas.openxmlformats.org/drawingml/2006/main">
             <a:defPPr>
               <a:defRPr sz="2100" b="0">
                 <a:solidFill>
@@ -5671,6 +6677,7 @@
               </a:defRPr>
             </a:defPPr>
             <a:lvl1pPr>
+              <a:buNone/>
               <a:defRPr sz="2100" b="0">
                 <a:solidFill>
                   <a:srgbClr val="FFFFFF"/>
@@ -5681,6 +6688,7 @@
               </a:defRPr>
             </a:lvl1pPr>
             <a:lvl2pPr>
+              <a:buNone/>
               <a:defRPr sz="2100" b="0">
                 <a:solidFill>
                   <a:srgbClr val="FFFFFF"/>
@@ -5691,6 +6699,7 @@
               </a:defRPr>
             </a:lvl2pPr>
             <a:lvl3pPr>
+              <a:buNone/>
               <a:defRPr sz="2100" b="0">
                 <a:solidFill>
                   <a:srgbClr val="FFFFFF"/>
@@ -5701,6 +6710,7 @@
               </a:defRPr>
             </a:lvl3pPr>
             <a:lvl4pPr>
+              <a:buNone/>
               <a:defRPr sz="2100" b="0">
                 <a:solidFill>
                   <a:srgbClr val="FFFFFF"/>
@@ -5711,6 +6721,7 @@
               </a:defRPr>
             </a:lvl4pPr>
             <a:lvl5pPr>
+              <a:buNone/>
               <a:defRPr sz="2100" b="0">
                 <a:solidFill>
                   <a:srgbClr val="FFFFFF"/>
@@ -5721,6 +6732,7 @@
               </a:defRPr>
             </a:lvl5pPr>
             <a:lvl6pPr>
+              <a:buNone/>
               <a:defRPr sz="2100" b="0">
                 <a:solidFill>
                   <a:srgbClr val="FFFFFF"/>
@@ -5731,6 +6743,7 @@
               </a:defRPr>
             </a:lvl6pPr>
             <a:lvl7pPr>
+              <a:buNone/>
               <a:defRPr sz="2100" b="0">
                 <a:solidFill>
                   <a:srgbClr val="FFFFFF"/>
@@ -5741,6 +6754,7 @@
               </a:defRPr>
             </a:lvl7pPr>
             <a:lvl8pPr>
+              <a:buNone/>
               <a:defRPr sz="2100" b="0">
                 <a:solidFill>
                   <a:srgbClr val="FFFFFF"/>
@@ -5751,6 +6765,7 @@
               </a:defRPr>
             </a:lvl8pPr>
             <a:lvl9pPr>
+              <a:buNone/>
               <a:defRPr sz="2100" b="0">
                 <a:solidFill>
                   <a:srgbClr val="FFFFFF"/>
@@ -5761,8 +6776,9 @@
               </a:defRPr>
             </a:lvl9pPr>
           </a:lstStyle>
-          <a:p>
+          <a:p xmlns:a="http://schemas.openxmlformats.org/drawingml/2006/main">
             <a:pPr>
+              <a:buNone/>
               <a:defRPr sz="2100" b="0">
                 <a:solidFill>
                   <a:srgbClr val="FFFFFF"/>
@@ -5773,7 +6789,7 @@
               </a:defRPr>
             </a:pPr>
             <a:r>
-              <a:rPr sz="2100" b="0" dirty="0">
+              <a:rPr sz="2100" b="0">
                 <a:solidFill>
                   <a:srgbClr val="FFFFFF"/>
                 </a:solidFill>
@@ -5781,293 +6797,7 @@
                 <a:ea typeface="Arial"/>
                 <a:cs typeface="Arial"/>
               </a:rPr>
-              <a:t>El </a:t>
-            </a:r>
-            <a:r>
-              <a:rPr sz="2100" b="0" dirty="0" err="1">
-                <a:solidFill>
-                  <a:srgbClr val="FFFFFF"/>
-                </a:solidFill>
-                <a:latin typeface="Arial"/>
-                <a:ea typeface="Arial"/>
-                <a:cs typeface="Arial"/>
-              </a:rPr>
-              <a:t>servidor</a:t>
-            </a:r>
-            <a:r>
-              <a:rPr sz="2100" b="0" dirty="0">
-                <a:solidFill>
-                  <a:srgbClr val="FFFFFF"/>
-                </a:solidFill>
-                <a:latin typeface="Arial"/>
-                <a:ea typeface="Arial"/>
-                <a:cs typeface="Arial"/>
-              </a:rPr>
-              <a:t> filtra plats compatibles </a:t>
-            </a:r>
-            <a:r>
-              <a:rPr sz="2100" b="0" dirty="0" err="1">
-                <a:solidFill>
-                  <a:srgbClr val="FFFFFF"/>
-                </a:solidFill>
-                <a:latin typeface="Arial"/>
-                <a:ea typeface="Arial"/>
-                <a:cs typeface="Arial"/>
-              </a:rPr>
-              <a:t>amb</a:t>
-            </a:r>
-            <a:r>
-              <a:rPr sz="2100" b="0" dirty="0">
-                <a:solidFill>
-                  <a:srgbClr val="FFFFFF"/>
-                </a:solidFill>
-                <a:latin typeface="Arial"/>
-                <a:ea typeface="Arial"/>
-                <a:cs typeface="Arial"/>
-              </a:rPr>
-              <a:t> el </a:t>
-            </a:r>
-            <a:r>
-              <a:rPr sz="2100" b="0" dirty="0" err="1">
-                <a:solidFill>
-                  <a:srgbClr val="FFFFFF"/>
-                </a:solidFill>
-                <a:latin typeface="Arial"/>
-                <a:ea typeface="Arial"/>
-                <a:cs typeface="Arial"/>
-              </a:rPr>
-              <a:t>perfil</a:t>
-            </a:r>
-            <a:r>
-              <a:rPr sz="2100" b="0" dirty="0">
-                <a:solidFill>
-                  <a:srgbClr val="FFFFFF"/>
-                </a:solidFill>
-                <a:latin typeface="Arial"/>
-                <a:ea typeface="Arial"/>
-                <a:cs typeface="Arial"/>
-              </a:rPr>
-              <a:t>. El model </a:t>
-            </a:r>
-            <a:r>
-              <a:rPr sz="2100" b="0" dirty="0" err="1">
-                <a:solidFill>
-                  <a:srgbClr val="FFFFFF"/>
-                </a:solidFill>
-                <a:latin typeface="Arial"/>
-                <a:ea typeface="Arial"/>
-                <a:cs typeface="Arial"/>
-              </a:rPr>
-              <a:t>proposa</a:t>
-            </a:r>
-            <a:r>
-              <a:rPr sz="2100" b="0" dirty="0">
-                <a:solidFill>
-                  <a:srgbClr val="FFFFFF"/>
-                </a:solidFill>
-                <a:latin typeface="Arial"/>
-                <a:ea typeface="Arial"/>
-                <a:cs typeface="Arial"/>
-              </a:rPr>
-              <a:t> un plat per </a:t>
-            </a:r>
-            <a:r>
-              <a:rPr sz="2100" b="0" dirty="0" err="1">
-                <a:solidFill>
-                  <a:srgbClr val="FFFFFF"/>
-                </a:solidFill>
-                <a:latin typeface="Arial"/>
-                <a:ea typeface="Arial"/>
-                <a:cs typeface="Arial"/>
-              </a:rPr>
-              <a:t>cada</a:t>
-            </a:r>
-            <a:r>
-              <a:rPr sz="2100" b="0" dirty="0">
-                <a:solidFill>
-                  <a:srgbClr val="FFFFFF"/>
-                </a:solidFill>
-                <a:latin typeface="Arial"/>
-                <a:ea typeface="Arial"/>
-                <a:cs typeface="Arial"/>
-              </a:rPr>
-              <a:t> data </a:t>
-            </a:r>
-            <a:r>
-              <a:rPr sz="2100" b="0" dirty="0" err="1">
-                <a:solidFill>
-                  <a:srgbClr val="FFFFFF"/>
-                </a:solidFill>
-                <a:latin typeface="Arial"/>
-                <a:ea typeface="Arial"/>
-                <a:cs typeface="Arial"/>
-              </a:rPr>
-              <a:t>i</a:t>
-            </a:r>
-            <a:r>
-              <a:rPr sz="2100" b="0" dirty="0">
-                <a:solidFill>
-                  <a:srgbClr val="FFFFFF"/>
-                </a:solidFill>
-                <a:latin typeface="Arial"/>
-                <a:ea typeface="Arial"/>
-                <a:cs typeface="Arial"/>
-              </a:rPr>
-              <a:t> </a:t>
-            </a:r>
-            <a:r>
-              <a:rPr sz="2100" b="0" dirty="0" err="1">
-                <a:solidFill>
-                  <a:srgbClr val="FFFFFF"/>
-                </a:solidFill>
-                <a:latin typeface="Arial"/>
-                <a:ea typeface="Arial"/>
-                <a:cs typeface="Arial"/>
-              </a:rPr>
-              <a:t>àpat</a:t>
-            </a:r>
-            <a:r>
-              <a:rPr sz="2100" b="0" dirty="0">
-                <a:solidFill>
-                  <a:srgbClr val="FFFFFF"/>
-                </a:solidFill>
-                <a:latin typeface="Arial"/>
-                <a:ea typeface="Arial"/>
-                <a:cs typeface="Arial"/>
-              </a:rPr>
-              <a:t>. El </a:t>
-            </a:r>
-            <a:r>
-              <a:rPr sz="2100" b="0" dirty="0" err="1">
-                <a:solidFill>
-                  <a:srgbClr val="FFFFFF"/>
-                </a:solidFill>
-                <a:latin typeface="Arial"/>
-                <a:ea typeface="Arial"/>
-                <a:cs typeface="Arial"/>
-              </a:rPr>
-              <a:t>servidor</a:t>
-            </a:r>
-            <a:r>
-              <a:rPr sz="2100" b="0" dirty="0">
-                <a:solidFill>
-                  <a:srgbClr val="FFFFFF"/>
-                </a:solidFill>
-                <a:latin typeface="Arial"/>
-                <a:ea typeface="Arial"/>
-                <a:cs typeface="Arial"/>
-              </a:rPr>
-              <a:t> </a:t>
-            </a:r>
-            <a:r>
-              <a:rPr sz="2100" b="0" dirty="0" err="1">
-                <a:solidFill>
-                  <a:srgbClr val="FFFFFF"/>
-                </a:solidFill>
-                <a:latin typeface="Arial"/>
-                <a:ea typeface="Arial"/>
-                <a:cs typeface="Arial"/>
-              </a:rPr>
-              <a:t>valida</a:t>
-            </a:r>
-            <a:r>
-              <a:rPr sz="2100" b="0" dirty="0">
-                <a:solidFill>
-                  <a:srgbClr val="FFFFFF"/>
-                </a:solidFill>
-                <a:latin typeface="Arial"/>
-                <a:ea typeface="Arial"/>
-                <a:cs typeface="Arial"/>
-              </a:rPr>
-              <a:t> tots els </a:t>
-            </a:r>
-            <a:r>
-              <a:rPr sz="2100" b="0" dirty="0" err="1">
-                <a:solidFill>
-                  <a:srgbClr val="FFFFFF"/>
-                </a:solidFill>
-                <a:latin typeface="Arial"/>
-                <a:ea typeface="Arial"/>
-                <a:cs typeface="Arial"/>
-              </a:rPr>
-              <a:t>codis</a:t>
-            </a:r>
-            <a:r>
-              <a:rPr sz="2100" b="0" dirty="0">
-                <a:solidFill>
-                  <a:srgbClr val="FFFFFF"/>
-                </a:solidFill>
-                <a:latin typeface="Arial"/>
-                <a:ea typeface="Arial"/>
-                <a:cs typeface="Arial"/>
-              </a:rPr>
-              <a:t> </a:t>
-            </a:r>
-            <a:r>
-              <a:rPr sz="2100" b="0" dirty="0" err="1">
-                <a:solidFill>
-                  <a:srgbClr val="FFFFFF"/>
-                </a:solidFill>
-                <a:latin typeface="Arial"/>
-                <a:ea typeface="Arial"/>
-                <a:cs typeface="Arial"/>
-              </a:rPr>
-              <a:t>abans</a:t>
-            </a:r>
-            <a:r>
-              <a:rPr sz="2100" b="0" dirty="0">
-                <a:solidFill>
-                  <a:srgbClr val="FFFFFF"/>
-                </a:solidFill>
-                <a:latin typeface="Arial"/>
-                <a:ea typeface="Arial"/>
-                <a:cs typeface="Arial"/>
-              </a:rPr>
-              <a:t> de </a:t>
-            </a:r>
-            <a:r>
-              <a:rPr sz="2100" b="0" dirty="0" err="1">
-                <a:solidFill>
-                  <a:srgbClr val="FFFFFF"/>
-                </a:solidFill>
-                <a:latin typeface="Arial"/>
-                <a:ea typeface="Arial"/>
-                <a:cs typeface="Arial"/>
-              </a:rPr>
-              <a:t>publicar</a:t>
-            </a:r>
-            <a:r>
-              <a:rPr sz="2100" b="0" dirty="0">
-                <a:solidFill>
-                  <a:srgbClr val="FFFFFF"/>
-                </a:solidFill>
-                <a:latin typeface="Arial"/>
-                <a:ea typeface="Arial"/>
-                <a:cs typeface="Arial"/>
-              </a:rPr>
-              <a:t> el </a:t>
-            </a:r>
-            <a:r>
-              <a:rPr sz="2100" b="0" dirty="0" err="1">
-                <a:solidFill>
-                  <a:srgbClr val="FFFFFF"/>
-                </a:solidFill>
-                <a:latin typeface="Arial"/>
-                <a:ea typeface="Arial"/>
-                <a:cs typeface="Arial"/>
-              </a:rPr>
-              <a:t>menú</a:t>
-            </a:r>
-            <a:r>
-              <a:rPr sz="2100" b="0" dirty="0">
-                <a:solidFill>
-                  <a:srgbClr val="FFFFFF"/>
-                </a:solidFill>
-                <a:latin typeface="Arial"/>
-                <a:ea typeface="Arial"/>
-                <a:cs typeface="Arial"/>
-              </a:rPr>
-              <a:t>.</a:t>
+              <a:t>L’app de Windows mostra els menús i envia les accions a l’API del VPS. El client i l’operari treballen sobre els mateixos comptes i propostes.</a:t>
             </a:r>
           </a:p>
         </p:txBody>
@@ -6075,34 +6805,34 @@
       <p:sp>
         <p:nvSpPr>
           <p:cNvPr id="4" name="sub-2">
-            <a:extLst>
+            <a:extLst xmlns:a="http://schemas.openxmlformats.org/drawingml/2006/main">
               <a:ext uri="{FF2B5EF4-FFF2-40B4-BE49-F238E27FC236}">
                 <a16:creationId xmlns:a16="http://schemas.microsoft.com/office/drawing/2014/main" id="{2BB39BEF-9DCF-476E-9465-7DE9BEA4D3B6}"/>
               </a:ext>
             </a:extLst>
           </p:cNvPr>
           <p:cNvSpPr>
-            <a:spLocks noGrp="1"/>
+            <a:spLocks xmlns:a="http://schemas.openxmlformats.org/drawingml/2006/main" noGrp="1"/>
           </p:cNvSpPr>
           <p:nvPr/>
         </p:nvSpPr>
         <p:spPr>
-          <a:xfrm>
+          <a:xfrm xmlns:a="http://schemas.openxmlformats.org/drawingml/2006/main">
             <a:off x="6172200" y="1600200"/>
             <a:ext cx="4667250" cy="304800"/>
           </a:xfrm>
-          <a:prstGeom prst="rect">
+          <a:prstGeom xmlns:a="http://schemas.openxmlformats.org/drawingml/2006/main" prst="rect">
             <a:avLst/>
           </a:prstGeom>
-          <a:noFill/>
-          <a:ln w="0">
+          <a:noFill xmlns:a="http://schemas.openxmlformats.org/drawingml/2006/main"/>
+          <a:ln xmlns:a="http://schemas.openxmlformats.org/drawingml/2006/main" w="0">
             <a:noFill/>
             <a:prstDash val="solid"/>
           </a:ln>
         </p:spPr>
         <p:txBody>
-          <a:bodyPr/>
-          <a:lstStyle>
+          <a:bodyPr xmlns:a="http://schemas.openxmlformats.org/drawingml/2006/main"/>
+          <a:lstStyle xmlns:a="http://schemas.openxmlformats.org/drawingml/2006/main">
             <a:defPPr>
               <a:defRPr sz="1500" b="1">
                 <a:solidFill>
@@ -6114,6 +6844,7 @@
               </a:defRPr>
             </a:defPPr>
             <a:lvl1pPr>
+              <a:buNone/>
               <a:defRPr sz="1500" b="1">
                 <a:solidFill>
                   <a:srgbClr val="BCE6D7"/>
@@ -6124,6 +6855,7 @@
               </a:defRPr>
             </a:lvl1pPr>
             <a:lvl2pPr>
+              <a:buNone/>
               <a:defRPr sz="1500" b="1">
                 <a:solidFill>
                   <a:srgbClr val="BCE6D7"/>
@@ -6134,6 +6866,7 @@
               </a:defRPr>
             </a:lvl2pPr>
             <a:lvl3pPr>
+              <a:buNone/>
               <a:defRPr sz="1500" b="1">
                 <a:solidFill>
                   <a:srgbClr val="BCE6D7"/>
@@ -6144,6 +6877,7 @@
               </a:defRPr>
             </a:lvl3pPr>
             <a:lvl4pPr>
+              <a:buNone/>
               <a:defRPr sz="1500" b="1">
                 <a:solidFill>
                   <a:srgbClr val="BCE6D7"/>
@@ -6154,6 +6888,7 @@
               </a:defRPr>
             </a:lvl4pPr>
             <a:lvl5pPr>
+              <a:buNone/>
               <a:defRPr sz="1500" b="1">
                 <a:solidFill>
                   <a:srgbClr val="BCE6D7"/>
@@ -6164,6 +6899,7 @@
               </a:defRPr>
             </a:lvl5pPr>
             <a:lvl6pPr>
+              <a:buNone/>
               <a:defRPr sz="1500" b="1">
                 <a:solidFill>
                   <a:srgbClr val="BCE6D7"/>
@@ -6174,6 +6910,7 @@
               </a:defRPr>
             </a:lvl6pPr>
             <a:lvl7pPr>
+              <a:buNone/>
               <a:defRPr sz="1500" b="1">
                 <a:solidFill>
                   <a:srgbClr val="BCE6D7"/>
@@ -6184,6 +6921,7 @@
               </a:defRPr>
             </a:lvl7pPr>
             <a:lvl8pPr>
+              <a:buNone/>
               <a:defRPr sz="1500" b="1">
                 <a:solidFill>
                   <a:srgbClr val="BCE6D7"/>
@@ -6194,6 +6932,7 @@
               </a:defRPr>
             </a:lvl8pPr>
             <a:lvl9pPr>
+              <a:buNone/>
               <a:defRPr sz="1500" b="1">
                 <a:solidFill>
                   <a:srgbClr val="BCE6D7"/>
@@ -6204,8 +6943,9 @@
               </a:defRPr>
             </a:lvl9pPr>
           </a:lstStyle>
-          <a:p>
+          <a:p xmlns:a="http://schemas.openxmlformats.org/drawingml/2006/main">
             <a:pPr>
+              <a:buNone/>
               <a:defRPr sz="1500" b="1">
                 <a:solidFill>
                   <a:srgbClr val="BCE6D7"/>
@@ -6224,7 +6964,7 @@
                 <a:ea typeface="Arial"/>
                 <a:cs typeface="Arial"/>
               </a:rPr>
-              <a:t>ESTAT COMPROVAT</a:t>
+              <a:t>EINES I GENERACIÓ</a:t>
             </a:r>
           </a:p>
         </p:txBody>
@@ -6232,34 +6972,34 @@
       <p:sp>
         <p:nvSpPr>
           <p:cNvPr id="5" name="estat-1">
-            <a:extLst>
+            <a:extLst xmlns:a="http://schemas.openxmlformats.org/drawingml/2006/main">
               <a:ext uri="{FF2B5EF4-FFF2-40B4-BE49-F238E27FC236}">
                 <a16:creationId xmlns:a16="http://schemas.microsoft.com/office/drawing/2014/main" id="{D9A09A45-EFD9-41D9-9912-8098E6C56CBB}"/>
               </a:ext>
             </a:extLst>
           </p:cNvPr>
           <p:cNvSpPr>
-            <a:spLocks noGrp="1"/>
+            <a:spLocks xmlns:a="http://schemas.openxmlformats.org/drawingml/2006/main" noGrp="1"/>
           </p:cNvSpPr>
           <p:nvPr/>
         </p:nvSpPr>
         <p:spPr>
-          <a:xfrm>
+          <a:xfrm xmlns:a="http://schemas.openxmlformats.org/drawingml/2006/main">
             <a:off x="6172200" y="2076450"/>
             <a:ext cx="5238750" cy="600075"/>
           </a:xfrm>
-          <a:prstGeom prst="rect">
+          <a:prstGeom xmlns:a="http://schemas.openxmlformats.org/drawingml/2006/main" prst="rect">
             <a:avLst/>
           </a:prstGeom>
-          <a:noFill/>
-          <a:ln w="0">
+          <a:noFill xmlns:a="http://schemas.openxmlformats.org/drawingml/2006/main"/>
+          <a:ln xmlns:a="http://schemas.openxmlformats.org/drawingml/2006/main" w="0">
             <a:noFill/>
             <a:prstDash val="solid"/>
           </a:ln>
         </p:spPr>
         <p:txBody>
-          <a:bodyPr/>
-          <a:lstStyle>
+          <a:bodyPr xmlns:a="http://schemas.openxmlformats.org/drawingml/2006/main"/>
+          <a:lstStyle xmlns:a="http://schemas.openxmlformats.org/drawingml/2006/main">
             <a:defPPr>
               <a:defRPr sz="1875" b="1">
                 <a:solidFill>
@@ -6271,6 +7011,7 @@
               </a:defRPr>
             </a:defPPr>
             <a:lvl1pPr>
+              <a:buNone/>
               <a:defRPr sz="1875" b="1">
                 <a:solidFill>
                   <a:srgbClr val="FFFFFF"/>
@@ -6281,6 +7022,7 @@
               </a:defRPr>
             </a:lvl1pPr>
             <a:lvl2pPr>
+              <a:buNone/>
               <a:defRPr sz="1875" b="1">
                 <a:solidFill>
                   <a:srgbClr val="FFFFFF"/>
@@ -6291,6 +7033,7 @@
               </a:defRPr>
             </a:lvl2pPr>
             <a:lvl3pPr>
+              <a:buNone/>
               <a:defRPr sz="1875" b="1">
                 <a:solidFill>
                   <a:srgbClr val="FFFFFF"/>
@@ -6301,6 +7044,7 @@
               </a:defRPr>
             </a:lvl3pPr>
             <a:lvl4pPr>
+              <a:buNone/>
               <a:defRPr sz="1875" b="1">
                 <a:solidFill>
                   <a:srgbClr val="FFFFFF"/>
@@ -6311,6 +7055,7 @@
               </a:defRPr>
             </a:lvl4pPr>
             <a:lvl5pPr>
+              <a:buNone/>
               <a:defRPr sz="1875" b="1">
                 <a:solidFill>
                   <a:srgbClr val="FFFFFF"/>
@@ -6321,6 +7066,7 @@
               </a:defRPr>
             </a:lvl5pPr>
             <a:lvl6pPr>
+              <a:buNone/>
               <a:defRPr sz="1875" b="1">
                 <a:solidFill>
                   <a:srgbClr val="FFFFFF"/>
@@ -6331,6 +7077,7 @@
               </a:defRPr>
             </a:lvl6pPr>
             <a:lvl7pPr>
+              <a:buNone/>
               <a:defRPr sz="1875" b="1">
                 <a:solidFill>
                   <a:srgbClr val="FFFFFF"/>
@@ -6341,6 +7088,7 @@
               </a:defRPr>
             </a:lvl7pPr>
             <a:lvl8pPr>
+              <a:buNone/>
               <a:defRPr sz="1875" b="1">
                 <a:solidFill>
                   <a:srgbClr val="FFFFFF"/>
@@ -6351,6 +7099,7 @@
               </a:defRPr>
             </a:lvl8pPr>
             <a:lvl9pPr>
+              <a:buNone/>
               <a:defRPr sz="1875" b="1">
                 <a:solidFill>
                   <a:srgbClr val="FFFFFF"/>
@@ -6361,8 +7110,9 @@
               </a:defRPr>
             </a:lvl9pPr>
           </a:lstStyle>
-          <a:p>
+          <a:p xmlns:a="http://schemas.openxmlformats.org/drawingml/2006/main">
             <a:pPr>
+              <a:buNone/>
               <a:defRPr sz="1875" b="1">
                 <a:solidFill>
                   <a:srgbClr val="FFFFFF"/>
@@ -6373,7 +7123,7 @@
               </a:defRPr>
             </a:pPr>
             <a:r>
-              <a:rPr sz="1875" b="1" dirty="0">
+              <a:rPr sz="1875" b="1">
                 <a:solidFill>
                   <a:srgbClr val="FFFFFF"/>
                 </a:solidFill>
@@ -6381,29 +7131,7 @@
                 <a:ea typeface="Arial"/>
                 <a:cs typeface="Arial"/>
               </a:rPr>
-              <a:t>Mode actual: </a:t>
-            </a:r>
-            <a:r>
-              <a:rPr sz="1875" b="1" dirty="0" err="1">
-                <a:solidFill>
-                  <a:srgbClr val="FFFFFF"/>
-                </a:solidFill>
-                <a:latin typeface="Arial"/>
-                <a:ea typeface="Arial"/>
-                <a:cs typeface="Arial"/>
-              </a:rPr>
-              <a:t>generador</a:t>
-            </a:r>
-            <a:r>
-              <a:rPr sz="1875" b="1" dirty="0">
-                <a:solidFill>
-                  <a:srgbClr val="FFFFFF"/>
-                </a:solidFill>
-                <a:latin typeface="Arial"/>
-                <a:ea typeface="Arial"/>
-                <a:cs typeface="Arial"/>
-              </a:rPr>
-              <a:t> local sense IA</a:t>
+              <a:t>Codex per programar, revisar i documentar</a:t>
             </a:r>
           </a:p>
         </p:txBody>
@@ -6411,34 +7139,34 @@
       <p:sp>
         <p:nvSpPr>
           <p:cNvPr id="6" name="estat-2">
-            <a:extLst>
+            <a:extLst xmlns:a="http://schemas.openxmlformats.org/drawingml/2006/main">
               <a:ext uri="{FF2B5EF4-FFF2-40B4-BE49-F238E27FC236}">
                 <a16:creationId xmlns:a16="http://schemas.microsoft.com/office/drawing/2014/main" id="{DC3505A5-1820-4827-B8B8-EE2A8477786B}"/>
               </a:ext>
             </a:extLst>
           </p:cNvPr>
           <p:cNvSpPr>
-            <a:spLocks noGrp="1"/>
+            <a:spLocks xmlns:a="http://schemas.openxmlformats.org/drawingml/2006/main" noGrp="1"/>
           </p:cNvSpPr>
           <p:nvPr/>
         </p:nvSpPr>
         <p:spPr>
-          <a:xfrm>
+          <a:xfrm xmlns:a="http://schemas.openxmlformats.org/drawingml/2006/main">
             <a:off x="6172200" y="2838450"/>
             <a:ext cx="5238750" cy="866775"/>
           </a:xfrm>
-          <a:prstGeom prst="rect">
+          <a:prstGeom xmlns:a="http://schemas.openxmlformats.org/drawingml/2006/main" prst="rect">
             <a:avLst/>
           </a:prstGeom>
-          <a:noFill/>
-          <a:ln w="0">
+          <a:noFill xmlns:a="http://schemas.openxmlformats.org/drawingml/2006/main"/>
+          <a:ln xmlns:a="http://schemas.openxmlformats.org/drawingml/2006/main" w="0">
             <a:noFill/>
             <a:prstDash val="solid"/>
           </a:ln>
         </p:spPr>
         <p:txBody>
-          <a:bodyPr/>
-          <a:lstStyle>
+          <a:bodyPr xmlns:a="http://schemas.openxmlformats.org/drawingml/2006/main"/>
+          <a:lstStyle xmlns:a="http://schemas.openxmlformats.org/drawingml/2006/main">
             <a:defPPr>
               <a:defRPr sz="1875" b="0">
                 <a:solidFill>
@@ -6450,6 +7178,7 @@
               </a:defRPr>
             </a:defPPr>
             <a:lvl1pPr>
+              <a:buNone/>
               <a:defRPr sz="1875" b="0">
                 <a:solidFill>
                   <a:srgbClr val="FFFFFF"/>
@@ -6460,6 +7189,7 @@
               </a:defRPr>
             </a:lvl1pPr>
             <a:lvl2pPr>
+              <a:buNone/>
               <a:defRPr sz="1875" b="0">
                 <a:solidFill>
                   <a:srgbClr val="FFFFFF"/>
@@ -6470,6 +7200,7 @@
               </a:defRPr>
             </a:lvl2pPr>
             <a:lvl3pPr>
+              <a:buNone/>
               <a:defRPr sz="1875" b="0">
                 <a:solidFill>
                   <a:srgbClr val="FFFFFF"/>
@@ -6480,6 +7211,7 @@
               </a:defRPr>
             </a:lvl3pPr>
             <a:lvl4pPr>
+              <a:buNone/>
               <a:defRPr sz="1875" b="0">
                 <a:solidFill>
                   <a:srgbClr val="FFFFFF"/>
@@ -6490,6 +7222,7 @@
               </a:defRPr>
             </a:lvl4pPr>
             <a:lvl5pPr>
+              <a:buNone/>
               <a:defRPr sz="1875" b="0">
                 <a:solidFill>
                   <a:srgbClr val="FFFFFF"/>
@@ -6500,6 +7233,7 @@
               </a:defRPr>
             </a:lvl5pPr>
             <a:lvl6pPr>
+              <a:buNone/>
               <a:defRPr sz="1875" b="0">
                 <a:solidFill>
                   <a:srgbClr val="FFFFFF"/>
@@ -6510,6 +7244,7 @@
               </a:defRPr>
             </a:lvl6pPr>
             <a:lvl7pPr>
+              <a:buNone/>
               <a:defRPr sz="1875" b="0">
                 <a:solidFill>
                   <a:srgbClr val="FFFFFF"/>
@@ -6520,6 +7255,7 @@
               </a:defRPr>
             </a:lvl7pPr>
             <a:lvl8pPr>
+              <a:buNone/>
               <a:defRPr sz="1875" b="0">
                 <a:solidFill>
                   <a:srgbClr val="FFFFFF"/>
@@ -6530,6 +7266,7 @@
               </a:defRPr>
             </a:lvl8pPr>
             <a:lvl9pPr>
+              <a:buNone/>
               <a:defRPr sz="1875" b="0">
                 <a:solidFill>
                   <a:srgbClr val="FFFFFF"/>
@@ -6540,8 +7277,9 @@
               </a:defRPr>
             </a:lvl9pPr>
           </a:lstStyle>
-          <a:p>
+          <a:p xmlns:a="http://schemas.openxmlformats.org/drawingml/2006/main">
             <a:pPr>
+              <a:buNone/>
               <a:defRPr sz="1875" b="0">
                 <a:solidFill>
                   <a:srgbClr val="FFFFFF"/>
@@ -6560,7 +7298,7 @@
                 <a:ea typeface="Arial"/>
                 <a:cs typeface="Arial"/>
               </a:rPr>
-              <a:t>Adaptador Groq implementat i provat amb resposta simulada</a:t>
+              <a:t>Generació del menú amb l’algorisme local del servidor</a:t>
             </a:r>
           </a:p>
         </p:txBody>
@@ -6568,34 +7306,34 @@
       <p:sp>
         <p:nvSpPr>
           <p:cNvPr id="7" name="estat-3">
-            <a:extLst>
+            <a:extLst xmlns:a="http://schemas.openxmlformats.org/drawingml/2006/main">
               <a:ext uri="{FF2B5EF4-FFF2-40B4-BE49-F238E27FC236}">
                 <a16:creationId xmlns:a16="http://schemas.microsoft.com/office/drawing/2014/main" id="{C758A859-A5C9-4D7C-BF43-E0F20C570BF1}"/>
               </a:ext>
             </a:extLst>
           </p:cNvPr>
           <p:cNvSpPr>
-            <a:spLocks noGrp="1"/>
+            <a:spLocks xmlns:a="http://schemas.openxmlformats.org/drawingml/2006/main" noGrp="1"/>
           </p:cNvSpPr>
           <p:nvPr/>
         </p:nvSpPr>
         <p:spPr>
-          <a:xfrm>
+          <a:xfrm xmlns:a="http://schemas.openxmlformats.org/drawingml/2006/main">
             <a:off x="6172200" y="3829050"/>
             <a:ext cx="5238750" cy="866775"/>
           </a:xfrm>
-          <a:prstGeom prst="rect">
+          <a:prstGeom xmlns:a="http://schemas.openxmlformats.org/drawingml/2006/main" prst="rect">
             <a:avLst/>
           </a:prstGeom>
-          <a:noFill/>
-          <a:ln w="0">
+          <a:noFill xmlns:a="http://schemas.openxmlformats.org/drawingml/2006/main"/>
+          <a:ln xmlns:a="http://schemas.openxmlformats.org/drawingml/2006/main" w="0">
             <a:noFill/>
             <a:prstDash val="solid"/>
           </a:ln>
         </p:spPr>
         <p:txBody>
-          <a:bodyPr/>
-          <a:lstStyle>
+          <a:bodyPr xmlns:a="http://schemas.openxmlformats.org/drawingml/2006/main"/>
+          <a:lstStyle xmlns:a="http://schemas.openxmlformats.org/drawingml/2006/main">
             <a:defPPr>
               <a:defRPr sz="1875" b="0">
                 <a:solidFill>
@@ -6607,6 +7345,7 @@
               </a:defRPr>
             </a:defPPr>
             <a:lvl1pPr>
+              <a:buNone/>
               <a:defRPr sz="1875" b="0">
                 <a:solidFill>
                   <a:srgbClr val="FFFFFF"/>
@@ -6617,6 +7356,7 @@
               </a:defRPr>
             </a:lvl1pPr>
             <a:lvl2pPr>
+              <a:buNone/>
               <a:defRPr sz="1875" b="0">
                 <a:solidFill>
                   <a:srgbClr val="FFFFFF"/>
@@ -6627,6 +7367,7 @@
               </a:defRPr>
             </a:lvl2pPr>
             <a:lvl3pPr>
+              <a:buNone/>
               <a:defRPr sz="1875" b="0">
                 <a:solidFill>
                   <a:srgbClr val="FFFFFF"/>
@@ -6637,6 +7378,7 @@
               </a:defRPr>
             </a:lvl3pPr>
             <a:lvl4pPr>
+              <a:buNone/>
               <a:defRPr sz="1875" b="0">
                 <a:solidFill>
                   <a:srgbClr val="FFFFFF"/>
@@ -6647,6 +7389,7 @@
               </a:defRPr>
             </a:lvl4pPr>
             <a:lvl5pPr>
+              <a:buNone/>
               <a:defRPr sz="1875" b="0">
                 <a:solidFill>
                   <a:srgbClr val="FFFFFF"/>
@@ -6657,6 +7400,7 @@
               </a:defRPr>
             </a:lvl5pPr>
             <a:lvl6pPr>
+              <a:buNone/>
               <a:defRPr sz="1875" b="0">
                 <a:solidFill>
                   <a:srgbClr val="FFFFFF"/>
@@ -6667,6 +7411,7 @@
               </a:defRPr>
             </a:lvl6pPr>
             <a:lvl7pPr>
+              <a:buNone/>
               <a:defRPr sz="1875" b="0">
                 <a:solidFill>
                   <a:srgbClr val="FFFFFF"/>
@@ -6677,6 +7422,7 @@
               </a:defRPr>
             </a:lvl7pPr>
             <a:lvl8pPr>
+              <a:buNone/>
               <a:defRPr sz="1875" b="0">
                 <a:solidFill>
                   <a:srgbClr val="FFFFFF"/>
@@ -6687,6 +7433,7 @@
               </a:defRPr>
             </a:lvl8pPr>
             <a:lvl9pPr>
+              <a:buNone/>
               <a:defRPr sz="1875" b="0">
                 <a:solidFill>
                   <a:srgbClr val="FFFFFF"/>
@@ -6697,8 +7444,9 @@
               </a:defRPr>
             </a:lvl9pPr>
           </a:lstStyle>
-          <a:p>
+          <a:p xmlns:a="http://schemas.openxmlformats.org/drawingml/2006/main">
             <a:pPr>
+              <a:buNone/>
               <a:defRPr sz="1875" b="0">
                 <a:solidFill>
                   <a:srgbClr val="FFFFFF"/>
@@ -6709,7 +7457,7 @@
               </a:defRPr>
             </a:pPr>
             <a:r>
-              <a:rPr sz="1875" b="0" dirty="0" err="1">
+              <a:rPr sz="1875" b="0">
                 <a:solidFill>
                   <a:srgbClr val="FFFFFF"/>
                 </a:solidFill>
@@ -6717,75 +7465,9 @@
                 <a:ea typeface="Arial"/>
                 <a:cs typeface="Arial"/>
               </a:rPr>
-              <a:t>Crida</a:t>
+              <a:t>Adaptador de model implementat; crida real pendent de validar</a:t>
             </a:r>
-            <a:r>
-              <a:rPr sz="1875" b="0" dirty="0">
-                <a:solidFill>
-                  <a:srgbClr val="FFFFFF"/>
-                </a:solidFill>
-                <a:latin typeface="Arial"/>
-                <a:ea typeface="Arial"/>
-                <a:cs typeface="Arial"/>
-              </a:rPr>
-              <a:t> real al </a:t>
-            </a:r>
-            <a:r>
-              <a:rPr sz="1875" b="0" dirty="0" err="1">
-                <a:solidFill>
-                  <a:srgbClr val="FFFFFF"/>
-                </a:solidFill>
-                <a:latin typeface="Arial"/>
-                <a:ea typeface="Arial"/>
-                <a:cs typeface="Arial"/>
-              </a:rPr>
-              <a:t>proveïdor</a:t>
-            </a:r>
-            <a:r>
-              <a:rPr sz="1875" b="0" dirty="0">
-                <a:solidFill>
-                  <a:srgbClr val="FFFFFF"/>
-                </a:solidFill>
-                <a:latin typeface="Arial"/>
-                <a:ea typeface="Arial"/>
-                <a:cs typeface="Arial"/>
-              </a:rPr>
-              <a:t> </a:t>
-            </a:r>
-            <a:r>
-              <a:rPr sz="1875" b="0" dirty="0" err="1">
-                <a:solidFill>
-                  <a:srgbClr val="FFFFFF"/>
-                </a:solidFill>
-                <a:latin typeface="Arial"/>
-                <a:ea typeface="Arial"/>
-                <a:cs typeface="Arial"/>
-              </a:rPr>
-              <a:t>encara</a:t>
-            </a:r>
-            <a:r>
-              <a:rPr sz="1875" b="0" dirty="0">
-                <a:solidFill>
-                  <a:srgbClr val="FFFFFF"/>
-                </a:solidFill>
-                <a:latin typeface="Arial"/>
-                <a:ea typeface="Arial"/>
-                <a:cs typeface="Arial"/>
-              </a:rPr>
-              <a:t> pendent de </a:t>
-            </a:r>
-            <a:r>
-              <a:rPr sz="1875" b="0" dirty="0" err="1">
-                <a:solidFill>
-                  <a:srgbClr val="FFFFFF"/>
-                </a:solidFill>
-                <a:latin typeface="Arial"/>
-                <a:ea typeface="Arial"/>
-                <a:cs typeface="Arial"/>
-              </a:rPr>
-              <a:t>verificar</a:t>
-            </a:r>
-            <a:endParaRPr sz="1875" b="0" dirty="0">
+            <a:endParaRPr sz="1875" b="0">
               <a:solidFill>
                 <a:srgbClr val="FFFFFF"/>
               </a:solidFill>
@@ -6799,34 +7481,34 @@
       <p:sp>
         <p:nvSpPr>
           <p:cNvPr id="8" name="eines">
-            <a:extLst>
+            <a:extLst xmlns:a="http://schemas.openxmlformats.org/drawingml/2006/main">
               <a:ext uri="{FF2B5EF4-FFF2-40B4-BE49-F238E27FC236}">
                 <a16:creationId xmlns:a16="http://schemas.microsoft.com/office/drawing/2014/main" id="{93012077-A1C1-4713-8FEE-AE1C4CD1E23E}"/>
               </a:ext>
             </a:extLst>
           </p:cNvPr>
           <p:cNvSpPr>
-            <a:spLocks noGrp="1"/>
+            <a:spLocks xmlns:a="http://schemas.openxmlformats.org/drawingml/2006/main" noGrp="1"/>
           </p:cNvSpPr>
           <p:nvPr/>
         </p:nvSpPr>
         <p:spPr>
-          <a:xfrm>
+          <a:xfrm xmlns:a="http://schemas.openxmlformats.org/drawingml/2006/main">
             <a:off x="609600" y="5210175"/>
             <a:ext cx="10763250" cy="438150"/>
           </a:xfrm>
-          <a:prstGeom prst="rect">
+          <a:prstGeom xmlns:a="http://schemas.openxmlformats.org/drawingml/2006/main" prst="rect">
             <a:avLst/>
           </a:prstGeom>
-          <a:noFill/>
-          <a:ln w="0">
+          <a:noFill xmlns:a="http://schemas.openxmlformats.org/drawingml/2006/main"/>
+          <a:ln xmlns:a="http://schemas.openxmlformats.org/drawingml/2006/main" w="0">
             <a:noFill/>
             <a:prstDash val="solid"/>
           </a:ln>
         </p:spPr>
         <p:txBody>
-          <a:bodyPr/>
-          <a:lstStyle>
+          <a:bodyPr xmlns:a="http://schemas.openxmlformats.org/drawingml/2006/main"/>
+          <a:lstStyle xmlns:a="http://schemas.openxmlformats.org/drawingml/2006/main">
             <a:defPPr>
               <a:defRPr sz="1725" b="1">
                 <a:solidFill>
@@ -6838,6 +7520,7 @@
               </a:defRPr>
             </a:defPPr>
             <a:lvl1pPr>
+              <a:buNone/>
               <a:defRPr sz="1725" b="1">
                 <a:solidFill>
                   <a:srgbClr val="BCE6D7"/>
@@ -6848,6 +7531,7 @@
               </a:defRPr>
             </a:lvl1pPr>
             <a:lvl2pPr>
+              <a:buNone/>
               <a:defRPr sz="1725" b="1">
                 <a:solidFill>
                   <a:srgbClr val="BCE6D7"/>
@@ -6858,6 +7542,7 @@
               </a:defRPr>
             </a:lvl2pPr>
             <a:lvl3pPr>
+              <a:buNone/>
               <a:defRPr sz="1725" b="1">
                 <a:solidFill>
                   <a:srgbClr val="BCE6D7"/>
@@ -6868,6 +7553,7 @@
               </a:defRPr>
             </a:lvl3pPr>
             <a:lvl4pPr>
+              <a:buNone/>
               <a:defRPr sz="1725" b="1">
                 <a:solidFill>
                   <a:srgbClr val="BCE6D7"/>
@@ -6878,6 +7564,7 @@
               </a:defRPr>
             </a:lvl4pPr>
             <a:lvl5pPr>
+              <a:buNone/>
               <a:defRPr sz="1725" b="1">
                 <a:solidFill>
                   <a:srgbClr val="BCE6D7"/>
@@ -6888,6 +7575,7 @@
               </a:defRPr>
             </a:lvl5pPr>
             <a:lvl6pPr>
+              <a:buNone/>
               <a:defRPr sz="1725" b="1">
                 <a:solidFill>
                   <a:srgbClr val="BCE6D7"/>
@@ -6898,6 +7586,7 @@
               </a:defRPr>
             </a:lvl6pPr>
             <a:lvl7pPr>
+              <a:buNone/>
               <a:defRPr sz="1725" b="1">
                 <a:solidFill>
                   <a:srgbClr val="BCE6D7"/>
@@ -6908,6 +7597,7 @@
               </a:defRPr>
             </a:lvl7pPr>
             <a:lvl8pPr>
+              <a:buNone/>
               <a:defRPr sz="1725" b="1">
                 <a:solidFill>
                   <a:srgbClr val="BCE6D7"/>
@@ -6918,6 +7608,7 @@
               </a:defRPr>
             </a:lvl8pPr>
             <a:lvl9pPr>
+              <a:buNone/>
               <a:defRPr sz="1725" b="1">
                 <a:solidFill>
                   <a:srgbClr val="BCE6D7"/>
@@ -6928,8 +7619,9 @@
               </a:defRPr>
             </a:lvl9pPr>
           </a:lstStyle>
-          <a:p>
+          <a:p xmlns:a="http://schemas.openxmlformats.org/drawingml/2006/main">
             <a:pPr>
+              <a:buNone/>
               <a:defRPr sz="1725" b="1">
                 <a:solidFill>
                   <a:srgbClr val="BCE6D7"/>
@@ -6940,7 +7632,7 @@
               </a:defRPr>
             </a:pPr>
             <a:r>
-              <a:rPr sz="1725" b="1" dirty="0">
+              <a:rPr sz="1725" b="1">
                 <a:solidFill>
                   <a:srgbClr val="BCE6D7"/>
                 </a:solidFill>
@@ -6948,130 +7640,9 @@
                 <a:ea typeface="Arial"/>
                 <a:cs typeface="Arial"/>
               </a:rPr>
-              <a:t>Eines </a:t>
+              <a:t>Administrador: usuari operario · contrasenya a la guia d’ús</a:t>
             </a:r>
-            <a:r>
-              <a:rPr sz="1725" b="1" dirty="0" err="1">
-                <a:solidFill>
-                  <a:srgbClr val="BCE6D7"/>
-                </a:solidFill>
-                <a:latin typeface="Arial"/>
-                <a:ea typeface="Arial"/>
-                <a:cs typeface="Arial"/>
-              </a:rPr>
-              <a:t>utilitzades</a:t>
-            </a:r>
-            <a:r>
-              <a:rPr sz="1725" b="1" dirty="0">
-                <a:solidFill>
-                  <a:srgbClr val="BCE6D7"/>
-                </a:solidFill>
-                <a:latin typeface="Arial"/>
-                <a:ea typeface="Arial"/>
-                <a:cs typeface="Arial"/>
-              </a:rPr>
-              <a:t>: Codex per </a:t>
-            </a:r>
-            <a:r>
-              <a:rPr sz="1725" b="1" dirty="0" err="1">
-                <a:solidFill>
-                  <a:srgbClr val="BCE6D7"/>
-                </a:solidFill>
-                <a:latin typeface="Arial"/>
-                <a:ea typeface="Arial"/>
-                <a:cs typeface="Arial"/>
-              </a:rPr>
-              <a:t>programar</a:t>
-            </a:r>
-            <a:r>
-              <a:rPr sz="1725" b="1" dirty="0">
-                <a:solidFill>
-                  <a:srgbClr val="BCE6D7"/>
-                </a:solidFill>
-                <a:latin typeface="Arial"/>
-                <a:ea typeface="Arial"/>
-                <a:cs typeface="Arial"/>
-              </a:rPr>
-              <a:t>, </a:t>
-            </a:r>
-            <a:r>
-              <a:rPr sz="1725" b="1" dirty="0" err="1">
-                <a:solidFill>
-                  <a:srgbClr val="BCE6D7"/>
-                </a:solidFill>
-                <a:latin typeface="Arial"/>
-                <a:ea typeface="Arial"/>
-                <a:cs typeface="Arial"/>
-              </a:rPr>
-              <a:t>revisar</a:t>
-            </a:r>
-            <a:r>
-              <a:rPr sz="1725" b="1" dirty="0">
-                <a:solidFill>
-                  <a:srgbClr val="BCE6D7"/>
-                </a:solidFill>
-                <a:latin typeface="Arial"/>
-                <a:ea typeface="Arial"/>
-                <a:cs typeface="Arial"/>
-              </a:rPr>
-              <a:t> </a:t>
-            </a:r>
-            <a:r>
-              <a:rPr sz="1725" b="1" dirty="0" err="1">
-                <a:solidFill>
-                  <a:srgbClr val="BCE6D7"/>
-                </a:solidFill>
-                <a:latin typeface="Arial"/>
-                <a:ea typeface="Arial"/>
-                <a:cs typeface="Arial"/>
-              </a:rPr>
-              <a:t>i</a:t>
-            </a:r>
-            <a:r>
-              <a:rPr sz="1725" b="1" dirty="0">
-                <a:solidFill>
-                  <a:srgbClr val="BCE6D7"/>
-                </a:solidFill>
-                <a:latin typeface="Arial"/>
-                <a:ea typeface="Arial"/>
-                <a:cs typeface="Arial"/>
-              </a:rPr>
-              <a:t> </a:t>
-            </a:r>
-            <a:r>
-              <a:rPr sz="1725" b="1" dirty="0" err="1">
-                <a:solidFill>
-                  <a:srgbClr val="BCE6D7"/>
-                </a:solidFill>
-                <a:latin typeface="Arial"/>
-                <a:ea typeface="Arial"/>
-                <a:cs typeface="Arial"/>
-              </a:rPr>
-              <a:t>documentar</a:t>
-            </a:r>
-            <a:r>
-              <a:rPr sz="1725" b="1" dirty="0">
-                <a:solidFill>
-                  <a:srgbClr val="BCE6D7"/>
-                </a:solidFill>
-                <a:latin typeface="Arial"/>
-                <a:ea typeface="Arial"/>
-                <a:cs typeface="Arial"/>
-              </a:rPr>
-              <a:t> el </a:t>
-            </a:r>
-            <a:r>
-              <a:rPr sz="1725" b="1" dirty="0" err="1">
-                <a:solidFill>
-                  <a:srgbClr val="BCE6D7"/>
-                </a:solidFill>
-                <a:latin typeface="Arial"/>
-                <a:ea typeface="Arial"/>
-                <a:cs typeface="Arial"/>
-              </a:rPr>
-              <a:t>prototip</a:t>
-            </a:r>
-            <a:endParaRPr sz="1725" b="1" dirty="0">
+            <a:endParaRPr sz="1725" b="1">
               <a:solidFill>
                 <a:srgbClr val="BCE6D7"/>
               </a:solidFill>
@@ -7085,34 +7656,34 @@
       <p:sp>
         <p:nvSpPr>
           <p:cNvPr id="9" name="pendent">
-            <a:extLst>
+            <a:extLst xmlns:a="http://schemas.openxmlformats.org/drawingml/2006/main">
               <a:ext uri="{FF2B5EF4-FFF2-40B4-BE49-F238E27FC236}">
                 <a16:creationId xmlns:a16="http://schemas.microsoft.com/office/drawing/2014/main" id="{974B8A7E-BDC3-43CD-A766-886EDC3EDB60}"/>
               </a:ext>
             </a:extLst>
           </p:cNvPr>
           <p:cNvSpPr>
-            <a:spLocks noGrp="1"/>
+            <a:spLocks xmlns:a="http://schemas.openxmlformats.org/drawingml/2006/main" noGrp="1"/>
           </p:cNvSpPr>
           <p:nvPr/>
         </p:nvSpPr>
         <p:spPr>
-          <a:xfrm>
+          <a:xfrm xmlns:a="http://schemas.openxmlformats.org/drawingml/2006/main">
             <a:off x="609600" y="5810250"/>
             <a:ext cx="10763250" cy="552450"/>
           </a:xfrm>
-          <a:prstGeom prst="rect">
+          <a:prstGeom xmlns:a="http://schemas.openxmlformats.org/drawingml/2006/main" prst="rect">
             <a:avLst/>
           </a:prstGeom>
-          <a:noFill/>
-          <a:ln w="0">
+          <a:noFill xmlns:a="http://schemas.openxmlformats.org/drawingml/2006/main"/>
+          <a:ln xmlns:a="http://schemas.openxmlformats.org/drawingml/2006/main" w="0">
             <a:noFill/>
             <a:prstDash val="solid"/>
           </a:ln>
         </p:spPr>
         <p:txBody>
-          <a:bodyPr/>
-          <a:lstStyle>
+          <a:bodyPr xmlns:a="http://schemas.openxmlformats.org/drawingml/2006/main"/>
+          <a:lstStyle xmlns:a="http://schemas.openxmlformats.org/drawingml/2006/main">
             <a:defPPr>
               <a:defRPr sz="1500" b="0">
                 <a:solidFill>
@@ -7124,6 +7695,7 @@
               </a:defRPr>
             </a:defPPr>
             <a:lvl1pPr>
+              <a:buNone/>
               <a:defRPr sz="1500" b="0">
                 <a:solidFill>
                   <a:srgbClr val="FFFFFF"/>
@@ -7134,6 +7706,7 @@
               </a:defRPr>
             </a:lvl1pPr>
             <a:lvl2pPr>
+              <a:buNone/>
               <a:defRPr sz="1500" b="0">
                 <a:solidFill>
                   <a:srgbClr val="FFFFFF"/>
@@ -7144,6 +7717,7 @@
               </a:defRPr>
             </a:lvl2pPr>
             <a:lvl3pPr>
+              <a:buNone/>
               <a:defRPr sz="1500" b="0">
                 <a:solidFill>
                   <a:srgbClr val="FFFFFF"/>
@@ -7154,6 +7728,7 @@
               </a:defRPr>
             </a:lvl3pPr>
             <a:lvl4pPr>
+              <a:buNone/>
               <a:defRPr sz="1500" b="0">
                 <a:solidFill>
                   <a:srgbClr val="FFFFFF"/>
@@ -7164,6 +7739,7 @@
               </a:defRPr>
             </a:lvl4pPr>
             <a:lvl5pPr>
+              <a:buNone/>
               <a:defRPr sz="1500" b="0">
                 <a:solidFill>
                   <a:srgbClr val="FFFFFF"/>
@@ -7174,6 +7750,7 @@
               </a:defRPr>
             </a:lvl5pPr>
             <a:lvl6pPr>
+              <a:buNone/>
               <a:defRPr sz="1500" b="0">
                 <a:solidFill>
                   <a:srgbClr val="FFFFFF"/>
@@ -7184,6 +7761,7 @@
               </a:defRPr>
             </a:lvl6pPr>
             <a:lvl7pPr>
+              <a:buNone/>
               <a:defRPr sz="1500" b="0">
                 <a:solidFill>
                   <a:srgbClr val="FFFFFF"/>
@@ -7194,6 +7772,7 @@
               </a:defRPr>
             </a:lvl7pPr>
             <a:lvl8pPr>
+              <a:buNone/>
               <a:defRPr sz="1500" b="0">
                 <a:solidFill>
                   <a:srgbClr val="FFFFFF"/>
@@ -7204,6 +7783,7 @@
               </a:defRPr>
             </a:lvl8pPr>
             <a:lvl9pPr>
+              <a:buNone/>
               <a:defRPr sz="1500" b="0">
                 <a:solidFill>
                   <a:srgbClr val="FFFFFF"/>
@@ -7214,8 +7794,9 @@
               </a:defRPr>
             </a:lvl9pPr>
           </a:lstStyle>
-          <a:p>
+          <a:p xmlns:a="http://schemas.openxmlformats.org/drawingml/2006/main">
             <a:pPr>
+              <a:buNone/>
               <a:defRPr sz="1500" b="0">
                 <a:solidFill>
                   <a:srgbClr val="FFFFFF"/>
@@ -7234,108 +7815,9 @@
                 <a:ea typeface="Arial"/>
                 <a:cs typeface="Arial"/>
               </a:rPr>
-              <a:t>Pendent per a la defensa: 2 proves externes </a:t>
+              <a:t>Per completar la pràctica: 2 proves externes i 1 millora basada en les observacions</a:t>
             </a:r>
-            <a:r>
-              <a:rPr sz="1500" b="0" dirty="0" err="1">
-                <a:solidFill>
-                  <a:srgbClr val="FFFFFF"/>
-                </a:solidFill>
-                <a:latin typeface="Arial"/>
-                <a:ea typeface="Arial"/>
-                <a:cs typeface="Arial"/>
-              </a:rPr>
-              <a:t>i</a:t>
-            </a:r>
-            <a:r>
-              <a:rPr sz="1500" b="0" dirty="0">
-                <a:solidFill>
-                  <a:srgbClr val="FFFFFF"/>
-                </a:solidFill>
-                <a:latin typeface="Arial"/>
-                <a:ea typeface="Arial"/>
-                <a:cs typeface="Arial"/>
-              </a:rPr>
-              <a:t> 1 </a:t>
-            </a:r>
-            <a:r>
-              <a:rPr sz="1500" b="0" dirty="0" err="1">
-                <a:solidFill>
-                  <a:srgbClr val="FFFFFF"/>
-                </a:solidFill>
-                <a:latin typeface="Arial"/>
-                <a:ea typeface="Arial"/>
-                <a:cs typeface="Arial"/>
-              </a:rPr>
-              <a:t>millora</a:t>
-            </a:r>
-            <a:r>
-              <a:rPr sz="1500" b="0" dirty="0">
-                <a:solidFill>
-                  <a:srgbClr val="FFFFFF"/>
-                </a:solidFill>
-                <a:latin typeface="Arial"/>
-                <a:ea typeface="Arial"/>
-                <a:cs typeface="Arial"/>
-              </a:rPr>
-              <a:t> </a:t>
-            </a:r>
-            <a:r>
-              <a:rPr sz="1500" b="0" dirty="0" err="1">
-                <a:solidFill>
-                  <a:srgbClr val="FFFFFF"/>
-                </a:solidFill>
-                <a:latin typeface="Arial"/>
-                <a:ea typeface="Arial"/>
-                <a:cs typeface="Arial"/>
-              </a:rPr>
-              <a:t>basada</a:t>
-            </a:r>
-            <a:r>
-              <a:rPr sz="1500" b="0" dirty="0">
-                <a:solidFill>
-                  <a:srgbClr val="FFFFFF"/>
-                </a:solidFill>
-                <a:latin typeface="Arial"/>
-                <a:ea typeface="Arial"/>
-                <a:cs typeface="Arial"/>
-              </a:rPr>
-              <a:t> </a:t>
-            </a:r>
-            <a:r>
-              <a:rPr sz="1500" b="0" dirty="0" err="1">
-                <a:solidFill>
-                  <a:srgbClr val="FFFFFF"/>
-                </a:solidFill>
-                <a:latin typeface="Arial"/>
-                <a:ea typeface="Arial"/>
-                <a:cs typeface="Arial"/>
-              </a:rPr>
-              <a:t>en</a:t>
-            </a:r>
-            <a:r>
-              <a:rPr sz="1500" b="0" dirty="0">
-                <a:solidFill>
-                  <a:srgbClr val="FFFFFF"/>
-                </a:solidFill>
-                <a:latin typeface="Arial"/>
-                <a:ea typeface="Arial"/>
-                <a:cs typeface="Arial"/>
-              </a:rPr>
-              <a:t> les </a:t>
-            </a:r>
-            <a:r>
-              <a:rPr sz="1500" b="0" dirty="0" err="1">
-                <a:solidFill>
-                  <a:srgbClr val="FFFFFF"/>
-                </a:solidFill>
-                <a:latin typeface="Arial"/>
-                <a:ea typeface="Arial"/>
-                <a:cs typeface="Arial"/>
-              </a:rPr>
-              <a:t>observacions</a:t>
-            </a:r>
-            <a:endParaRPr sz="1500" b="0" dirty="0">
+            <a:endParaRPr sz="1500" b="0">
               <a:solidFill>
                 <a:srgbClr val="FFFFFF"/>
               </a:solidFill>
@@ -7353,9 +7835,6 @@
       </p:ext>
     </p:extLst>
   </p:cSld>
-  <p:clrMapOvr>
-    <a:masterClrMapping/>
-  </p:clrMapOvr>
 </p:sld>
 </file>
 
@@ -7601,254 +8080,5 @@
       </a:bgFillStyleLst>
     </a:fmtScheme>
   </a:themeElements>
-  <a:objectDefaults/>
-  <a:extraClrSchemeLst/>
-</a:theme>
-</file>
-
-<file path=ppt/theme/theme2.xml><?xml version="1.0" encoding="utf-8"?>
-<a:theme xmlns:a="http://schemas.openxmlformats.org/drawingml/2006/main" name="ChatGPT">
-  <a:themeElements>
-    <a:clrScheme name="ChatGPT">
-      <a:dk1>
-        <a:srgbClr val="000000"/>
-      </a:dk1>
-      <a:lt1>
-        <a:srgbClr val="FFFFFF"/>
-      </a:lt1>
-      <a:dk2>
-        <a:srgbClr val="0E2841"/>
-      </a:dk2>
-      <a:lt2>
-        <a:srgbClr val="E8E8E8"/>
-      </a:lt2>
-      <a:accent1>
-        <a:srgbClr val="156082"/>
-      </a:accent1>
-      <a:accent2>
-        <a:srgbClr val="E97132"/>
-      </a:accent2>
-      <a:accent3>
-        <a:srgbClr val="196B24"/>
-      </a:accent3>
-      <a:accent4>
-        <a:srgbClr val="0F9ED5"/>
-      </a:accent4>
-      <a:accent5>
-        <a:srgbClr val="A02B93"/>
-      </a:accent5>
-      <a:accent6>
-        <a:srgbClr val="4EA72E"/>
-      </a:accent6>
-      <a:hlink>
-        <a:srgbClr val="467886"/>
-      </a:hlink>
-      <a:folHlink>
-        <a:srgbClr val="96607D"/>
-      </a:folHlink>
-    </a:clrScheme>
-    <a:fontScheme name="">
-      <a:majorFont>
-        <a:latin typeface="Aptos"/>
-        <a:ea typeface=""/>
-        <a:cs typeface=""/>
-      </a:majorFont>
-      <a:minorFont>
-        <a:latin typeface="Aptos"/>
-        <a:ea typeface=""/>
-        <a:cs typeface=""/>
-      </a:minorFont>
-    </a:fontScheme>
-    <a:fmtScheme name="ChatGPT">
-      <a:fillStyleLst>
-        <a:solidFill>
-          <a:schemeClr val="phClr"/>
-        </a:solidFill>
-        <a:gradFill>
-          <a:gsLst>
-            <a:gs pos="0">
-              <a:schemeClr val="phClr">
-                <a:tint val="67000"/>
-                <a:lumMod val="110000"/>
-                <a:satMod val="105000"/>
-              </a:schemeClr>
-            </a:gs>
-            <a:gs pos="50000">
-              <a:schemeClr val="phClr">
-                <a:tint val="73000"/>
-                <a:lumMod val="105000"/>
-                <a:satMod val="103000"/>
-              </a:schemeClr>
-            </a:gs>
-            <a:gs pos="100000">
-              <a:schemeClr val="phClr">
-                <a:tint val="81000"/>
-                <a:lumMod val="105000"/>
-                <a:satMod val="109000"/>
-              </a:schemeClr>
-            </a:gs>
-          </a:gsLst>
-          <a:lin ang="5400000" scaled="0"/>
-        </a:gradFill>
-        <a:gradFill>
-          <a:gsLst>
-            <a:gs pos="0">
-              <a:schemeClr val="phClr">
-                <a:tint val="94000"/>
-                <a:lumMod val="102000"/>
-                <a:satMod val="103000"/>
-              </a:schemeClr>
-            </a:gs>
-            <a:gs pos="50000">
-              <a:schemeClr val="phClr">
-                <a:shade val="100000"/>
-                <a:lumMod val="100000"/>
-                <a:satMod val="110000"/>
-              </a:schemeClr>
-            </a:gs>
-            <a:gs pos="100000">
-              <a:schemeClr val="phClr">
-                <a:shade val="78000"/>
-                <a:lumMod val="99000"/>
-                <a:satMod val="120000"/>
-              </a:schemeClr>
-            </a:gs>
-          </a:gsLst>
-          <a:lin ang="5400000" scaled="0"/>
-        </a:gradFill>
-      </a:fillStyleLst>
-      <a:lnStyleLst>
-        <a:ln w="12700">
-          <a:solidFill>
-            <a:schemeClr val="phClr"/>
-          </a:solidFill>
-          <a:prstDash val="solid"/>
-        </a:ln>
-        <a:ln w="19050">
-          <a:solidFill>
-            <a:schemeClr val="phClr"/>
-          </a:solidFill>
-          <a:prstDash val="solid"/>
-        </a:ln>
-        <a:ln w="25400">
-          <a:solidFill>
-            <a:schemeClr val="phClr"/>
-          </a:solidFill>
-          <a:prstDash val="solid"/>
-        </a:ln>
-      </a:lnStyleLst>
-      <a:effectStyleLst>
-        <a:effectStyle>
-          <a:effectLst/>
-        </a:effectStyle>
-        <a:effectStyle>
-          <a:effectLst/>
-        </a:effectStyle>
-        <a:effectStyle>
-          <a:effectLst>
-            <a:outerShdw blurRad="57150" dist="19050" dir="5400000">
-              <a:srgbClr val="000000">
-                <a:alpha val="16000"/>
-              </a:srgbClr>
-            </a:outerShdw>
-          </a:effectLst>
-        </a:effectStyle>
-        <a:effectStyle>
-          <a:effectLst>
-            <a:outerShdw blurRad="19050" dist="9525" dir="5400000">
-              <a:srgbClr val="000000">
-                <a:alpha val="6000"/>
-              </a:srgbClr>
-            </a:outerShdw>
-          </a:effectLst>
-        </a:effectStyle>
-        <a:effectStyle>
-          <a:effectLst>
-            <a:outerShdw blurRad="28575" dist="9525" dir="5400000">
-              <a:srgbClr val="000000">
-                <a:alpha val="8000"/>
-              </a:srgbClr>
-            </a:outerShdw>
-          </a:effectLst>
-        </a:effectStyle>
-        <a:effectStyle>
-          <a:effectLst>
-            <a:outerShdw blurRad="57150" dist="19050" dir="5400000">
-              <a:srgbClr val="000000">
-                <a:alpha val="10000"/>
-              </a:srgbClr>
-            </a:outerShdw>
-          </a:effectLst>
-        </a:effectStyle>
-        <a:effectStyle>
-          <a:effectLst>
-            <a:outerShdw blurRad="114300" dist="38100" dir="5400000">
-              <a:srgbClr val="000000">
-                <a:alpha val="12000"/>
-              </a:srgbClr>
-            </a:outerShdw>
-          </a:effectLst>
-        </a:effectStyle>
-        <a:effectStyle>
-          <a:effectLst>
-            <a:outerShdw blurRad="171450" dist="57150" dir="5400000">
-              <a:srgbClr val="000000">
-                <a:alpha val="16000"/>
-              </a:srgbClr>
-            </a:outerShdw>
-          </a:effectLst>
-        </a:effectStyle>
-        <a:effectStyle>
-          <a:effectLst>
-            <a:outerShdw blurRad="266700" dist="95250" dir="5400000">
-              <a:srgbClr val="000000">
-                <a:alpha val="24000"/>
-              </a:srgbClr>
-            </a:outerShdw>
-          </a:effectLst>
-        </a:effectStyle>
-      </a:effectStyleLst>
-      <a:bgFillStyleLst>
-        <a:solidFill>
-          <a:schemeClr val="phClr"/>
-        </a:solidFill>
-        <a:solidFill>
-          <a:schemeClr val="phClr">
-            <a:tint val="95000"/>
-            <a:satMod val="170000"/>
-          </a:schemeClr>
-        </a:solidFill>
-        <a:gradFill>
-          <a:gsLst>
-            <a:gs pos="0">
-              <a:schemeClr val="phClr">
-                <a:tint val="93000"/>
-                <a:shade val="98000"/>
-                <a:lumMod val="102000"/>
-                <a:satMod val="150000"/>
-              </a:schemeClr>
-            </a:gs>
-            <a:gs pos="50000">
-              <a:schemeClr val="phClr">
-                <a:tint val="98000"/>
-                <a:shade val="90000"/>
-                <a:lumMod val="103000"/>
-                <a:satMod val="130000"/>
-              </a:schemeClr>
-            </a:gs>
-            <a:gs pos="100000">
-              <a:schemeClr val="phClr">
-                <a:shade val="63000"/>
-                <a:satMod val="120000"/>
-              </a:schemeClr>
-            </a:gs>
-          </a:gsLst>
-          <a:lin ang="5400000" scaled="0"/>
-        </a:gradFill>
-      </a:bgFillStyleLst>
-    </a:fmtScheme>
-  </a:themeElements>
-  <a:objectDefaults/>
-  <a:extraClrSchemeLst/>
 </a:theme>
 </file>